--- a/에너지경제학/자원에너지경제학_Chapter_1.pptx
+++ b/에너지경제학/자원에너지경제학_Chapter_1.pptx
@@ -12,7 +12,7 @@
     <p:sldId id="405" r:id="rId3"/>
     <p:sldId id="550" r:id="rId4"/>
     <p:sldId id="376" r:id="rId5"/>
-    <p:sldId id="552" r:id="rId6"/>
+    <p:sldId id="553" r:id="rId6"/>
     <p:sldId id="364" r:id="rId7"/>
   </p:sldIdLst>
   <p:sldSz cx="12192000" cy="6858000"/>
@@ -224,7 +224,7 @@
           <a:p>
             <a:fld id="{4A5E00EF-AEA4-43E2-9451-8F9C59A39471}" type="datetimeFigureOut">
               <a:rPr lang="ko-KR" altLang="en-US" smtClean="0"/>
-              <a:t>2026-05-19</a:t>
+              <a:t>2026-06-18</a:t>
             </a:fld>
             <a:endParaRPr lang="ko-KR" altLang="en-US"/>
           </a:p>
@@ -646,7 +646,7 @@
           <a:p>
             <a:fld id="{CD32C56F-BD27-4999-9E6D-D4EACE3DA9F4}" type="datetime1">
               <a:rPr lang="ko-KR" altLang="en-US" smtClean="0"/>
-              <a:t>2026-05-19</a:t>
+              <a:t>2026-06-18</a:t>
             </a:fld>
             <a:endParaRPr lang="ko-KR" altLang="en-US"/>
           </a:p>
@@ -860,7 +860,7 @@
           <a:p>
             <a:fld id="{8EF4A19C-72C8-45CA-8E3F-68A7FA345D6C}" type="datetime1">
               <a:rPr lang="ko-KR" altLang="en-US" smtClean="0"/>
-              <a:t>2026-05-19</a:t>
+              <a:t>2026-06-18</a:t>
             </a:fld>
             <a:endParaRPr lang="ko-KR" altLang="en-US"/>
           </a:p>
@@ -1084,7 +1084,7 @@
           <a:p>
             <a:fld id="{56A175B2-010B-4341-954C-5F8F5C70B124}" type="datetime1">
               <a:rPr lang="ko-KR" altLang="en-US" smtClean="0"/>
-              <a:t>2026-05-19</a:t>
+              <a:t>2026-06-18</a:t>
             </a:fld>
             <a:endParaRPr lang="ko-KR" altLang="en-US"/>
           </a:p>
@@ -1298,7 +1298,7 @@
           <a:p>
             <a:fld id="{16B83F9E-22C9-45CA-9E85-070F1D3EF530}" type="datetime1">
               <a:rPr lang="ko-KR" altLang="en-US" smtClean="0"/>
-              <a:t>2026-05-19</a:t>
+              <a:t>2026-06-18</a:t>
             </a:fld>
             <a:endParaRPr lang="ko-KR" altLang="en-US"/>
           </a:p>
@@ -1589,7 +1589,7 @@
           <a:p>
             <a:fld id="{03278F45-FB3C-4C4D-B89A-7BC3F5F229F6}" type="datetime1">
               <a:rPr lang="ko-KR" altLang="en-US" smtClean="0"/>
-              <a:t>2026-05-19</a:t>
+              <a:t>2026-06-18</a:t>
             </a:fld>
             <a:endParaRPr lang="ko-KR" altLang="en-US"/>
           </a:p>
@@ -1982,7 +1982,7 @@
           <a:p>
             <a:fld id="{38FDAC3C-35A6-415C-9F03-738A6AC328B1}" type="datetime1">
               <a:rPr lang="ko-KR" altLang="en-US" smtClean="0"/>
-              <a:t>2026-05-19</a:t>
+              <a:t>2026-06-18</a:t>
             </a:fld>
             <a:endParaRPr lang="ko-KR" altLang="en-US"/>
           </a:p>
@@ -3576,7 +3576,7 @@
           <a:p>
             <a:fld id="{507A0DF1-AEE6-4B0D-89D2-351E7B3EF65C}" type="datetime1">
               <a:rPr lang="ko-KR" altLang="en-US" smtClean="0"/>
-              <a:t>2026-05-19</a:t>
+              <a:t>2026-06-18</a:t>
             </a:fld>
             <a:endParaRPr lang="ko-KR" altLang="en-US"/>
           </a:p>
@@ -4004,7 +4004,7 @@
           <a:p>
             <a:fld id="{CA93B8C9-630F-4D57-944D-04FD37CECCD3}" type="datetime1">
               <a:rPr lang="ko-KR" altLang="en-US" smtClean="0"/>
-              <a:t>2026-05-19</a:t>
+              <a:t>2026-06-18</a:t>
             </a:fld>
             <a:endParaRPr lang="ko-KR" altLang="en-US"/>
           </a:p>
@@ -4161,7 +4161,7 @@
           <a:p>
             <a:fld id="{E986165A-AC43-4902-9541-874ECD310BA3}" type="datetime1">
               <a:rPr lang="ko-KR" altLang="en-US" smtClean="0"/>
-              <a:t>2026-05-19</a:t>
+              <a:t>2026-06-18</a:t>
             </a:fld>
             <a:endParaRPr lang="ko-KR" altLang="en-US"/>
           </a:p>
@@ -4488,7 +4488,7 @@
           <a:p>
             <a:fld id="{47E6EE6D-2B0E-43A9-87A2-7354CDB998F4}" type="datetime1">
               <a:rPr lang="ko-KR" altLang="en-US" smtClean="0"/>
-              <a:t>2026-05-19</a:t>
+              <a:t>2026-06-18</a:t>
             </a:fld>
             <a:endParaRPr lang="ko-KR" altLang="en-US"/>
           </a:p>
@@ -4792,7 +4792,7 @@
           <a:p>
             <a:fld id="{5CC5944E-0BC8-4FAA-9F94-6B4B05834E10}" type="datetime1">
               <a:rPr lang="ko-KR" altLang="en-US" smtClean="0"/>
-              <a:t>2026-05-19</a:t>
+              <a:t>2026-06-18</a:t>
             </a:fld>
             <a:endParaRPr lang="ko-KR" altLang="en-US"/>
           </a:p>
@@ -7607,7 +7607,7 @@
         <p:spPr>
           <a:xfrm>
             <a:off x="288790" y="958844"/>
-            <a:ext cx="11693660" cy="783356"/>
+            <a:ext cx="11693660" cy="2260683"/>
           </a:xfrm>
           <a:prstGeom prst="rect">
             <a:avLst/>
@@ -7657,6 +7657,58 @@
               <a:rPr lang="ko-KR" altLang="en-US" sz="1600" spc="-50" dirty="0"/>
               <a:t>에너지 시스템</a:t>
             </a:r>
+            <a:endParaRPr lang="en-US" altLang="ko-KR" sz="1600" spc="-50" dirty="0"/>
+          </a:p>
+          <a:p>
+            <a:pPr marL="377825" indent="-285750">
+              <a:lnSpc>
+                <a:spcPct val="150000"/>
+              </a:lnSpc>
+              <a:buFont typeface="Arial" panose="020B0604020202020204" pitchFamily="34" charset="0"/>
+              <a:buChar char="•"/>
+            </a:pPr>
+            <a:r>
+              <a:rPr lang="ko-KR" altLang="en-US" sz="1600" spc="-50" dirty="0"/>
+              <a:t>에너지 단위</a:t>
+            </a:r>
+            <a:endParaRPr lang="en-US" altLang="ko-KR" sz="1600" spc="-50" dirty="0"/>
+          </a:p>
+          <a:p>
+            <a:pPr marL="377825" indent="-285750">
+              <a:lnSpc>
+                <a:spcPct val="150000"/>
+              </a:lnSpc>
+              <a:buFont typeface="Arial" panose="020B0604020202020204" pitchFamily="34" charset="0"/>
+              <a:buChar char="•"/>
+            </a:pPr>
+            <a:r>
+              <a:rPr lang="ko-KR" altLang="en-US" sz="1600" spc="-50" dirty="0"/>
+              <a:t>에너지란 무엇인가</a:t>
+            </a:r>
+            <a:endParaRPr lang="en-US" altLang="ko-KR" sz="1600" spc="-50" dirty="0"/>
+          </a:p>
+          <a:p>
+            <a:pPr marL="377825" indent="-285750">
+              <a:lnSpc>
+                <a:spcPct val="150000"/>
+              </a:lnSpc>
+              <a:buFont typeface="Arial" panose="020B0604020202020204" pitchFamily="34" charset="0"/>
+              <a:buChar char="•"/>
+            </a:pPr>
+            <a:r>
+              <a:rPr lang="ko-KR" altLang="en-US" sz="1600" spc="-50" dirty="0"/>
+              <a:t>일상생활에서 쓰는 에너지</a:t>
+            </a:r>
+            <a:endParaRPr lang="en-US" altLang="ko-KR" sz="1600" spc="-50" dirty="0"/>
+          </a:p>
+          <a:p>
+            <a:pPr marL="377825" indent="-285750">
+              <a:lnSpc>
+                <a:spcPct val="150000"/>
+              </a:lnSpc>
+              <a:buFont typeface="Arial" panose="020B0604020202020204" pitchFamily="34" charset="0"/>
+              <a:buChar char="•"/>
+            </a:pPr>
             <a:endParaRPr lang="en-US" altLang="ko-KR" sz="1600" spc="-50" dirty="0"/>
           </a:p>
         </p:txBody>
@@ -7682,7 +7734,7 @@
         <p:cNvPr id="1" name="">
           <a:extLst>
             <a:ext uri="{FF2B5EF4-FFF2-40B4-BE49-F238E27FC236}">
-              <a16:creationId xmlns:a16="http://schemas.microsoft.com/office/drawing/2014/main" id="{7E764ACB-B8A0-8B8E-50AE-F6949A866C73}"/>
+              <a16:creationId xmlns:a16="http://schemas.microsoft.com/office/drawing/2014/main" id="{1CA59493-3237-2060-E05C-530AD07497F3}"/>
             </a:ext>
           </a:extLst>
         </p:cNvPr>
@@ -7702,7 +7754,7 @@
           <p:cNvPr id="2" name="제목 1">
             <a:extLst>
               <a:ext uri="{FF2B5EF4-FFF2-40B4-BE49-F238E27FC236}">
-                <a16:creationId xmlns:a16="http://schemas.microsoft.com/office/drawing/2014/main" id="{3B730496-A872-5CFB-3130-C4429F8285BC}"/>
+                <a16:creationId xmlns:a16="http://schemas.microsoft.com/office/drawing/2014/main" id="{631C7A22-C443-A102-E0E1-84852DA4B388}"/>
               </a:ext>
             </a:extLst>
           </p:cNvPr>
@@ -7719,8 +7771,12 @@
           <a:lstStyle/>
           <a:p>
             <a:r>
+              <a:rPr lang="en-US" altLang="ko-KR" dirty="0"/>
+              <a:t>Energy </a:t>
+            </a:r>
+            <a:r>
               <a:rPr lang="ko-KR" altLang="en-US" dirty="0"/>
-              <a:t>중앙정부의 재정</a:t>
+              <a:t>어원</a:t>
             </a:r>
           </a:p>
         </p:txBody>
@@ -7730,7 +7786,7 @@
           <p:cNvPr id="4" name="슬라이드 번호 개체 틀 3">
             <a:extLst>
               <a:ext uri="{FF2B5EF4-FFF2-40B4-BE49-F238E27FC236}">
-                <a16:creationId xmlns:a16="http://schemas.microsoft.com/office/drawing/2014/main" id="{CBD72302-C21E-82F3-1317-6A67EB8523B7}"/>
+                <a16:creationId xmlns:a16="http://schemas.microsoft.com/office/drawing/2014/main" id="{B8628BB4-220F-FFBE-B592-D8DC1F4E1950}"/>
               </a:ext>
             </a:extLst>
           </p:cNvPr>
@@ -7759,7 +7815,7 @@
           <p:cNvPr id="5" name="TextBox 4">
             <a:extLst>
               <a:ext uri="{FF2B5EF4-FFF2-40B4-BE49-F238E27FC236}">
-                <a16:creationId xmlns:a16="http://schemas.microsoft.com/office/drawing/2014/main" id="{71AEC86F-2434-0377-0126-D48FC4912B4A}"/>
+                <a16:creationId xmlns:a16="http://schemas.microsoft.com/office/drawing/2014/main" id="{0E193383-2897-A54A-2C79-6228A995A1E3}"/>
               </a:ext>
             </a:extLst>
           </p:cNvPr>
@@ -7769,7 +7825,7 @@
         <p:spPr>
           <a:xfrm>
             <a:off x="288790" y="958844"/>
-            <a:ext cx="11693660" cy="2630015"/>
+            <a:ext cx="11693660" cy="4476675"/>
           </a:xfrm>
           <a:prstGeom prst="rect">
             <a:avLst/>
@@ -7790,16 +7846,28 @@
               <a:buChar char="•"/>
             </a:pPr>
             <a:r>
+              <a:rPr lang="en-US" altLang="ko-KR" sz="1600" spc="-50" dirty="0"/>
+              <a:t>energy = </a:t>
+            </a:r>
+            <a:r>
+              <a:rPr lang="en-US" altLang="ko-KR" sz="1600" spc="-50" dirty="0" err="1"/>
+              <a:t>en</a:t>
+            </a:r>
+            <a:r>
+              <a:rPr lang="en-US" altLang="ko-KR" sz="1600" spc="-50" dirty="0"/>
+              <a:t> + </a:t>
+            </a:r>
+            <a:r>
+              <a:rPr lang="en-US" altLang="ko-KR" sz="1600" spc="-50" dirty="0" err="1"/>
+              <a:t>ergy</a:t>
+            </a:r>
+            <a:r>
+              <a:rPr lang="en-US" altLang="ko-KR" sz="1600" spc="-50" dirty="0"/>
+              <a:t>   : </a:t>
+            </a:r>
+            <a:r>
               <a:rPr lang="ko-KR" altLang="en-US" sz="1600" spc="-50" dirty="0"/>
-              <a:t>앞서 표에서 본 것처럼</a:t>
-            </a:r>
-            <a:r>
-              <a:rPr lang="en-US" altLang="ko-KR" sz="1600" spc="-50" dirty="0"/>
-              <a:t>, </a:t>
-            </a:r>
-            <a:r>
-              <a:rPr lang="ko-KR" altLang="en-US" sz="1600" spc="-50" dirty="0"/>
-              <a:t>우리나라 중앙정부의 재정은 크게 예산과 기금의 두 부분으로 구분할 수 있다</a:t>
+              <a:t>고대 그리스어로 풀어보면 아래와 같다</a:t>
             </a:r>
             <a:r>
               <a:rPr lang="en-US" altLang="ko-KR" sz="1600" spc="-50" dirty="0"/>
@@ -7815,21 +7883,143 @@
               <a:buChar char="ü"/>
             </a:pPr>
             <a:r>
+              <a:rPr lang="en-US" altLang="ko-KR" sz="1600" spc="-50" dirty="0" err="1"/>
+              <a:t>en</a:t>
+            </a:r>
+            <a:r>
+              <a:rPr lang="en-US" altLang="ko-KR" sz="1600" spc="-50" dirty="0"/>
+              <a:t> = -</a:t>
+            </a:r>
+            <a:r>
               <a:rPr lang="ko-KR" altLang="en-US" sz="1600" spc="-50" dirty="0"/>
-              <a:t>예산의 경우</a:t>
+              <a:t>안에</a:t>
+            </a:r>
+            <a:r>
+              <a:rPr lang="en-US" altLang="ko-KR" sz="1600" spc="-50" dirty="0"/>
+              <a:t>, -</a:t>
+            </a:r>
+            <a:r>
+              <a:rPr lang="ko-KR" altLang="en-US" sz="1600" spc="-50" dirty="0"/>
+              <a:t>내부에 </a:t>
+            </a:r>
+            <a:endParaRPr lang="en-US" altLang="ko-KR" sz="1600" spc="-50" dirty="0"/>
+          </a:p>
+          <a:p>
+            <a:pPr marL="1292225" lvl="2" indent="-285750">
+              <a:lnSpc>
+                <a:spcPct val="150000"/>
+              </a:lnSpc>
+              <a:buFont typeface="Wingdings" panose="05000000000000000000" pitchFamily="2" charset="2"/>
+              <a:buChar char="Ø"/>
+            </a:pPr>
+            <a:r>
+              <a:rPr lang="ko-KR" altLang="en-US" sz="1600" spc="-50" dirty="0"/>
+              <a:t>현대 영어로 넘어오면서 </a:t>
+            </a:r>
+            <a:r>
+              <a:rPr lang="en-US" altLang="ko-KR" sz="1600" spc="-50" dirty="0"/>
+              <a:t>‘</a:t>
+            </a:r>
+            <a:r>
+              <a:rPr lang="ko-KR" altLang="en-US" sz="1600" spc="-50" dirty="0"/>
+              <a:t>안에 넣다</a:t>
+            </a:r>
+            <a:r>
+              <a:rPr lang="en-US" altLang="ko-KR" sz="1600" spc="-50" dirty="0"/>
+              <a:t>‘ → ‘~</a:t>
+            </a:r>
+            <a:r>
+              <a:rPr lang="ko-KR" altLang="en-US" sz="1600" spc="-50" dirty="0"/>
+              <a:t>하게 만들다</a:t>
+            </a:r>
+            <a:r>
+              <a:rPr lang="en-US" altLang="ko-KR" sz="1600" spc="-50" dirty="0"/>
+              <a:t>‘ </a:t>
+            </a:r>
+            <a:r>
+              <a:rPr lang="ko-KR" altLang="en-US" sz="1600" spc="-50" dirty="0"/>
+              <a:t> 라는 식으로 의미 변화가 일어났다</a:t>
+            </a:r>
+            <a:r>
+              <a:rPr lang="en-US" altLang="ko-KR" sz="1600" spc="-50" dirty="0"/>
+              <a:t>.</a:t>
+            </a:r>
+          </a:p>
+          <a:p>
+            <a:pPr marL="1292225" lvl="2" indent="-285750">
+              <a:lnSpc>
+                <a:spcPct val="150000"/>
+              </a:lnSpc>
+              <a:buFont typeface="Wingdings" panose="05000000000000000000" pitchFamily="2" charset="2"/>
+              <a:buChar char="Ø"/>
+            </a:pPr>
+            <a:r>
+              <a:rPr lang="en-US" altLang="ko-KR" sz="1600" spc="-50" dirty="0"/>
+              <a:t>(</a:t>
+            </a:r>
+            <a:r>
+              <a:rPr lang="ko-KR" altLang="en-US" sz="1600" spc="-50" dirty="0"/>
+              <a:t>예제</a:t>
+            </a:r>
+            <a:r>
+              <a:rPr lang="en-US" altLang="ko-KR" sz="1600" spc="-50" dirty="0"/>
+              <a:t>) </a:t>
+            </a:r>
+            <a:r>
+              <a:rPr lang="en-US" altLang="ko-KR" sz="1600" b="1" spc="-50" dirty="0"/>
+              <a:t>en</a:t>
+            </a:r>
+            <a:r>
+              <a:rPr lang="en-US" altLang="ko-KR" sz="1600" spc="-50" dirty="0"/>
+              <a:t>able: </a:t>
+            </a:r>
+            <a:r>
+              <a:rPr lang="ko-KR" altLang="en-US" sz="1600" spc="-50" dirty="0"/>
+              <a:t>가능하게 하다</a:t>
+            </a:r>
+            <a:r>
+              <a:rPr lang="en-US" altLang="ko-KR" sz="1600" spc="-50" dirty="0"/>
+              <a:t>,  </a:t>
+            </a:r>
+            <a:r>
+              <a:rPr lang="en-US" altLang="ko-KR" sz="1600" b="1" spc="-50" dirty="0"/>
+              <a:t>en</a:t>
+            </a:r>
+            <a:r>
+              <a:rPr lang="en-US" altLang="ko-KR" sz="1600" spc="-50" dirty="0"/>
+              <a:t>rich:</a:t>
+            </a:r>
+            <a:r>
+              <a:rPr lang="ko-KR" altLang="en-US" sz="1600" spc="-50" dirty="0"/>
+              <a:t> 풍요롭게 하다</a:t>
             </a:r>
             <a:r>
               <a:rPr lang="en-US" altLang="ko-KR" sz="1600" spc="-50" dirty="0"/>
               <a:t>, </a:t>
             </a:r>
             <a:r>
+              <a:rPr lang="en-US" altLang="ko-KR" sz="1600" b="1" spc="-50" dirty="0"/>
+              <a:t>en</a:t>
+            </a:r>
+            <a:r>
+              <a:rPr lang="en-US" altLang="ko-KR" sz="1600" spc="-50" dirty="0"/>
+              <a:t>courage: </a:t>
+            </a:r>
+            <a:r>
               <a:rPr lang="ko-KR" altLang="en-US" sz="1600" spc="-50" dirty="0"/>
-              <a:t>매년 계획을 세워 국회의 심의를 받아 의결된 다음에 집행할 수 있다</a:t>
-            </a:r>
-            <a:r>
-              <a:rPr lang="en-US" altLang="ko-KR" sz="1600" spc="-50" dirty="0"/>
-              <a:t>.</a:t>
-            </a:r>
+              <a:t>용기를 북돋다</a:t>
+            </a:r>
+            <a:endParaRPr lang="en-US" altLang="ko-KR" sz="1600" spc="-50" dirty="0"/>
+          </a:p>
+          <a:p>
+            <a:pPr marL="1292225" lvl="2" indent="-285750">
+              <a:lnSpc>
+                <a:spcPct val="150000"/>
+              </a:lnSpc>
+              <a:buFont typeface="Wingdings" panose="05000000000000000000" pitchFamily="2" charset="2"/>
+              <a:buChar char="Ø"/>
+            </a:pPr>
+            <a:endParaRPr lang="en-US" altLang="ko-KR" sz="1600" spc="-50" dirty="0"/>
           </a:p>
           <a:p>
             <a:pPr marL="835025" lvl="1" indent="-285750">
@@ -7840,29 +8030,136 @@
               <a:buChar char="ü"/>
             </a:pPr>
             <a:r>
+              <a:rPr lang="en-US" altLang="ko-KR" sz="1600" spc="-50" dirty="0" err="1"/>
+              <a:t>ergy</a:t>
+            </a:r>
+            <a:r>
+              <a:rPr lang="en-US" altLang="ko-KR" sz="1600" spc="-50" dirty="0"/>
+              <a:t> = </a:t>
+            </a:r>
+            <a:r>
               <a:rPr lang="ko-KR" altLang="en-US" sz="1600" spc="-50" dirty="0"/>
-              <a:t>기금의 경우</a:t>
-            </a:r>
+              <a:t>일</a:t>
+            </a:r>
+            <a:endParaRPr lang="en-US" altLang="ko-KR" sz="1600" spc="-50" dirty="0"/>
+          </a:p>
+          <a:p>
+            <a:pPr marL="1292225" lvl="2" indent="-285750">
+              <a:lnSpc>
+                <a:spcPct val="150000"/>
+              </a:lnSpc>
+              <a:buFont typeface="Wingdings" panose="05000000000000000000" pitchFamily="2" charset="2"/>
+              <a:buChar char="Ø"/>
+            </a:pPr>
             <a:r>
               <a:rPr lang="en-US" altLang="ko-KR" sz="1600" spc="-50" dirty="0"/>
-              <a:t>, </a:t>
+              <a:t>ergon</a:t>
             </a:r>
             <a:r>
               <a:rPr lang="ko-KR" altLang="en-US" sz="1600" spc="-50" dirty="0"/>
-              <a:t>예산처럼 까다로운 과정을 거치지 않아도 집행이 가능하다</a:t>
+              <a:t>은 일</a:t>
             </a:r>
             <a:r>
               <a:rPr lang="en-US" altLang="ko-KR" sz="1600" spc="-50" dirty="0"/>
-              <a:t>. (</a:t>
+              <a:t>(work)</a:t>
             </a:r>
             <a:r>
               <a:rPr lang="ko-KR" altLang="en-US" sz="1600" spc="-50" dirty="0"/>
-              <a:t>장기적 유연성 확보 목적</a:t>
+              <a:t>을 뜻하는 그리스어 단어</a:t>
             </a:r>
             <a:r>
               <a:rPr lang="en-US" altLang="ko-KR" sz="1600" spc="-50" dirty="0"/>
-              <a:t>)</a:t>
-            </a:r>
+              <a:t>. ergon</a:t>
+            </a:r>
+            <a:r>
+              <a:rPr lang="ko-KR" altLang="en-US" sz="1600" spc="-50" dirty="0"/>
+              <a:t>의 파생형이</a:t>
+            </a:r>
+            <a:r>
+              <a:rPr lang="en-US" altLang="ko-KR" sz="1600" spc="-50" dirty="0"/>
+              <a:t> </a:t>
+            </a:r>
+            <a:r>
+              <a:rPr lang="en-US" altLang="ko-KR" sz="1600" spc="-50" dirty="0" err="1"/>
+              <a:t>ergy</a:t>
+            </a:r>
+            <a:r>
+              <a:rPr lang="en-US" altLang="ko-KR" sz="1600" spc="-50" dirty="0"/>
+              <a:t> </a:t>
+            </a:r>
+            <a:r>
+              <a:rPr lang="ko-KR" altLang="en-US" sz="1600" spc="-50" dirty="0"/>
+              <a:t>이다</a:t>
+            </a:r>
+            <a:r>
+              <a:rPr lang="en-US" altLang="ko-KR" sz="1600" spc="-50" dirty="0"/>
+              <a:t>.</a:t>
+            </a:r>
+          </a:p>
+          <a:p>
+            <a:pPr marL="1292225" lvl="2" indent="-285750">
+              <a:lnSpc>
+                <a:spcPct val="150000"/>
+              </a:lnSpc>
+              <a:buFont typeface="Wingdings" panose="05000000000000000000" pitchFamily="2" charset="2"/>
+              <a:buChar char="Ø"/>
+            </a:pPr>
+            <a:r>
+              <a:rPr lang="en-US" altLang="ko-KR" sz="1600" spc="-50" dirty="0"/>
+              <a:t>(</a:t>
+            </a:r>
+            <a:r>
+              <a:rPr lang="ko-KR" altLang="en-US" sz="1600" spc="-50" dirty="0"/>
+              <a:t>예제</a:t>
+            </a:r>
+            <a:r>
+              <a:rPr lang="en-US" altLang="ko-KR" sz="1600" spc="-50" dirty="0"/>
+              <a:t>) </a:t>
+            </a:r>
+            <a:r>
+              <a:rPr lang="en-US" altLang="ko-KR" sz="1600" b="1" spc="-50" dirty="0"/>
+              <a:t>erg</a:t>
+            </a:r>
+            <a:r>
+              <a:rPr lang="en-US" altLang="ko-KR" sz="1600" spc="-50" dirty="0"/>
+              <a:t>onomics: </a:t>
+            </a:r>
+            <a:r>
+              <a:rPr lang="ko-KR" altLang="en-US" sz="1600" spc="-50" dirty="0"/>
+              <a:t>인체공학 </a:t>
+            </a:r>
+            <a:r>
+              <a:rPr lang="en-US" altLang="ko-KR" sz="1600" spc="-50" dirty="0"/>
+              <a:t>(</a:t>
+            </a:r>
+            <a:r>
+              <a:rPr lang="ko-KR" altLang="en-US" sz="1600" spc="-50" dirty="0"/>
+              <a:t>일을 효율적으로 하는 법칙</a:t>
+            </a:r>
+            <a:r>
+              <a:rPr lang="en-US" altLang="ko-KR" sz="1600" spc="-50" dirty="0"/>
+              <a:t>))</a:t>
+            </a:r>
+          </a:p>
+          <a:p>
+            <a:pPr marL="1292225" lvl="2" indent="-285750">
+              <a:lnSpc>
+                <a:spcPct val="150000"/>
+              </a:lnSpc>
+              <a:buFont typeface="Wingdings" panose="05000000000000000000" pitchFamily="2" charset="2"/>
+              <a:buChar char="Ø"/>
+            </a:pPr>
+            <a:endParaRPr lang="en-US" altLang="ko-KR" sz="1600" spc="-50" dirty="0"/>
+          </a:p>
+          <a:p>
+            <a:pPr marL="835025" lvl="1" indent="-285750">
+              <a:lnSpc>
+                <a:spcPct val="150000"/>
+              </a:lnSpc>
+              <a:buFont typeface="Wingdings" panose="05000000000000000000" pitchFamily="2" charset="2"/>
+              <a:buChar char="ü"/>
+            </a:pPr>
+            <a:endParaRPr lang="en-US" altLang="ko-KR" sz="1600" spc="-50" dirty="0"/>
           </a:p>
           <a:p>
             <a:pPr marL="377825" indent="-285750">
@@ -7874,7 +8171,39 @@
             </a:pPr>
             <a:r>
               <a:rPr lang="ko-KR" altLang="en-US" sz="1600" spc="-50" dirty="0"/>
-              <a:t>중앙정부의 예산은 일반회계와 특별회계로 구분할 수 있다</a:t>
+              <a:t>따라서 </a:t>
+            </a:r>
+            <a:r>
+              <a:rPr lang="en-US" altLang="ko-KR" sz="1600" spc="-50" dirty="0"/>
+              <a:t>energy</a:t>
+            </a:r>
+            <a:r>
+              <a:rPr lang="ko-KR" altLang="en-US" sz="1600" spc="-50" dirty="0"/>
+              <a:t>는 원래 </a:t>
+            </a:r>
+            <a:r>
+              <a:rPr lang="en-US" altLang="ko-KR" sz="1600" spc="-50" dirty="0"/>
+              <a:t>‘</a:t>
+            </a:r>
+            <a:r>
+              <a:rPr lang="ko-KR" altLang="en-US" sz="1600" spc="-50" dirty="0"/>
+              <a:t>일</a:t>
+            </a:r>
+            <a:r>
+              <a:rPr lang="en-US" altLang="ko-KR" sz="1600" spc="-50" dirty="0"/>
+              <a:t>(work)</a:t>
+            </a:r>
+            <a:r>
+              <a:rPr lang="ko-KR" altLang="en-US" sz="1600" spc="-50" dirty="0"/>
+              <a:t>이 안에 있는 상태</a:t>
+            </a:r>
+            <a:r>
+              <a:rPr lang="en-US" altLang="ko-KR" sz="1600" spc="-50" dirty="0"/>
+              <a:t>‘</a:t>
+            </a:r>
+            <a:r>
+              <a:rPr lang="ko-KR" altLang="en-US" sz="1600" spc="-50" dirty="0"/>
+              <a:t>를 의미한다</a:t>
             </a:r>
             <a:r>
               <a:rPr lang="en-US" altLang="ko-KR" sz="1600" spc="-50" dirty="0"/>
@@ -7891,78 +8220,117 @@
             </a:pPr>
             <a:r>
               <a:rPr lang="ko-KR" altLang="en-US" sz="1600" spc="-50" dirty="0"/>
-              <a:t>일반회계는 중앙정부 예산의 중추로서</a:t>
-            </a:r>
-            <a:r>
-              <a:rPr lang="en-US" altLang="ko-KR" sz="1600" spc="-50" dirty="0"/>
-              <a:t>, </a:t>
+              <a:t>이것이 오늘날 </a:t>
+            </a:r>
+            <a:r>
+              <a:rPr lang="en-US" altLang="ko-KR" sz="1600" b="1" spc="-50" dirty="0"/>
+              <a:t>‘</a:t>
+            </a:r>
+            <a:r>
+              <a:rPr lang="ko-KR" altLang="en-US" sz="1600" b="1" spc="-50" dirty="0"/>
+              <a:t>일을 할 수 있는 능력</a:t>
+            </a:r>
+            <a:r>
+              <a:rPr lang="en-US" altLang="ko-KR" sz="1600" b="1" spc="-50" dirty="0"/>
+              <a:t>’</a:t>
             </a:r>
             <a:r>
               <a:rPr lang="ko-KR" altLang="en-US" sz="1600" spc="-50" dirty="0"/>
-              <a:t>중앙정부의 조세수입 대부분을 포함할 뿐 아니라</a:t>
-            </a:r>
-            <a:r>
-              <a:rPr lang="en-US" altLang="ko-KR" sz="1600" spc="-50" dirty="0"/>
-              <a:t>, </a:t>
-            </a:r>
-            <a:r>
-              <a:rPr lang="ko-KR" altLang="en-US" sz="1600" spc="-50" dirty="0"/>
-              <a:t>주요 재정사업을 포괄하고 있다</a:t>
+              <a:t> 이라는 의미로 발전하였다</a:t>
             </a:r>
             <a:r>
               <a:rPr lang="en-US" altLang="ko-KR" sz="1600" spc="-50" dirty="0"/>
               <a:t>.</a:t>
             </a:r>
           </a:p>
-          <a:p>
-            <a:pPr marL="835025" lvl="1" indent="-285750">
-              <a:lnSpc>
-                <a:spcPct val="150000"/>
-              </a:lnSpc>
-              <a:buFont typeface="Wingdings" panose="05000000000000000000" pitchFamily="2" charset="2"/>
-              <a:buChar char="ü"/>
-            </a:pPr>
-            <a:r>
-              <a:rPr lang="ko-KR" altLang="en-US" sz="1600" spc="-50" dirty="0"/>
-              <a:t>특별회계는 특정한 목적을 위한 사업과 관련한 것으로</a:t>
-            </a:r>
-            <a:r>
-              <a:rPr lang="en-US" altLang="ko-KR" sz="1600" spc="-50" dirty="0"/>
-              <a:t>, </a:t>
-            </a:r>
-            <a:r>
-              <a:rPr lang="ko-KR" altLang="en-US" sz="1600" spc="-50" dirty="0"/>
-              <a:t>일반회계와 따로 떼어 설치</a:t>
-            </a:r>
-            <a:r>
-              <a:rPr lang="en-US" altLang="ko-KR" sz="1600" spc="-50" dirty="0"/>
-              <a:t>·</a:t>
-            </a:r>
-            <a:r>
-              <a:rPr lang="ko-KR" altLang="en-US" sz="1600" spc="-50" dirty="0"/>
-              <a:t>운영하는 별도의 회계를 뜻한다</a:t>
-            </a:r>
-            <a:r>
-              <a:rPr lang="en-US" altLang="ko-KR" sz="1600" spc="-50" dirty="0"/>
-              <a:t>.</a:t>
-            </a:r>
-          </a:p>
-          <a:p>
-            <a:pPr marL="377825" indent="-285750">
-              <a:lnSpc>
-                <a:spcPct val="150000"/>
-              </a:lnSpc>
-              <a:buFont typeface="Arial" panose="020B0604020202020204" pitchFamily="34" charset="0"/>
-              <a:buChar char="•"/>
-            </a:pPr>
-            <a:endParaRPr lang="en-US" altLang="ko-KR" sz="1600" spc="-50" dirty="0"/>
+        </p:txBody>
+      </p:sp>
+      <p:pic>
+        <p:nvPicPr>
+          <p:cNvPr id="6" name="그림 5">
+            <a:extLst>
+              <a:ext uri="{FF2B5EF4-FFF2-40B4-BE49-F238E27FC236}">
+                <a16:creationId xmlns:a16="http://schemas.microsoft.com/office/drawing/2014/main" id="{70E6184C-191A-AA52-FF3B-32CFB93EFCEA}"/>
+              </a:ext>
+            </a:extLst>
+          </p:cNvPr>
+          <p:cNvPicPr>
+            <a:picLocks noChangeAspect="1"/>
+          </p:cNvPicPr>
+          <p:nvPr/>
+        </p:nvPicPr>
+        <p:blipFill>
+          <a:blip r:embed="rId2"/>
+          <a:stretch>
+            <a:fillRect/>
+          </a:stretch>
+        </p:blipFill>
+        <p:spPr>
+          <a:xfrm>
+            <a:off x="8742284" y="3067663"/>
+            <a:ext cx="2968222" cy="1107363"/>
+          </a:xfrm>
+          <a:prstGeom prst="rect">
+            <a:avLst/>
+          </a:prstGeom>
+        </p:spPr>
+      </p:pic>
+      <p:sp>
+        <p:nvSpPr>
+          <p:cNvPr id="8" name="TextBox 7">
+            <a:extLst>
+              <a:ext uri="{FF2B5EF4-FFF2-40B4-BE49-F238E27FC236}">
+                <a16:creationId xmlns:a16="http://schemas.microsoft.com/office/drawing/2014/main" id="{82BA0A74-7ED3-F1FC-795A-ED8D9FCD9AB5}"/>
+              </a:ext>
+            </a:extLst>
+          </p:cNvPr>
+          <p:cNvSpPr txBox="1"/>
+          <p:nvPr/>
+        </p:nvSpPr>
+        <p:spPr>
+          <a:xfrm>
+            <a:off x="9070142" y="2806053"/>
+            <a:ext cx="2312506" cy="261610"/>
+          </a:xfrm>
+          <a:prstGeom prst="rect">
+            <a:avLst/>
+          </a:prstGeom>
+          <a:noFill/>
+        </p:spPr>
+        <p:txBody>
+          <a:bodyPr wrap="square">
+            <a:spAutoFit/>
+          </a:bodyPr>
+          <a:lstStyle/>
+          <a:p>
+            <a:r>
+              <a:rPr lang="en-US" altLang="ko-KR" sz="1100" spc="-50" dirty="0"/>
+              <a:t>&lt;</a:t>
+            </a:r>
+            <a:r>
+              <a:rPr lang="ko-KR" altLang="en-US" sz="1100" spc="-50" dirty="0"/>
+              <a:t>인체공학 키보드의 모델명</a:t>
+            </a:r>
+            <a:r>
+              <a:rPr lang="en-US" altLang="ko-KR" sz="1100" spc="-50" dirty="0"/>
+              <a:t>:</a:t>
+            </a:r>
+            <a:r>
+              <a:rPr lang="ko-KR" altLang="en-US" sz="1100" spc="-50" dirty="0"/>
+              <a:t> </a:t>
+            </a:r>
+            <a:r>
+              <a:rPr lang="en-US" altLang="ko-KR" sz="1100" spc="-50" dirty="0"/>
+              <a:t>ergo&gt;</a:t>
+            </a:r>
+            <a:endParaRPr lang="ko-KR" altLang="en-US" sz="1100" dirty="0"/>
           </a:p>
         </p:txBody>
       </p:sp>
     </p:spTree>
     <p:extLst>
       <p:ext uri="{BB962C8B-B14F-4D97-AF65-F5344CB8AC3E}">
-        <p14:creationId xmlns:p14="http://schemas.microsoft.com/office/powerpoint/2010/main" val="3608071698"/>
+        <p14:creationId xmlns:p14="http://schemas.microsoft.com/office/powerpoint/2010/main" val="2659932837"/>
       </p:ext>
     </p:extLst>
   </p:cSld>

--- a/에너지경제학/자원에너지경제학_Chapter_1.pptx
+++ b/에너지경제학/자원에너지경제학_Chapter_1.pptx
@@ -224,7 +224,7 @@
           <a:p>
             <a:fld id="{4A5E00EF-AEA4-43E2-9451-8F9C59A39471}" type="datetimeFigureOut">
               <a:rPr lang="ko-KR" altLang="en-US" smtClean="0"/>
-              <a:t>2026-06-18</a:t>
+              <a:t>2026-06-23</a:t>
             </a:fld>
             <a:endParaRPr lang="ko-KR" altLang="en-US"/>
           </a:p>
@@ -646,7 +646,7 @@
           <a:p>
             <a:fld id="{CD32C56F-BD27-4999-9E6D-D4EACE3DA9F4}" type="datetime1">
               <a:rPr lang="ko-KR" altLang="en-US" smtClean="0"/>
-              <a:t>2026-06-18</a:t>
+              <a:t>2026-06-23</a:t>
             </a:fld>
             <a:endParaRPr lang="ko-KR" altLang="en-US"/>
           </a:p>
@@ -860,7 +860,7 @@
           <a:p>
             <a:fld id="{8EF4A19C-72C8-45CA-8E3F-68A7FA345D6C}" type="datetime1">
               <a:rPr lang="ko-KR" altLang="en-US" smtClean="0"/>
-              <a:t>2026-06-18</a:t>
+              <a:t>2026-06-23</a:t>
             </a:fld>
             <a:endParaRPr lang="ko-KR" altLang="en-US"/>
           </a:p>
@@ -1084,7 +1084,7 @@
           <a:p>
             <a:fld id="{56A175B2-010B-4341-954C-5F8F5C70B124}" type="datetime1">
               <a:rPr lang="ko-KR" altLang="en-US" smtClean="0"/>
-              <a:t>2026-06-18</a:t>
+              <a:t>2026-06-23</a:t>
             </a:fld>
             <a:endParaRPr lang="ko-KR" altLang="en-US"/>
           </a:p>
@@ -1298,7 +1298,7 @@
           <a:p>
             <a:fld id="{16B83F9E-22C9-45CA-9E85-070F1D3EF530}" type="datetime1">
               <a:rPr lang="ko-KR" altLang="en-US" smtClean="0"/>
-              <a:t>2026-06-18</a:t>
+              <a:t>2026-06-23</a:t>
             </a:fld>
             <a:endParaRPr lang="ko-KR" altLang="en-US"/>
           </a:p>
@@ -1589,7 +1589,7 @@
           <a:p>
             <a:fld id="{03278F45-FB3C-4C4D-B89A-7BC3F5F229F6}" type="datetime1">
               <a:rPr lang="ko-KR" altLang="en-US" smtClean="0"/>
-              <a:t>2026-06-18</a:t>
+              <a:t>2026-06-23</a:t>
             </a:fld>
             <a:endParaRPr lang="ko-KR" altLang="en-US"/>
           </a:p>
@@ -1982,7 +1982,7 @@
           <a:p>
             <a:fld id="{38FDAC3C-35A6-415C-9F03-738A6AC328B1}" type="datetime1">
               <a:rPr lang="ko-KR" altLang="en-US" smtClean="0"/>
-              <a:t>2026-06-18</a:t>
+              <a:t>2026-06-23</a:t>
             </a:fld>
             <a:endParaRPr lang="ko-KR" altLang="en-US"/>
           </a:p>
@@ -3576,7 +3576,7 @@
           <a:p>
             <a:fld id="{507A0DF1-AEE6-4B0D-89D2-351E7B3EF65C}" type="datetime1">
               <a:rPr lang="ko-KR" altLang="en-US" smtClean="0"/>
-              <a:t>2026-06-18</a:t>
+              <a:t>2026-06-23</a:t>
             </a:fld>
             <a:endParaRPr lang="ko-KR" altLang="en-US"/>
           </a:p>
@@ -4004,7 +4004,7 @@
           <a:p>
             <a:fld id="{CA93B8C9-630F-4D57-944D-04FD37CECCD3}" type="datetime1">
               <a:rPr lang="ko-KR" altLang="en-US" smtClean="0"/>
-              <a:t>2026-06-18</a:t>
+              <a:t>2026-06-23</a:t>
             </a:fld>
             <a:endParaRPr lang="ko-KR" altLang="en-US"/>
           </a:p>
@@ -4161,7 +4161,7 @@
           <a:p>
             <a:fld id="{E986165A-AC43-4902-9541-874ECD310BA3}" type="datetime1">
               <a:rPr lang="ko-KR" altLang="en-US" smtClean="0"/>
-              <a:t>2026-06-18</a:t>
+              <a:t>2026-06-23</a:t>
             </a:fld>
             <a:endParaRPr lang="ko-KR" altLang="en-US"/>
           </a:p>
@@ -4488,7 +4488,7 @@
           <a:p>
             <a:fld id="{47E6EE6D-2B0E-43A9-87A2-7354CDB998F4}" type="datetime1">
               <a:rPr lang="ko-KR" altLang="en-US" smtClean="0"/>
-              <a:t>2026-06-18</a:t>
+              <a:t>2026-06-23</a:t>
             </a:fld>
             <a:endParaRPr lang="ko-KR" altLang="en-US"/>
           </a:p>
@@ -4792,7 +4792,7 @@
           <a:p>
             <a:fld id="{5CC5944E-0BC8-4FAA-9F94-6B4B05834E10}" type="datetime1">
               <a:rPr lang="ko-KR" altLang="en-US" smtClean="0"/>
-              <a:t>2026-06-18</a:t>
+              <a:t>2026-06-23</a:t>
             </a:fld>
             <a:endParaRPr lang="ko-KR" altLang="en-US"/>
           </a:p>
@@ -7607,7 +7607,7 @@
         <p:spPr>
           <a:xfrm>
             <a:off x="288790" y="958844"/>
-            <a:ext cx="11693660" cy="2260683"/>
+            <a:ext cx="11693660" cy="2999347"/>
           </a:xfrm>
           <a:prstGeom prst="rect">
             <a:avLst/>
@@ -7619,6 +7619,65 @@
             <a:spAutoFit/>
           </a:bodyPr>
           <a:lstStyle/>
+          <a:p>
+            <a:pPr marL="377825" indent="-285750">
+              <a:lnSpc>
+                <a:spcPct val="150000"/>
+              </a:lnSpc>
+              <a:buFont typeface="Arial" panose="020B0604020202020204" pitchFamily="34" charset="0"/>
+              <a:buChar char="•"/>
+            </a:pPr>
+            <a:r>
+              <a:rPr lang="ko-KR" altLang="en-US" sz="1600" spc="-50" dirty="0"/>
+              <a:t>지구가 어떻게 돌아가는지</a:t>
+            </a:r>
+            <a:r>
+              <a:rPr lang="en-US" altLang="ko-KR" sz="1600" spc="-50" dirty="0"/>
+              <a:t>?? (</a:t>
+            </a:r>
+            <a:r>
+              <a:rPr lang="ko-KR" altLang="en-US" sz="1600" spc="-50" dirty="0"/>
+              <a:t>우주</a:t>
+            </a:r>
+            <a:r>
+              <a:rPr lang="en-US" altLang="ko-KR" sz="1600" spc="-50" dirty="0"/>
+              <a:t>, </a:t>
+            </a:r>
+            <a:r>
+              <a:rPr lang="ko-KR" altLang="en-US" sz="1600" spc="-50" dirty="0"/>
+              <a:t>계절</a:t>
+            </a:r>
+            <a:r>
+              <a:rPr lang="en-US" altLang="ko-KR" sz="1600" spc="-50" dirty="0"/>
+              <a:t>, </a:t>
+            </a:r>
+            <a:r>
+              <a:rPr lang="ko-KR" altLang="en-US" sz="1600" spc="-50" dirty="0"/>
+              <a:t>순환</a:t>
+            </a:r>
+            <a:r>
+              <a:rPr lang="en-US" altLang="ko-KR" sz="1600" spc="-50" dirty="0"/>
+              <a:t>, </a:t>
+            </a:r>
+            <a:r>
+              <a:rPr lang="ko-KR" altLang="en-US" sz="1600" spc="-50" dirty="0"/>
+              <a:t>원자 등등</a:t>
+            </a:r>
+            <a:r>
+              <a:rPr lang="en-US" altLang="ko-KR" sz="1600" spc="-50"/>
+              <a:t>?)</a:t>
+            </a:r>
+          </a:p>
+          <a:p>
+            <a:pPr marL="377825" indent="-285750">
+              <a:lnSpc>
+                <a:spcPct val="150000"/>
+              </a:lnSpc>
+              <a:buFont typeface="Arial" panose="020B0604020202020204" pitchFamily="34" charset="0"/>
+              <a:buChar char="•"/>
+            </a:pPr>
+            <a:endParaRPr lang="en-US" altLang="ko-KR" sz="1600" spc="-50" dirty="0"/>
+          </a:p>
           <a:p>
             <a:pPr marL="377825" indent="-285750">
               <a:lnSpc>

--- a/에너지경제학/자원에너지경제학_Chapter_1.pptx
+++ b/에너지경제학/자원에너지경제학_Chapter_1.pptx
@@ -5,7 +5,7 @@
     <p:sldMasterId id="2147483648" r:id="rId1"/>
   </p:sldMasterIdLst>
   <p:notesMasterIdLst>
-    <p:notesMasterId r:id="rId8"/>
+    <p:notesMasterId r:id="rId15"/>
   </p:notesMasterIdLst>
   <p:sldIdLst>
     <p:sldId id="375" r:id="rId2"/>
@@ -13,7 +13,14 @@
     <p:sldId id="550" r:id="rId4"/>
     <p:sldId id="376" r:id="rId5"/>
     <p:sldId id="553" r:id="rId6"/>
-    <p:sldId id="364" r:id="rId7"/>
+    <p:sldId id="555" r:id="rId7"/>
+    <p:sldId id="557" r:id="rId8"/>
+    <p:sldId id="558" r:id="rId9"/>
+    <p:sldId id="559" r:id="rId10"/>
+    <p:sldId id="560" r:id="rId11"/>
+    <p:sldId id="556" r:id="rId12"/>
+    <p:sldId id="554" r:id="rId13"/>
+    <p:sldId id="364" r:id="rId14"/>
   </p:sldIdLst>
   <p:sldSz cx="12192000" cy="6858000"/>
   <p:notesSz cx="6858000" cy="9144000"/>
@@ -224,7 +231,7 @@
           <a:p>
             <a:fld id="{4A5E00EF-AEA4-43E2-9451-8F9C59A39471}" type="datetimeFigureOut">
               <a:rPr lang="ko-KR" altLang="en-US" smtClean="0"/>
-              <a:t>2026-06-23</a:t>
+              <a:t>2026-06-26</a:t>
             </a:fld>
             <a:endParaRPr lang="ko-KR" altLang="en-US"/>
           </a:p>
@@ -646,7 +653,7 @@
           <a:p>
             <a:fld id="{CD32C56F-BD27-4999-9E6D-D4EACE3DA9F4}" type="datetime1">
               <a:rPr lang="ko-KR" altLang="en-US" smtClean="0"/>
-              <a:t>2026-06-23</a:t>
+              <a:t>2026-06-26</a:t>
             </a:fld>
             <a:endParaRPr lang="ko-KR" altLang="en-US"/>
           </a:p>
@@ -860,7 +867,7 @@
           <a:p>
             <a:fld id="{8EF4A19C-72C8-45CA-8E3F-68A7FA345D6C}" type="datetime1">
               <a:rPr lang="ko-KR" altLang="en-US" smtClean="0"/>
-              <a:t>2026-06-23</a:t>
+              <a:t>2026-06-26</a:t>
             </a:fld>
             <a:endParaRPr lang="ko-KR" altLang="en-US"/>
           </a:p>
@@ -1084,7 +1091,7 @@
           <a:p>
             <a:fld id="{56A175B2-010B-4341-954C-5F8F5C70B124}" type="datetime1">
               <a:rPr lang="ko-KR" altLang="en-US" smtClean="0"/>
-              <a:t>2026-06-23</a:t>
+              <a:t>2026-06-26</a:t>
             </a:fld>
             <a:endParaRPr lang="ko-KR" altLang="en-US"/>
           </a:p>
@@ -1298,7 +1305,7 @@
           <a:p>
             <a:fld id="{16B83F9E-22C9-45CA-9E85-070F1D3EF530}" type="datetime1">
               <a:rPr lang="ko-KR" altLang="en-US" smtClean="0"/>
-              <a:t>2026-06-23</a:t>
+              <a:t>2026-06-26</a:t>
             </a:fld>
             <a:endParaRPr lang="ko-KR" altLang="en-US"/>
           </a:p>
@@ -1589,7 +1596,7 @@
           <a:p>
             <a:fld id="{03278F45-FB3C-4C4D-B89A-7BC3F5F229F6}" type="datetime1">
               <a:rPr lang="ko-KR" altLang="en-US" smtClean="0"/>
-              <a:t>2026-06-23</a:t>
+              <a:t>2026-06-26</a:t>
             </a:fld>
             <a:endParaRPr lang="ko-KR" altLang="en-US"/>
           </a:p>
@@ -1982,7 +1989,7 @@
           <a:p>
             <a:fld id="{38FDAC3C-35A6-415C-9F03-738A6AC328B1}" type="datetime1">
               <a:rPr lang="ko-KR" altLang="en-US" smtClean="0"/>
-              <a:t>2026-06-23</a:t>
+              <a:t>2026-06-26</a:t>
             </a:fld>
             <a:endParaRPr lang="ko-KR" altLang="en-US"/>
           </a:p>
@@ -3576,7 +3583,7 @@
           <a:p>
             <a:fld id="{507A0DF1-AEE6-4B0D-89D2-351E7B3EF65C}" type="datetime1">
               <a:rPr lang="ko-KR" altLang="en-US" smtClean="0"/>
-              <a:t>2026-06-23</a:t>
+              <a:t>2026-06-26</a:t>
             </a:fld>
             <a:endParaRPr lang="ko-KR" altLang="en-US"/>
           </a:p>
@@ -4004,7 +4011,7 @@
           <a:p>
             <a:fld id="{CA93B8C9-630F-4D57-944D-04FD37CECCD3}" type="datetime1">
               <a:rPr lang="ko-KR" altLang="en-US" smtClean="0"/>
-              <a:t>2026-06-23</a:t>
+              <a:t>2026-06-26</a:t>
             </a:fld>
             <a:endParaRPr lang="ko-KR" altLang="en-US"/>
           </a:p>
@@ -4161,7 +4168,7 @@
           <a:p>
             <a:fld id="{E986165A-AC43-4902-9541-874ECD310BA3}" type="datetime1">
               <a:rPr lang="ko-KR" altLang="en-US" smtClean="0"/>
-              <a:t>2026-06-23</a:t>
+              <a:t>2026-06-26</a:t>
             </a:fld>
             <a:endParaRPr lang="ko-KR" altLang="en-US"/>
           </a:p>
@@ -4488,7 +4495,7 @@
           <a:p>
             <a:fld id="{47E6EE6D-2B0E-43A9-87A2-7354CDB998F4}" type="datetime1">
               <a:rPr lang="ko-KR" altLang="en-US" smtClean="0"/>
-              <a:t>2026-06-23</a:t>
+              <a:t>2026-06-26</a:t>
             </a:fld>
             <a:endParaRPr lang="ko-KR" altLang="en-US"/>
           </a:p>
@@ -4792,7 +4799,7 @@
           <a:p>
             <a:fld id="{5CC5944E-0BC8-4FAA-9F94-6B4B05834E10}" type="datetime1">
               <a:rPr lang="ko-KR" altLang="en-US" smtClean="0"/>
-              <a:t>2026-06-23</a:t>
+              <a:t>2026-06-26</a:t>
             </a:fld>
             <a:endParaRPr lang="ko-KR" altLang="en-US"/>
           </a:p>
@@ -7226,6 +7233,1591 @@
 </p:sld>
 </file>
 
+<file path=ppt/slides/slide10.xml><?xml version="1.0" encoding="utf-8"?>
+<p:sld xmlns:a="http://schemas.openxmlformats.org/drawingml/2006/main" xmlns:r="http://schemas.openxmlformats.org/officeDocument/2006/relationships" xmlns:p="http://schemas.openxmlformats.org/presentationml/2006/main">
+  <p:cSld>
+    <p:spTree>
+      <p:nvGrpSpPr>
+        <p:cNvPr id="1" name="">
+          <a:extLst>
+            <a:ext uri="{FF2B5EF4-FFF2-40B4-BE49-F238E27FC236}">
+              <a16:creationId xmlns:a16="http://schemas.microsoft.com/office/drawing/2014/main" id="{04B381B5-F69D-5A39-2273-AC354F035998}"/>
+            </a:ext>
+          </a:extLst>
+        </p:cNvPr>
+        <p:cNvGrpSpPr/>
+        <p:nvPr/>
+      </p:nvGrpSpPr>
+      <p:grpSpPr>
+        <a:xfrm>
+          <a:off x="0" y="0"/>
+          <a:ext cx="0" cy="0"/>
+          <a:chOff x="0" y="0"/>
+          <a:chExt cx="0" cy="0"/>
+        </a:xfrm>
+      </p:grpSpPr>
+      <p:sp>
+        <p:nvSpPr>
+          <p:cNvPr id="2" name="제목 1">
+            <a:extLst>
+              <a:ext uri="{FF2B5EF4-FFF2-40B4-BE49-F238E27FC236}">
+                <a16:creationId xmlns:a16="http://schemas.microsoft.com/office/drawing/2014/main" id="{56F0BD26-1D88-9E78-E8E3-D0A432885B81}"/>
+              </a:ext>
+            </a:extLst>
+          </p:cNvPr>
+          <p:cNvSpPr>
+            <a:spLocks noGrp="1"/>
+          </p:cNvSpPr>
+          <p:nvPr>
+            <p:ph type="title"/>
+          </p:nvPr>
+        </p:nvSpPr>
+        <p:spPr/>
+        <p:txBody>
+          <a:bodyPr/>
+          <a:lstStyle/>
+          <a:p>
+            <a:r>
+              <a:rPr lang="ko-KR" altLang="en-US" dirty="0"/>
+              <a:t>에너지 </a:t>
+            </a:r>
+          </a:p>
+        </p:txBody>
+      </p:sp>
+      <p:sp>
+        <p:nvSpPr>
+          <p:cNvPr id="4" name="슬라이드 번호 개체 틀 3">
+            <a:extLst>
+              <a:ext uri="{FF2B5EF4-FFF2-40B4-BE49-F238E27FC236}">
+                <a16:creationId xmlns:a16="http://schemas.microsoft.com/office/drawing/2014/main" id="{7AE69D38-D683-D7D0-2D30-F833D1B1B1A4}"/>
+              </a:ext>
+            </a:extLst>
+          </p:cNvPr>
+          <p:cNvSpPr>
+            <a:spLocks noGrp="1"/>
+          </p:cNvSpPr>
+          <p:nvPr>
+            <p:ph type="sldNum" sz="quarter" idx="12"/>
+          </p:nvPr>
+        </p:nvSpPr>
+        <p:spPr/>
+        <p:txBody>
+          <a:bodyPr/>
+          <a:lstStyle/>
+          <a:p>
+            <a:fld id="{109C872D-39A9-4065-8BF3-6A613116E2A1}" type="slidenum">
+              <a:rPr lang="ko-KR" altLang="en-US" smtClean="0"/>
+              <a:t>10</a:t>
+            </a:fld>
+            <a:endParaRPr lang="ko-KR" altLang="en-US"/>
+          </a:p>
+        </p:txBody>
+      </p:sp>
+      <p:sp>
+        <p:nvSpPr>
+          <p:cNvPr id="7" name="TextBox 6">
+            <a:extLst>
+              <a:ext uri="{FF2B5EF4-FFF2-40B4-BE49-F238E27FC236}">
+                <a16:creationId xmlns:a16="http://schemas.microsoft.com/office/drawing/2014/main" id="{D3267F87-CD27-F34A-17B4-18730B58F9B6}"/>
+              </a:ext>
+            </a:extLst>
+          </p:cNvPr>
+          <p:cNvSpPr txBox="1"/>
+          <p:nvPr/>
+        </p:nvSpPr>
+        <p:spPr>
+          <a:xfrm>
+            <a:off x="288790" y="958844"/>
+            <a:ext cx="11118453" cy="783356"/>
+          </a:xfrm>
+          <a:prstGeom prst="rect">
+            <a:avLst/>
+          </a:prstGeom>
+          <a:noFill/>
+        </p:spPr>
+        <p:txBody>
+          <a:bodyPr wrap="square" rtlCol="0" anchor="t">
+            <a:spAutoFit/>
+          </a:bodyPr>
+          <a:lstStyle/>
+          <a:p>
+            <a:pPr marL="377825" indent="-285750">
+              <a:lnSpc>
+                <a:spcPct val="150000"/>
+              </a:lnSpc>
+              <a:buFont typeface="Arial" panose="020B0604020202020204" pitchFamily="34" charset="0"/>
+              <a:buChar char="•"/>
+            </a:pPr>
+            <a:r>
+              <a:rPr lang="ko-KR" altLang="en-US" sz="1600" spc="-50" dirty="0"/>
+              <a:t>앞서 에너지의 여러가지 형태 </a:t>
+            </a:r>
+            <a:r>
+              <a:rPr lang="en-US" altLang="ko-KR" sz="1600" spc="-50" dirty="0"/>
+              <a:t>(</a:t>
+            </a:r>
+            <a:r>
+              <a:rPr lang="ko-KR" altLang="en-US" sz="1600" spc="-50" dirty="0"/>
+              <a:t>빛</a:t>
+            </a:r>
+            <a:r>
+              <a:rPr lang="en-US" altLang="ko-KR" sz="1600" spc="-50" dirty="0"/>
+              <a:t>, </a:t>
+            </a:r>
+            <a:r>
+              <a:rPr lang="ko-KR" altLang="en-US" sz="1600" spc="-50" dirty="0"/>
+              <a:t>소리</a:t>
+            </a:r>
+            <a:r>
+              <a:rPr lang="en-US" altLang="ko-KR" sz="1600" spc="-50" dirty="0"/>
+              <a:t>, </a:t>
+            </a:r>
+            <a:r>
+              <a:rPr lang="ko-KR" altLang="en-US" sz="1600" spc="-50" dirty="0"/>
+              <a:t>열</a:t>
+            </a:r>
+            <a:r>
+              <a:rPr lang="en-US" altLang="ko-KR" sz="1600" spc="-50" dirty="0"/>
+              <a:t>, </a:t>
+            </a:r>
+            <a:r>
+              <a:rPr lang="ko-KR" altLang="en-US" sz="1600" spc="-50" dirty="0"/>
+              <a:t>운동 </a:t>
+            </a:r>
+            <a:r>
+              <a:rPr lang="en-US" altLang="ko-KR" sz="1600" spc="-50" dirty="0"/>
+              <a:t>··· </a:t>
+            </a:r>
+            <a:r>
+              <a:rPr lang="ko-KR" altLang="en-US" sz="1600" spc="-50" dirty="0"/>
+              <a:t>등등</a:t>
+            </a:r>
+            <a:r>
+              <a:rPr lang="en-US" altLang="ko-KR" sz="1600" spc="-50" dirty="0"/>
+              <a:t>)</a:t>
+            </a:r>
+            <a:r>
+              <a:rPr lang="ko-KR" altLang="en-US" sz="1600" spc="-50" dirty="0"/>
+              <a:t>를 배웠는데</a:t>
+            </a:r>
+            <a:r>
+              <a:rPr lang="en-US" altLang="ko-KR" sz="1600" spc="-50" dirty="0"/>
+              <a:t>, </a:t>
+            </a:r>
+            <a:r>
+              <a:rPr lang="ko-KR" altLang="en-US" sz="1600" spc="-50" dirty="0"/>
+              <a:t>어떤 </a:t>
+            </a:r>
+            <a:r>
+              <a:rPr lang="ko-KR" altLang="en-US" sz="1600" spc="-50" dirty="0" err="1"/>
+              <a:t>형태든</a:t>
+            </a:r>
+            <a:r>
+              <a:rPr lang="ko-KR" altLang="en-US" sz="1600" spc="-50" dirty="0"/>
+              <a:t> 에너지 단위인 줄로 측정이 가능하다</a:t>
+            </a:r>
+            <a:r>
+              <a:rPr lang="en-US" altLang="ko-KR" sz="1600" spc="-50" dirty="0"/>
+              <a:t>.</a:t>
+            </a:r>
+          </a:p>
+          <a:p>
+            <a:pPr marL="377825" indent="-285750">
+              <a:lnSpc>
+                <a:spcPct val="150000"/>
+              </a:lnSpc>
+              <a:buFont typeface="Arial" panose="020B0604020202020204" pitchFamily="34" charset="0"/>
+              <a:buChar char="•"/>
+            </a:pPr>
+            <a:endParaRPr lang="en-US" altLang="ko-KR" sz="1600" spc="-50" dirty="0"/>
+          </a:p>
+        </p:txBody>
+      </p:sp>
+    </p:spTree>
+    <p:extLst>
+      <p:ext uri="{BB962C8B-B14F-4D97-AF65-F5344CB8AC3E}">
+        <p14:creationId xmlns:p14="http://schemas.microsoft.com/office/powerpoint/2010/main" val="2032439714"/>
+      </p:ext>
+    </p:extLst>
+  </p:cSld>
+  <p:clrMapOvr>
+    <a:masterClrMapping/>
+  </p:clrMapOvr>
+</p:sld>
+</file>
+
+<file path=ppt/slides/slide11.xml><?xml version="1.0" encoding="utf-8"?>
+<p:sld xmlns:a="http://schemas.openxmlformats.org/drawingml/2006/main" xmlns:r="http://schemas.openxmlformats.org/officeDocument/2006/relationships" xmlns:p="http://schemas.openxmlformats.org/presentationml/2006/main">
+  <p:cSld>
+    <p:spTree>
+      <p:nvGrpSpPr>
+        <p:cNvPr id="1" name="">
+          <a:extLst>
+            <a:ext uri="{FF2B5EF4-FFF2-40B4-BE49-F238E27FC236}">
+              <a16:creationId xmlns:a16="http://schemas.microsoft.com/office/drawing/2014/main" id="{0BC1F357-6A49-DE19-168B-0EAFAD3E7D89}"/>
+            </a:ext>
+          </a:extLst>
+        </p:cNvPr>
+        <p:cNvGrpSpPr/>
+        <p:nvPr/>
+      </p:nvGrpSpPr>
+      <p:grpSpPr>
+        <a:xfrm>
+          <a:off x="0" y="0"/>
+          <a:ext cx="0" cy="0"/>
+          <a:chOff x="0" y="0"/>
+          <a:chExt cx="0" cy="0"/>
+        </a:xfrm>
+      </p:grpSpPr>
+      <p:sp>
+        <p:nvSpPr>
+          <p:cNvPr id="2" name="제목 1">
+            <a:extLst>
+              <a:ext uri="{FF2B5EF4-FFF2-40B4-BE49-F238E27FC236}">
+                <a16:creationId xmlns:a16="http://schemas.microsoft.com/office/drawing/2014/main" id="{9092C007-A731-7516-CCAF-C6353939591B}"/>
+              </a:ext>
+            </a:extLst>
+          </p:cNvPr>
+          <p:cNvSpPr>
+            <a:spLocks noGrp="1"/>
+          </p:cNvSpPr>
+          <p:nvPr>
+            <p:ph type="title"/>
+          </p:nvPr>
+        </p:nvSpPr>
+        <p:spPr/>
+        <p:txBody>
+          <a:bodyPr/>
+          <a:lstStyle/>
+          <a:p>
+            <a:r>
+              <a:rPr lang="ko-KR" altLang="en-US" dirty="0"/>
+              <a:t>생활 속의 에너지</a:t>
+            </a:r>
+          </a:p>
+        </p:txBody>
+      </p:sp>
+      <p:sp>
+        <p:nvSpPr>
+          <p:cNvPr id="4" name="슬라이드 번호 개체 틀 3">
+            <a:extLst>
+              <a:ext uri="{FF2B5EF4-FFF2-40B4-BE49-F238E27FC236}">
+                <a16:creationId xmlns:a16="http://schemas.microsoft.com/office/drawing/2014/main" id="{DC073995-6988-6F83-E4A6-F6590AD725BF}"/>
+              </a:ext>
+            </a:extLst>
+          </p:cNvPr>
+          <p:cNvSpPr>
+            <a:spLocks noGrp="1"/>
+          </p:cNvSpPr>
+          <p:nvPr>
+            <p:ph type="sldNum" sz="quarter" idx="12"/>
+          </p:nvPr>
+        </p:nvSpPr>
+        <p:spPr/>
+        <p:txBody>
+          <a:bodyPr/>
+          <a:lstStyle/>
+          <a:p>
+            <a:fld id="{109C872D-39A9-4065-8BF3-6A613116E2A1}" type="slidenum">
+              <a:rPr lang="ko-KR" altLang="en-US" smtClean="0"/>
+              <a:t>11</a:t>
+            </a:fld>
+            <a:endParaRPr lang="ko-KR" altLang="en-US"/>
+          </a:p>
+        </p:txBody>
+      </p:sp>
+      <p:sp>
+        <p:nvSpPr>
+          <p:cNvPr id="7" name="TextBox 6">
+            <a:extLst>
+              <a:ext uri="{FF2B5EF4-FFF2-40B4-BE49-F238E27FC236}">
+                <a16:creationId xmlns:a16="http://schemas.microsoft.com/office/drawing/2014/main" id="{957F5CC3-B015-C253-EFC6-F76316817558}"/>
+              </a:ext>
+            </a:extLst>
+          </p:cNvPr>
+          <p:cNvSpPr txBox="1"/>
+          <p:nvPr/>
+        </p:nvSpPr>
+        <p:spPr>
+          <a:xfrm>
+            <a:off x="288790" y="958844"/>
+            <a:ext cx="11118453" cy="5584670"/>
+          </a:xfrm>
+          <a:prstGeom prst="rect">
+            <a:avLst/>
+          </a:prstGeom>
+          <a:noFill/>
+        </p:spPr>
+        <p:txBody>
+          <a:bodyPr wrap="square" rtlCol="0" anchor="t">
+            <a:spAutoFit/>
+          </a:bodyPr>
+          <a:lstStyle/>
+          <a:p>
+            <a:pPr marL="377825" indent="-285750">
+              <a:lnSpc>
+                <a:spcPct val="150000"/>
+              </a:lnSpc>
+              <a:buFont typeface="Arial" panose="020B0604020202020204" pitchFamily="34" charset="0"/>
+              <a:buChar char="•"/>
+            </a:pPr>
+            <a:r>
+              <a:rPr lang="ko-KR" altLang="en-US" sz="1600" spc="-50" dirty="0"/>
+              <a:t>우리의 일상은 대개 아래와 같다</a:t>
+            </a:r>
+            <a:r>
+              <a:rPr lang="en-US" altLang="ko-KR" sz="1600" spc="-50" dirty="0"/>
+              <a:t>.</a:t>
+            </a:r>
+          </a:p>
+          <a:p>
+            <a:pPr marL="835025" lvl="1" indent="-285750">
+              <a:lnSpc>
+                <a:spcPct val="150000"/>
+              </a:lnSpc>
+              <a:buFont typeface="Wingdings" panose="05000000000000000000" pitchFamily="2" charset="2"/>
+              <a:buChar char="ü"/>
+            </a:pPr>
+            <a:r>
+              <a:rPr lang="ko-KR" altLang="en-US" sz="1600" spc="-50" dirty="0"/>
+              <a:t>아침에 일어나서 핸드폰을 본다</a:t>
+            </a:r>
+            <a:r>
+              <a:rPr lang="en-US" altLang="ko-KR" sz="1600" spc="-50" dirty="0"/>
+              <a:t>. (</a:t>
+            </a:r>
+            <a:r>
+              <a:rPr lang="ko-KR" altLang="en-US" sz="1600" b="1" spc="-50" dirty="0"/>
+              <a:t>전기 </a:t>
+            </a:r>
+            <a:r>
+              <a:rPr lang="ko-KR" altLang="en-US" sz="1600" spc="-50" dirty="0"/>
+              <a:t>사용</a:t>
+            </a:r>
+            <a:r>
+              <a:rPr lang="en-US" altLang="ko-KR" sz="1600" spc="-50" dirty="0"/>
+              <a:t>)</a:t>
+            </a:r>
+          </a:p>
+          <a:p>
+            <a:pPr marL="835025" lvl="1" indent="-285750">
+              <a:lnSpc>
+                <a:spcPct val="150000"/>
+              </a:lnSpc>
+              <a:buFont typeface="Wingdings" panose="05000000000000000000" pitchFamily="2" charset="2"/>
+              <a:buChar char="ü"/>
+            </a:pPr>
+            <a:r>
+              <a:rPr lang="ko-KR" altLang="en-US" sz="1600" spc="-50" dirty="0"/>
+              <a:t>간단히 온수 샤워를 한다</a:t>
+            </a:r>
+            <a:r>
+              <a:rPr lang="en-US" altLang="ko-KR" sz="1600" spc="-50" dirty="0"/>
+              <a:t>. (</a:t>
+            </a:r>
+            <a:r>
+              <a:rPr lang="ko-KR" altLang="en-US" sz="1600" spc="-50" dirty="0"/>
+              <a:t>보일러를 통한 </a:t>
+            </a:r>
+            <a:r>
+              <a:rPr lang="ko-KR" altLang="en-US" sz="1600" b="1" spc="-50" dirty="0"/>
+              <a:t>가스</a:t>
+            </a:r>
+            <a:r>
+              <a:rPr lang="ko-KR" altLang="en-US" sz="1600" spc="-50" dirty="0"/>
+              <a:t> 사용 혹은 지역난방의 </a:t>
+            </a:r>
+            <a:r>
+              <a:rPr lang="ko-KR" altLang="en-US" sz="1600" b="1" spc="-50" dirty="0"/>
+              <a:t>열</a:t>
+            </a:r>
+            <a:r>
+              <a:rPr lang="ko-KR" altLang="en-US" sz="1600" spc="-50" dirty="0"/>
+              <a:t> 사용</a:t>
+            </a:r>
+            <a:r>
+              <a:rPr lang="en-US" altLang="ko-KR" sz="1600" spc="-50" dirty="0"/>
+              <a:t>)</a:t>
+            </a:r>
+          </a:p>
+          <a:p>
+            <a:pPr marL="835025" lvl="1" indent="-285750">
+              <a:lnSpc>
+                <a:spcPct val="150000"/>
+              </a:lnSpc>
+              <a:buFont typeface="Wingdings" panose="05000000000000000000" pitchFamily="2" charset="2"/>
+              <a:buChar char="ü"/>
+            </a:pPr>
+            <a:r>
+              <a:rPr lang="ko-KR" altLang="en-US" sz="1600" spc="-50" dirty="0"/>
+              <a:t>옷을 입는다</a:t>
+            </a:r>
+            <a:r>
+              <a:rPr lang="en-US" altLang="ko-KR" sz="1600" spc="-50" dirty="0"/>
+              <a:t>. (</a:t>
+            </a:r>
+            <a:r>
+              <a:rPr lang="ko-KR" altLang="en-US" sz="1600" spc="-50" dirty="0"/>
+              <a:t>우리가 입고 있는 옷은 대부분 합성섬유이고</a:t>
+            </a:r>
+            <a:r>
+              <a:rPr lang="en-US" altLang="ko-KR" sz="1600" spc="-50" dirty="0"/>
+              <a:t>, </a:t>
+            </a:r>
+            <a:r>
+              <a:rPr lang="ko-KR" altLang="en-US" sz="1600" spc="-50" dirty="0"/>
+              <a:t>합성섬유의 원료는 </a:t>
+            </a:r>
+            <a:r>
+              <a:rPr lang="ko-KR" altLang="en-US" sz="1600" b="1" spc="-50" dirty="0"/>
+              <a:t>석유제품</a:t>
+            </a:r>
+            <a:r>
+              <a:rPr lang="ko-KR" altLang="en-US" sz="1600" spc="-50" dirty="0"/>
+              <a:t>이다</a:t>
+            </a:r>
+            <a:r>
+              <a:rPr lang="en-US" altLang="ko-KR" sz="1600" spc="-50" dirty="0"/>
+              <a:t>.)</a:t>
+            </a:r>
+          </a:p>
+          <a:p>
+            <a:pPr marL="835025" lvl="1" indent="-285750">
+              <a:lnSpc>
+                <a:spcPct val="150000"/>
+              </a:lnSpc>
+              <a:buFont typeface="Wingdings" panose="05000000000000000000" pitchFamily="2" charset="2"/>
+              <a:buChar char="ü"/>
+            </a:pPr>
+            <a:r>
+              <a:rPr lang="ko-KR" altLang="en-US" sz="1600" spc="-50" dirty="0"/>
+              <a:t>집을 나서서</a:t>
+            </a:r>
+            <a:r>
+              <a:rPr lang="en-US" altLang="ko-KR" sz="1600" spc="-50" dirty="0"/>
+              <a:t>, </a:t>
+            </a:r>
+            <a:r>
+              <a:rPr lang="ko-KR" altLang="en-US" sz="1600" spc="-50" dirty="0"/>
+              <a:t>버스나 자가용을 탄다</a:t>
+            </a:r>
+            <a:r>
+              <a:rPr lang="en-US" altLang="ko-KR" sz="1600" spc="-50" dirty="0"/>
+              <a:t>. (</a:t>
+            </a:r>
+            <a:r>
+              <a:rPr lang="ko-KR" altLang="en-US" sz="1600" spc="-50" dirty="0"/>
+              <a:t>시내버스는 </a:t>
+            </a:r>
+            <a:r>
+              <a:rPr lang="ko-KR" altLang="en-US" sz="1600" b="1" spc="-50" dirty="0"/>
+              <a:t>가스</a:t>
+            </a:r>
+            <a:r>
+              <a:rPr lang="en-US" altLang="ko-KR" sz="1600" spc="-50" dirty="0"/>
+              <a:t>, </a:t>
+            </a:r>
+            <a:r>
+              <a:rPr lang="ko-KR" altLang="en-US" sz="1600" spc="-50" dirty="0"/>
+              <a:t>자가용은 </a:t>
+            </a:r>
+            <a:r>
+              <a:rPr lang="ko-KR" altLang="en-US" sz="1600" b="1" spc="-50" dirty="0"/>
+              <a:t>석유제품</a:t>
+            </a:r>
+            <a:r>
+              <a:rPr lang="ko-KR" altLang="en-US" sz="1600" spc="-50" dirty="0"/>
+              <a:t>을 주로 사용한다</a:t>
+            </a:r>
+            <a:r>
+              <a:rPr lang="ko-KR" altLang="en-US" sz="1600" b="1" spc="-50" dirty="0"/>
+              <a:t> </a:t>
+            </a:r>
+            <a:r>
+              <a:rPr lang="en-US" altLang="ko-KR" sz="1600" spc="-50" dirty="0"/>
+              <a:t>.)</a:t>
+            </a:r>
+          </a:p>
+          <a:p>
+            <a:pPr marL="835025" lvl="1" indent="-285750">
+              <a:lnSpc>
+                <a:spcPct val="150000"/>
+              </a:lnSpc>
+              <a:buFont typeface="Wingdings" panose="05000000000000000000" pitchFamily="2" charset="2"/>
+              <a:buChar char="ü"/>
+            </a:pPr>
+            <a:r>
+              <a:rPr lang="ko-KR" altLang="en-US" sz="1600" spc="-50" dirty="0"/>
+              <a:t>강의실에서 에어컨 혹은 히터를 켜고</a:t>
+            </a:r>
+            <a:r>
+              <a:rPr lang="en-US" altLang="ko-KR" sz="1600" spc="-50" dirty="0"/>
+              <a:t> </a:t>
+            </a:r>
+            <a:r>
+              <a:rPr lang="ko-KR" altLang="en-US" sz="1600" spc="-50" dirty="0"/>
+              <a:t>수업을 듣는다</a:t>
+            </a:r>
+            <a:r>
+              <a:rPr lang="en-US" altLang="ko-KR" sz="1600" spc="-50" dirty="0"/>
+              <a:t>. (</a:t>
+            </a:r>
+            <a:r>
+              <a:rPr lang="ko-KR" altLang="en-US" sz="1600" b="1" spc="-50" dirty="0"/>
+              <a:t>전기</a:t>
+            </a:r>
+            <a:r>
+              <a:rPr lang="ko-KR" altLang="en-US" sz="1600" spc="-50" dirty="0"/>
+              <a:t> 사용</a:t>
+            </a:r>
+            <a:r>
+              <a:rPr lang="en-US" altLang="ko-KR" sz="1600" spc="-50" dirty="0"/>
+              <a:t>)</a:t>
+            </a:r>
+          </a:p>
+          <a:p>
+            <a:pPr marL="835025" lvl="1" indent="-285750">
+              <a:lnSpc>
+                <a:spcPct val="150000"/>
+              </a:lnSpc>
+              <a:buFont typeface="Wingdings" panose="05000000000000000000" pitchFamily="2" charset="2"/>
+              <a:buChar char="ü"/>
+            </a:pPr>
+            <a:r>
+              <a:rPr lang="ko-KR" altLang="en-US" sz="1600" spc="-50" dirty="0"/>
+              <a:t>밤이 되어</a:t>
+            </a:r>
+            <a:r>
+              <a:rPr lang="en-US" altLang="ko-KR" sz="1600" spc="-50" dirty="0"/>
+              <a:t>, </a:t>
+            </a:r>
+            <a:r>
+              <a:rPr lang="ko-KR" altLang="en-US" sz="1600" spc="-50" dirty="0"/>
+              <a:t>집 안에 조명을 켠다</a:t>
+            </a:r>
+            <a:r>
+              <a:rPr lang="en-US" altLang="ko-KR" sz="1600" spc="-50" dirty="0"/>
+              <a:t>. (</a:t>
+            </a:r>
+            <a:r>
+              <a:rPr lang="ko-KR" altLang="en-US" sz="1600" b="1" spc="-50" dirty="0"/>
+              <a:t>전기 </a:t>
+            </a:r>
+            <a:r>
+              <a:rPr lang="ko-KR" altLang="en-US" sz="1600" spc="-50" dirty="0"/>
+              <a:t>사용</a:t>
+            </a:r>
+            <a:r>
+              <a:rPr lang="en-US" altLang="ko-KR" sz="1600" spc="-50" dirty="0"/>
+              <a:t>)</a:t>
+            </a:r>
+          </a:p>
+          <a:p>
+            <a:pPr marL="377825" indent="-285750">
+              <a:lnSpc>
+                <a:spcPct val="150000"/>
+              </a:lnSpc>
+              <a:buFont typeface="Arial" panose="020B0604020202020204" pitchFamily="34" charset="0"/>
+              <a:buChar char="•"/>
+            </a:pPr>
+            <a:endParaRPr lang="en-US" altLang="ko-KR" sz="1600" spc="-50" dirty="0"/>
+          </a:p>
+          <a:p>
+            <a:pPr marL="377825" indent="-285750">
+              <a:lnSpc>
+                <a:spcPct val="150000"/>
+              </a:lnSpc>
+              <a:buFont typeface="Arial" panose="020B0604020202020204" pitchFamily="34" charset="0"/>
+              <a:buChar char="•"/>
+            </a:pPr>
+            <a:r>
+              <a:rPr lang="ko-KR" altLang="en-US" sz="1600" spc="-50" dirty="0"/>
+              <a:t>오늘날의 현대적인 에너지 공급이 없으면 우리는 원시사회로 돌아간다</a:t>
+            </a:r>
+            <a:r>
+              <a:rPr lang="en-US" altLang="ko-KR" sz="1600" spc="-50" dirty="0"/>
+              <a:t>.</a:t>
+            </a:r>
+          </a:p>
+          <a:p>
+            <a:pPr marL="835025" lvl="1" indent="-285750">
+              <a:lnSpc>
+                <a:spcPct val="150000"/>
+              </a:lnSpc>
+              <a:buFont typeface="Wingdings" panose="05000000000000000000" pitchFamily="2" charset="2"/>
+              <a:buChar char="ü"/>
+            </a:pPr>
+            <a:r>
+              <a:rPr lang="ko-KR" altLang="en-US" sz="1600" spc="-50" dirty="0"/>
+              <a:t>핸드폰이 없다</a:t>
+            </a:r>
+            <a:r>
+              <a:rPr lang="en-US" altLang="ko-KR" sz="1600" spc="-50" dirty="0"/>
+              <a:t>. (</a:t>
+            </a:r>
+            <a:r>
+              <a:rPr lang="ko-KR" altLang="en-US" sz="1600" spc="-50" dirty="0"/>
+              <a:t>해의 위치 파악을 통해 시간을 알아야 한다</a:t>
+            </a:r>
+            <a:r>
+              <a:rPr lang="en-US" altLang="ko-KR" sz="1600" spc="-50" dirty="0"/>
+              <a:t>.)</a:t>
+            </a:r>
+          </a:p>
+          <a:p>
+            <a:pPr marL="835025" lvl="1" indent="-285750">
+              <a:lnSpc>
+                <a:spcPct val="150000"/>
+              </a:lnSpc>
+              <a:buFont typeface="Wingdings" panose="05000000000000000000" pitchFamily="2" charset="2"/>
+              <a:buChar char="ü"/>
+            </a:pPr>
+            <a:r>
+              <a:rPr lang="ko-KR" altLang="en-US" sz="1600" spc="-50" dirty="0"/>
+              <a:t>냇가에서 물을 길어와 나무를 태워 물을 데워 씻는다</a:t>
+            </a:r>
+            <a:r>
+              <a:rPr lang="en-US" altLang="ko-KR" sz="1600" spc="-50" dirty="0"/>
+              <a:t>.</a:t>
+            </a:r>
+          </a:p>
+          <a:p>
+            <a:pPr marL="835025" lvl="1" indent="-285750">
+              <a:lnSpc>
+                <a:spcPct val="150000"/>
+              </a:lnSpc>
+              <a:buFont typeface="Wingdings" panose="05000000000000000000" pitchFamily="2" charset="2"/>
+              <a:buChar char="ü"/>
+            </a:pPr>
+            <a:r>
+              <a:rPr lang="ko-KR" altLang="en-US" sz="1600" spc="-50" dirty="0"/>
+              <a:t>동물의 가죽을 걸쳐 입는다</a:t>
+            </a:r>
+            <a:r>
+              <a:rPr lang="en-US" altLang="ko-KR" sz="1600" spc="-50" dirty="0"/>
+              <a:t>.</a:t>
+            </a:r>
+          </a:p>
+          <a:p>
+            <a:pPr marL="835025" lvl="1" indent="-285750">
+              <a:lnSpc>
+                <a:spcPct val="150000"/>
+              </a:lnSpc>
+              <a:buFont typeface="Wingdings" panose="05000000000000000000" pitchFamily="2" charset="2"/>
+              <a:buChar char="ü"/>
+            </a:pPr>
+            <a:r>
+              <a:rPr lang="ko-KR" altLang="en-US" sz="1600" spc="-50" dirty="0"/>
+              <a:t>어디 가고 싶으면 걷거나</a:t>
+            </a:r>
+            <a:r>
+              <a:rPr lang="en-US" altLang="ko-KR" sz="1600" spc="-50" dirty="0"/>
+              <a:t>, </a:t>
+            </a:r>
+            <a:r>
+              <a:rPr lang="ko-KR" altLang="en-US" sz="1600" spc="-50" dirty="0"/>
+              <a:t>뛴다</a:t>
+            </a:r>
+            <a:r>
+              <a:rPr lang="en-US" altLang="ko-KR" sz="1600" spc="-50" dirty="0"/>
+              <a:t>.</a:t>
+            </a:r>
+          </a:p>
+          <a:p>
+            <a:pPr marL="835025" lvl="1" indent="-285750">
+              <a:lnSpc>
+                <a:spcPct val="150000"/>
+              </a:lnSpc>
+              <a:buFont typeface="Wingdings" panose="05000000000000000000" pitchFamily="2" charset="2"/>
+              <a:buChar char="ü"/>
+            </a:pPr>
+            <a:r>
+              <a:rPr lang="ko-KR" altLang="en-US" sz="1600" spc="-50" dirty="0"/>
+              <a:t>더우면 부채질을 하고</a:t>
+            </a:r>
+            <a:r>
+              <a:rPr lang="en-US" altLang="ko-KR" sz="1600" spc="-50" dirty="0"/>
+              <a:t>, </a:t>
+            </a:r>
+            <a:r>
+              <a:rPr lang="ko-KR" altLang="en-US" sz="1600" spc="-50" dirty="0"/>
+              <a:t>추우면 옷을 껴입는다</a:t>
+            </a:r>
+            <a:r>
+              <a:rPr lang="en-US" altLang="ko-KR" sz="1600" spc="-50" dirty="0"/>
+              <a:t>.</a:t>
+            </a:r>
+          </a:p>
+          <a:p>
+            <a:pPr marL="835025" lvl="1" indent="-285750">
+              <a:lnSpc>
+                <a:spcPct val="150000"/>
+              </a:lnSpc>
+              <a:buFont typeface="Wingdings" panose="05000000000000000000" pitchFamily="2" charset="2"/>
+              <a:buChar char="ü"/>
+            </a:pPr>
+            <a:r>
+              <a:rPr lang="ko-KR" altLang="en-US" sz="1600" spc="-50" dirty="0"/>
+              <a:t>해가 떨어지면</a:t>
+            </a:r>
+            <a:r>
+              <a:rPr lang="en-US" altLang="ko-KR" sz="1600" spc="-50" dirty="0"/>
+              <a:t>, </a:t>
+            </a:r>
+            <a:r>
+              <a:rPr lang="ko-KR" altLang="en-US" sz="1600" spc="-50" dirty="0"/>
+              <a:t>잘 안보인다</a:t>
+            </a:r>
+            <a:r>
+              <a:rPr lang="en-US" altLang="ko-KR" sz="1600" spc="-50" dirty="0"/>
+              <a:t>.</a:t>
+            </a:r>
+          </a:p>
+        </p:txBody>
+      </p:sp>
+      <p:sp>
+        <p:nvSpPr>
+          <p:cNvPr id="5" name="TextBox 4">
+            <a:extLst>
+              <a:ext uri="{FF2B5EF4-FFF2-40B4-BE49-F238E27FC236}">
+                <a16:creationId xmlns:a16="http://schemas.microsoft.com/office/drawing/2014/main" id="{74874051-1E3C-81AC-FF78-54B999A9621F}"/>
+              </a:ext>
+            </a:extLst>
+          </p:cNvPr>
+          <p:cNvSpPr txBox="1"/>
+          <p:nvPr/>
+        </p:nvSpPr>
+        <p:spPr>
+          <a:xfrm>
+            <a:off x="7259433" y="3507679"/>
+            <a:ext cx="4508787" cy="1522020"/>
+          </a:xfrm>
+          <a:prstGeom prst="rect">
+            <a:avLst/>
+          </a:prstGeom>
+          <a:noFill/>
+        </p:spPr>
+        <p:txBody>
+          <a:bodyPr wrap="square" rtlCol="0" anchor="t">
+            <a:spAutoFit/>
+          </a:bodyPr>
+          <a:lstStyle/>
+          <a:p>
+            <a:pPr marL="377825" indent="-285750">
+              <a:lnSpc>
+                <a:spcPct val="150000"/>
+              </a:lnSpc>
+              <a:buFont typeface="Arial" panose="020B0604020202020204" pitchFamily="34" charset="0"/>
+              <a:buChar char="•"/>
+            </a:pPr>
+            <a:r>
+              <a:rPr lang="ko-KR" altLang="en-US" sz="1600" spc="-50" dirty="0"/>
+              <a:t>현대사회에서는 내가 굳이 일을 하지 않고</a:t>
+            </a:r>
+            <a:r>
+              <a:rPr lang="en-US" altLang="ko-KR" sz="1600" spc="-50" dirty="0"/>
+              <a:t>, </a:t>
+            </a:r>
+            <a:r>
+              <a:rPr lang="ko-KR" altLang="en-US" sz="1600" b="1" spc="-50" dirty="0"/>
+              <a:t>일을 할 수 있는 능력</a:t>
+            </a:r>
+            <a:r>
+              <a:rPr lang="en-US" altLang="ko-KR" sz="1600" b="1" spc="-50" dirty="0"/>
+              <a:t>(</a:t>
+            </a:r>
+            <a:r>
+              <a:rPr lang="ko-KR" altLang="en-US" sz="1600" b="1" spc="-50" dirty="0"/>
+              <a:t>에너지</a:t>
+            </a:r>
+            <a:r>
+              <a:rPr lang="en-US" altLang="ko-KR" sz="1600" b="1" spc="-50" dirty="0"/>
+              <a:t>)</a:t>
+            </a:r>
+            <a:r>
+              <a:rPr lang="ko-KR" altLang="en-US" sz="1600" spc="-50" dirty="0"/>
+              <a:t>을 가진 전기</a:t>
+            </a:r>
+            <a:r>
+              <a:rPr lang="en-US" altLang="ko-KR" sz="1600" spc="-50" dirty="0"/>
+              <a:t>, </a:t>
+            </a:r>
+            <a:r>
+              <a:rPr lang="ko-KR" altLang="en-US" sz="1600" spc="-50" dirty="0"/>
+              <a:t>가스</a:t>
+            </a:r>
+            <a:r>
+              <a:rPr lang="en-US" altLang="ko-KR" sz="1600" spc="-50" dirty="0"/>
+              <a:t>, </a:t>
+            </a:r>
+            <a:r>
+              <a:rPr lang="ko-KR" altLang="en-US" sz="1600" spc="-50" dirty="0"/>
+              <a:t>열</a:t>
+            </a:r>
+            <a:r>
+              <a:rPr lang="en-US" altLang="ko-KR" sz="1600" spc="-50" dirty="0"/>
+              <a:t>, </a:t>
+            </a:r>
+            <a:r>
+              <a:rPr lang="ko-KR" altLang="en-US" sz="1600" spc="-50" dirty="0"/>
+              <a:t>석유</a:t>
+            </a:r>
+            <a:r>
+              <a:rPr lang="en-US" altLang="ko-KR" sz="1600" spc="-50" dirty="0"/>
+              <a:t> </a:t>
+            </a:r>
+            <a:r>
+              <a:rPr lang="ko-KR" altLang="en-US" sz="1600" spc="-50" dirty="0"/>
+              <a:t>등을 사용해서</a:t>
+            </a:r>
+            <a:r>
+              <a:rPr lang="en-US" altLang="ko-KR" sz="1600" spc="-50" dirty="0"/>
+              <a:t>, </a:t>
+            </a:r>
+            <a:r>
+              <a:rPr lang="ko-KR" altLang="en-US" sz="1600" spc="-50" dirty="0"/>
+              <a:t>매우 편리한 생활을 누리고 있다</a:t>
+            </a:r>
+            <a:r>
+              <a:rPr lang="en-US" altLang="ko-KR" sz="1600" spc="-50" dirty="0"/>
+              <a:t>.</a:t>
+            </a:r>
+          </a:p>
+        </p:txBody>
+      </p:sp>
+    </p:spTree>
+    <p:extLst>
+      <p:ext uri="{BB962C8B-B14F-4D97-AF65-F5344CB8AC3E}">
+        <p14:creationId xmlns:p14="http://schemas.microsoft.com/office/powerpoint/2010/main" val="3589264058"/>
+      </p:ext>
+    </p:extLst>
+  </p:cSld>
+  <p:clrMapOvr>
+    <a:masterClrMapping/>
+  </p:clrMapOvr>
+</p:sld>
+</file>
+
+<file path=ppt/slides/slide12.xml><?xml version="1.0" encoding="utf-8"?>
+<p:sld xmlns:a="http://schemas.openxmlformats.org/drawingml/2006/main" xmlns:r="http://schemas.openxmlformats.org/officeDocument/2006/relationships" xmlns:p="http://schemas.openxmlformats.org/presentationml/2006/main">
+  <p:cSld>
+    <p:spTree>
+      <p:nvGrpSpPr>
+        <p:cNvPr id="1" name="">
+          <a:extLst>
+            <a:ext uri="{FF2B5EF4-FFF2-40B4-BE49-F238E27FC236}">
+              <a16:creationId xmlns:a16="http://schemas.microsoft.com/office/drawing/2014/main" id="{F864D992-D509-61E8-7026-B83F7FDD78EC}"/>
+            </a:ext>
+          </a:extLst>
+        </p:cNvPr>
+        <p:cNvGrpSpPr/>
+        <p:nvPr/>
+      </p:nvGrpSpPr>
+      <p:grpSpPr>
+        <a:xfrm>
+          <a:off x="0" y="0"/>
+          <a:ext cx="0" cy="0"/>
+          <a:chOff x="0" y="0"/>
+          <a:chExt cx="0" cy="0"/>
+        </a:xfrm>
+      </p:grpSpPr>
+      <p:sp>
+        <p:nvSpPr>
+          <p:cNvPr id="2" name="제목 1">
+            <a:extLst>
+              <a:ext uri="{FF2B5EF4-FFF2-40B4-BE49-F238E27FC236}">
+                <a16:creationId xmlns:a16="http://schemas.microsoft.com/office/drawing/2014/main" id="{97CC96A6-5ABB-BA3A-EA16-515932353F22}"/>
+              </a:ext>
+            </a:extLst>
+          </p:cNvPr>
+          <p:cNvSpPr>
+            <a:spLocks noGrp="1"/>
+          </p:cNvSpPr>
+          <p:nvPr>
+            <p:ph type="title"/>
+          </p:nvPr>
+        </p:nvSpPr>
+        <p:spPr/>
+        <p:txBody>
+          <a:bodyPr/>
+          <a:lstStyle/>
+          <a:p>
+            <a:r>
+              <a:rPr lang="ko-KR" altLang="en-US" dirty="0"/>
+              <a:t>에너지 분류</a:t>
+            </a:r>
+          </a:p>
+        </p:txBody>
+      </p:sp>
+      <p:sp>
+        <p:nvSpPr>
+          <p:cNvPr id="4" name="슬라이드 번호 개체 틀 3">
+            <a:extLst>
+              <a:ext uri="{FF2B5EF4-FFF2-40B4-BE49-F238E27FC236}">
+                <a16:creationId xmlns:a16="http://schemas.microsoft.com/office/drawing/2014/main" id="{1CAABA70-6268-414C-5999-572F86FD8623}"/>
+              </a:ext>
+            </a:extLst>
+          </p:cNvPr>
+          <p:cNvSpPr>
+            <a:spLocks noGrp="1"/>
+          </p:cNvSpPr>
+          <p:nvPr>
+            <p:ph type="sldNum" sz="quarter" idx="12"/>
+          </p:nvPr>
+        </p:nvSpPr>
+        <p:spPr/>
+        <p:txBody>
+          <a:bodyPr/>
+          <a:lstStyle/>
+          <a:p>
+            <a:fld id="{109C872D-39A9-4065-8BF3-6A613116E2A1}" type="slidenum">
+              <a:rPr lang="ko-KR" altLang="en-US" smtClean="0"/>
+              <a:t>12</a:t>
+            </a:fld>
+            <a:endParaRPr lang="ko-KR" altLang="en-US"/>
+          </a:p>
+        </p:txBody>
+      </p:sp>
+      <p:sp>
+        <p:nvSpPr>
+          <p:cNvPr id="7" name="TextBox 6">
+            <a:extLst>
+              <a:ext uri="{FF2B5EF4-FFF2-40B4-BE49-F238E27FC236}">
+                <a16:creationId xmlns:a16="http://schemas.microsoft.com/office/drawing/2014/main" id="{C0D77447-9B31-247A-CD25-C2B66CEED967}"/>
+              </a:ext>
+            </a:extLst>
+          </p:cNvPr>
+          <p:cNvSpPr txBox="1"/>
+          <p:nvPr/>
+        </p:nvSpPr>
+        <p:spPr>
+          <a:xfrm>
+            <a:off x="288790" y="958844"/>
+            <a:ext cx="11118453" cy="4846007"/>
+          </a:xfrm>
+          <a:prstGeom prst="rect">
+            <a:avLst/>
+          </a:prstGeom>
+          <a:noFill/>
+        </p:spPr>
+        <p:txBody>
+          <a:bodyPr wrap="square" rtlCol="0" anchor="t">
+            <a:spAutoFit/>
+          </a:bodyPr>
+          <a:lstStyle/>
+          <a:p>
+            <a:pPr marL="377825" indent="-285750">
+              <a:lnSpc>
+                <a:spcPct val="150000"/>
+              </a:lnSpc>
+              <a:buFont typeface="Arial" panose="020B0604020202020204" pitchFamily="34" charset="0"/>
+              <a:buChar char="•"/>
+            </a:pPr>
+            <a:r>
+              <a:rPr lang="ko-KR" altLang="en-US" sz="1600" spc="-50" dirty="0"/>
+              <a:t>에너지는 여러 기준으로 나누어 볼 수 있지만</a:t>
+            </a:r>
+            <a:r>
+              <a:rPr lang="en-US" altLang="ko-KR" sz="1600" spc="-50" dirty="0"/>
+              <a:t>, </a:t>
+            </a:r>
+            <a:r>
+              <a:rPr lang="ko-KR" altLang="en-US" sz="1600" spc="-50" dirty="0"/>
+              <a:t>우선 </a:t>
+            </a:r>
+            <a:r>
+              <a:rPr lang="en-US" altLang="ko-KR" sz="1600" spc="-50" dirty="0"/>
+              <a:t>1</a:t>
+            </a:r>
+            <a:r>
+              <a:rPr lang="ko-KR" altLang="en-US" sz="1600" spc="-50" dirty="0"/>
+              <a:t>차 에너지와 </a:t>
+            </a:r>
+            <a:r>
+              <a:rPr lang="en-US" altLang="ko-KR" sz="1600" spc="-50" dirty="0"/>
+              <a:t>2</a:t>
+            </a:r>
+            <a:r>
+              <a:rPr lang="ko-KR" altLang="en-US" sz="1600" spc="-50" dirty="0"/>
+              <a:t>차 에너지로 나누어 볼 수 있다</a:t>
+            </a:r>
+            <a:r>
+              <a:rPr lang="en-US" altLang="ko-KR" sz="1600" spc="-50" dirty="0"/>
+              <a:t>.</a:t>
+            </a:r>
+          </a:p>
+          <a:p>
+            <a:pPr marL="377825" indent="-285750">
+              <a:lnSpc>
+                <a:spcPct val="150000"/>
+              </a:lnSpc>
+              <a:buFont typeface="Arial" panose="020B0604020202020204" pitchFamily="34" charset="0"/>
+              <a:buChar char="•"/>
+            </a:pPr>
+            <a:endParaRPr lang="en-US" altLang="ko-KR" sz="1600" spc="-50" dirty="0"/>
+          </a:p>
+          <a:p>
+            <a:pPr marL="377825" indent="-285750">
+              <a:lnSpc>
+                <a:spcPct val="150000"/>
+              </a:lnSpc>
+              <a:buFont typeface="Arial" panose="020B0604020202020204" pitchFamily="34" charset="0"/>
+              <a:buChar char="•"/>
+            </a:pPr>
+            <a:r>
+              <a:rPr lang="en-US" altLang="ko-KR" sz="1600" b="1" spc="-50" dirty="0"/>
+              <a:t>1</a:t>
+            </a:r>
+            <a:r>
+              <a:rPr lang="ko-KR" altLang="en-US" sz="1600" b="1" spc="-50" dirty="0"/>
+              <a:t>차에너지</a:t>
+            </a:r>
+            <a:r>
+              <a:rPr lang="ko-KR" altLang="en-US" sz="1600" spc="-50" dirty="0"/>
+              <a:t>는 어떤 가공이나 변환을 거치지 않은 자연 상태의 에너지를 말하며</a:t>
+            </a:r>
+            <a:r>
+              <a:rPr lang="en-US" altLang="ko-KR" sz="1600" spc="-50" dirty="0"/>
+              <a:t>, </a:t>
+            </a:r>
+            <a:r>
+              <a:rPr lang="ko-KR" altLang="en-US" sz="1600" spc="-50" dirty="0"/>
+              <a:t>다음과 같이 분류해볼 수 있다</a:t>
+            </a:r>
+            <a:r>
+              <a:rPr lang="en-US" altLang="ko-KR" sz="1600" spc="-50" dirty="0"/>
+              <a:t>.</a:t>
+            </a:r>
+          </a:p>
+          <a:p>
+            <a:pPr marL="835025" lvl="1" indent="-285750">
+              <a:lnSpc>
+                <a:spcPct val="150000"/>
+              </a:lnSpc>
+              <a:buFont typeface="Wingdings" panose="05000000000000000000" pitchFamily="2" charset="2"/>
+              <a:buChar char="ü"/>
+            </a:pPr>
+            <a:r>
+              <a:rPr lang="ko-KR" altLang="en-US" sz="1600" spc="-50" dirty="0"/>
+              <a:t>땅에서 채굴하는 석탄</a:t>
+            </a:r>
+            <a:r>
+              <a:rPr lang="en-US" altLang="ko-KR" sz="1600" spc="-50" dirty="0"/>
+              <a:t>, </a:t>
+            </a:r>
+            <a:r>
+              <a:rPr lang="ko-KR" altLang="en-US" sz="1600" spc="-50" dirty="0"/>
+              <a:t>석유</a:t>
+            </a:r>
+            <a:r>
+              <a:rPr lang="en-US" altLang="ko-KR" sz="1600" spc="-50" dirty="0"/>
+              <a:t>, </a:t>
+            </a:r>
+            <a:r>
+              <a:rPr lang="ko-KR" altLang="en-US" sz="1600" spc="-50" dirty="0"/>
+              <a:t>가스 등은 유한하기 때문에 </a:t>
+            </a:r>
+            <a:r>
+              <a:rPr lang="ko-KR" altLang="en-US" sz="1600" b="1" spc="-50" dirty="0" err="1"/>
+              <a:t>고갈성</a:t>
+            </a:r>
+            <a:r>
+              <a:rPr lang="ko-KR" altLang="en-US" sz="1600" b="1" spc="-50" dirty="0"/>
+              <a:t> 에너지</a:t>
+            </a:r>
+            <a:r>
+              <a:rPr lang="ko-KR" altLang="en-US" sz="1600" spc="-50" dirty="0"/>
+              <a:t> 라고 한다</a:t>
+            </a:r>
+            <a:r>
+              <a:rPr lang="en-US" altLang="ko-KR" sz="1600" spc="-50" dirty="0"/>
+              <a:t>.</a:t>
+            </a:r>
+          </a:p>
+          <a:p>
+            <a:pPr marL="835025" lvl="1" indent="-285750">
+              <a:lnSpc>
+                <a:spcPct val="150000"/>
+              </a:lnSpc>
+              <a:buFont typeface="Wingdings" panose="05000000000000000000" pitchFamily="2" charset="2"/>
+              <a:buChar char="ü"/>
+            </a:pPr>
+            <a:r>
+              <a:rPr lang="ko-KR" altLang="en-US" sz="1600" spc="-50" dirty="0"/>
+              <a:t>태양으로 </a:t>
+            </a:r>
+            <a:r>
+              <a:rPr lang="ko-KR" altLang="en-US" sz="1600" spc="-50" dirty="0" err="1"/>
+              <a:t>부터</a:t>
+            </a:r>
+            <a:r>
+              <a:rPr lang="ko-KR" altLang="en-US" sz="1600" spc="-50" dirty="0"/>
+              <a:t> 오는 태양에너지</a:t>
+            </a:r>
+            <a:r>
+              <a:rPr lang="en-US" altLang="ko-KR" sz="1600" spc="-50" dirty="0"/>
+              <a:t>, </a:t>
+            </a:r>
+            <a:r>
+              <a:rPr lang="ko-KR" altLang="en-US" sz="1600" spc="-50" dirty="0"/>
+              <a:t>바람으로 부터 오는 바람에너지는 무한하기 때문에 </a:t>
+            </a:r>
+            <a:r>
+              <a:rPr lang="ko-KR" altLang="en-US" sz="1600" b="1" spc="-50" dirty="0"/>
+              <a:t>재생 에너지</a:t>
+            </a:r>
+            <a:r>
+              <a:rPr lang="ko-KR" altLang="en-US" sz="1600" spc="-50" dirty="0"/>
+              <a:t> 라고 한다</a:t>
+            </a:r>
+            <a:r>
+              <a:rPr lang="en-US" altLang="ko-KR" sz="1600" spc="-50" dirty="0"/>
+              <a:t>.</a:t>
+            </a:r>
+          </a:p>
+          <a:p>
+            <a:pPr marL="835025" lvl="1" indent="-285750">
+              <a:lnSpc>
+                <a:spcPct val="150000"/>
+              </a:lnSpc>
+              <a:buFont typeface="Wingdings" panose="05000000000000000000" pitchFamily="2" charset="2"/>
+              <a:buChar char="ü"/>
+            </a:pPr>
+            <a:endParaRPr lang="en-US" altLang="ko-KR" sz="1600" spc="-50" dirty="0"/>
+          </a:p>
+          <a:p>
+            <a:pPr marL="377825" indent="-285750">
+              <a:lnSpc>
+                <a:spcPct val="150000"/>
+              </a:lnSpc>
+              <a:buFont typeface="Arial" panose="020B0604020202020204" pitchFamily="34" charset="0"/>
+              <a:buChar char="•"/>
+            </a:pPr>
+            <a:r>
+              <a:rPr lang="en-US" altLang="ko-KR" sz="1600" b="1" spc="-50" dirty="0"/>
+              <a:t>2</a:t>
+            </a:r>
+            <a:r>
+              <a:rPr lang="ko-KR" altLang="en-US" sz="1600" b="1" spc="-50" dirty="0"/>
+              <a:t>차에너지</a:t>
+            </a:r>
+            <a:r>
+              <a:rPr lang="ko-KR" altLang="en-US" sz="1600" spc="-50" dirty="0"/>
+              <a:t>는 </a:t>
+            </a:r>
+            <a:r>
+              <a:rPr lang="en-US" altLang="ko-KR" sz="1600" spc="-50" dirty="0"/>
+              <a:t>1</a:t>
+            </a:r>
+            <a:r>
+              <a:rPr lang="ko-KR" altLang="en-US" sz="1600" spc="-50" dirty="0"/>
+              <a:t>차에너지를 변환</a:t>
+            </a:r>
+            <a:r>
+              <a:rPr lang="en-US" altLang="ko-KR" sz="1600" spc="-50" dirty="0"/>
+              <a:t>·</a:t>
+            </a:r>
+            <a:r>
+              <a:rPr lang="ko-KR" altLang="en-US" sz="1600" spc="-50" dirty="0"/>
+              <a:t>가공하여 우리가 사용하기 편리하게 만든 에너지를 말한다</a:t>
+            </a:r>
+            <a:r>
+              <a:rPr lang="en-US" altLang="ko-KR" sz="1600" spc="-50" dirty="0"/>
+              <a:t>.</a:t>
+            </a:r>
+          </a:p>
+          <a:p>
+            <a:pPr marL="835025" lvl="1" indent="-285750">
+              <a:lnSpc>
+                <a:spcPct val="150000"/>
+              </a:lnSpc>
+              <a:buFont typeface="Wingdings" panose="05000000000000000000" pitchFamily="2" charset="2"/>
+              <a:buChar char="ü"/>
+            </a:pPr>
+            <a:r>
+              <a:rPr lang="ko-KR" altLang="en-US" sz="1600" spc="-50" dirty="0"/>
+              <a:t>땅에서 채굴한 석유는 바로 쓸 수 없다</a:t>
+            </a:r>
+            <a:r>
+              <a:rPr lang="en-US" altLang="ko-KR" sz="1600" spc="-50" dirty="0"/>
+              <a:t>. </a:t>
+            </a:r>
+            <a:r>
+              <a:rPr lang="ko-KR" altLang="en-US" sz="1600" spc="-50" dirty="0"/>
+              <a:t>불순물이 많아서 여러 석유제품들로 분류를 해야 한다</a:t>
+            </a:r>
+            <a:r>
+              <a:rPr lang="en-US" altLang="ko-KR" sz="1600" spc="-50" dirty="0"/>
+              <a:t>.</a:t>
+            </a:r>
+          </a:p>
+          <a:p>
+            <a:pPr marL="1292225" lvl="2" indent="-285750">
+              <a:lnSpc>
+                <a:spcPct val="150000"/>
+              </a:lnSpc>
+              <a:buFont typeface="Wingdings" panose="05000000000000000000" pitchFamily="2" charset="2"/>
+              <a:buChar char="Ø"/>
+            </a:pPr>
+            <a:r>
+              <a:rPr lang="ko-KR" altLang="en-US" sz="1600" spc="-50" dirty="0"/>
+              <a:t>석유를 높은 온도에서 끓이면</a:t>
+            </a:r>
+            <a:r>
+              <a:rPr lang="en-US" altLang="ko-KR" sz="1600" spc="-50" dirty="0"/>
+              <a:t>, </a:t>
+            </a:r>
+            <a:r>
+              <a:rPr lang="ko-KR" altLang="en-US" sz="1600" spc="-50" dirty="0"/>
+              <a:t>아스팔트도 나오고</a:t>
+            </a:r>
+            <a:r>
+              <a:rPr lang="en-US" altLang="ko-KR" sz="1600" spc="-50" dirty="0"/>
+              <a:t>, </a:t>
+            </a:r>
+            <a:r>
+              <a:rPr lang="ko-KR" altLang="en-US" sz="1600" spc="-50" dirty="0"/>
+              <a:t>항공유도 나오고</a:t>
+            </a:r>
+            <a:r>
+              <a:rPr lang="en-US" altLang="ko-KR" sz="1600" spc="-50" dirty="0"/>
+              <a:t>, </a:t>
+            </a:r>
+            <a:r>
+              <a:rPr lang="ko-KR" altLang="en-US" sz="1600" spc="-50" dirty="0"/>
+              <a:t>휘발유도 나온다</a:t>
+            </a:r>
+            <a:r>
+              <a:rPr lang="en-US" altLang="ko-KR" sz="1600" spc="-50" dirty="0"/>
+              <a:t>.</a:t>
+            </a:r>
+          </a:p>
+          <a:p>
+            <a:pPr marL="1292225" lvl="2" indent="-285750">
+              <a:lnSpc>
+                <a:spcPct val="150000"/>
+              </a:lnSpc>
+              <a:buFont typeface="Wingdings" panose="05000000000000000000" pitchFamily="2" charset="2"/>
+              <a:buChar char="Ø"/>
+            </a:pPr>
+            <a:r>
+              <a:rPr lang="ko-KR" altLang="en-US" sz="1600" spc="-50" dirty="0"/>
+              <a:t>즉 석유는 </a:t>
+            </a:r>
+            <a:r>
+              <a:rPr lang="en-US" altLang="ko-KR" sz="1600" spc="-50" dirty="0"/>
+              <a:t>1</a:t>
+            </a:r>
+            <a:r>
+              <a:rPr lang="ko-KR" altLang="en-US" sz="1600" spc="-50" dirty="0"/>
+              <a:t>차에너지 이고</a:t>
+            </a:r>
+            <a:r>
+              <a:rPr lang="en-US" altLang="ko-KR" sz="1600" spc="-50" dirty="0"/>
+              <a:t>, </a:t>
+            </a:r>
+            <a:r>
+              <a:rPr lang="ko-KR" altLang="en-US" sz="1600" spc="-50" dirty="0"/>
+              <a:t>아스팔트</a:t>
+            </a:r>
+            <a:r>
+              <a:rPr lang="en-US" altLang="ko-KR" sz="1600" spc="-50" dirty="0"/>
+              <a:t>, </a:t>
+            </a:r>
+            <a:r>
+              <a:rPr lang="ko-KR" altLang="en-US" sz="1600" spc="-50" dirty="0" err="1"/>
+              <a:t>항공유</a:t>
+            </a:r>
+            <a:r>
+              <a:rPr lang="en-US" altLang="ko-KR" sz="1600" spc="-50" dirty="0"/>
+              <a:t>, </a:t>
+            </a:r>
+            <a:r>
+              <a:rPr lang="ko-KR" altLang="en-US" sz="1600" spc="-50" dirty="0"/>
+              <a:t>휘발유 등이 </a:t>
+            </a:r>
+            <a:r>
+              <a:rPr lang="en-US" altLang="ko-KR" sz="1600" spc="-50" dirty="0"/>
+              <a:t>2</a:t>
+            </a:r>
+            <a:r>
+              <a:rPr lang="ko-KR" altLang="en-US" sz="1600" spc="-50" dirty="0"/>
+              <a:t>차 에너지이다</a:t>
+            </a:r>
+            <a:r>
+              <a:rPr lang="en-US" altLang="ko-KR" sz="1600" spc="-50" dirty="0"/>
+              <a:t>.</a:t>
+            </a:r>
+          </a:p>
+          <a:p>
+            <a:pPr marL="835025" lvl="1" indent="-285750">
+              <a:lnSpc>
+                <a:spcPct val="150000"/>
+              </a:lnSpc>
+              <a:buFont typeface="Wingdings" panose="05000000000000000000" pitchFamily="2" charset="2"/>
+              <a:buChar char="ü"/>
+            </a:pPr>
+            <a:r>
+              <a:rPr lang="ko-KR" altLang="en-US" sz="1600" spc="-50" dirty="0"/>
+              <a:t>태양에너지</a:t>
+            </a:r>
+            <a:r>
+              <a:rPr lang="en-US" altLang="ko-KR" sz="1600" spc="-50" dirty="0"/>
+              <a:t>, </a:t>
+            </a:r>
+            <a:r>
+              <a:rPr lang="ko-KR" altLang="en-US" sz="1600" spc="-50" dirty="0"/>
+              <a:t>바람에너지도 바로 쓸 수 없다</a:t>
+            </a:r>
+            <a:r>
+              <a:rPr lang="en-US" altLang="ko-KR" sz="1600" spc="-50" dirty="0"/>
+              <a:t>. </a:t>
+            </a:r>
+            <a:r>
+              <a:rPr lang="ko-KR" altLang="en-US" sz="1600" spc="-50" dirty="0"/>
+              <a:t>태양광이나 풍력발전기를 통해 전기에너지로 바꿔야 한다</a:t>
+            </a:r>
+            <a:r>
+              <a:rPr lang="en-US" altLang="ko-KR" sz="1600" spc="-50" dirty="0"/>
+              <a:t>.</a:t>
+            </a:r>
+          </a:p>
+          <a:p>
+            <a:pPr marL="1292225" lvl="2" indent="-285750">
+              <a:lnSpc>
+                <a:spcPct val="150000"/>
+              </a:lnSpc>
+              <a:buFont typeface="Wingdings" panose="05000000000000000000" pitchFamily="2" charset="2"/>
+              <a:buChar char="Ø"/>
+            </a:pPr>
+            <a:r>
+              <a:rPr lang="ko-KR" altLang="en-US" sz="1600" spc="-50" dirty="0"/>
+              <a:t>태양광 패널에 햇빛이 닿으면 전기가 생산되고</a:t>
+            </a:r>
+            <a:r>
+              <a:rPr lang="en-US" altLang="ko-KR" sz="1600" spc="-50" dirty="0"/>
+              <a:t>, </a:t>
+            </a:r>
+            <a:r>
+              <a:rPr lang="ko-KR" altLang="en-US" sz="1600" spc="-50" dirty="0"/>
+              <a:t>바람이 불어서 풍력날개가 돌아가면 전기가 생산된다</a:t>
+            </a:r>
+            <a:r>
+              <a:rPr lang="en-US" altLang="ko-KR" sz="1600" spc="-50" dirty="0"/>
+              <a:t>.</a:t>
+            </a:r>
+          </a:p>
+          <a:p>
+            <a:pPr marL="1292225" lvl="2" indent="-285750">
+              <a:lnSpc>
+                <a:spcPct val="150000"/>
+              </a:lnSpc>
+              <a:buFont typeface="Wingdings" panose="05000000000000000000" pitchFamily="2" charset="2"/>
+              <a:buChar char="Ø"/>
+            </a:pPr>
+            <a:r>
+              <a:rPr lang="ko-KR" altLang="en-US" sz="1600" spc="-50" dirty="0"/>
+              <a:t>즉 태양에너지</a:t>
+            </a:r>
+            <a:r>
+              <a:rPr lang="en-US" altLang="ko-KR" sz="1600" spc="-50" dirty="0"/>
+              <a:t>, </a:t>
+            </a:r>
+            <a:r>
+              <a:rPr lang="ko-KR" altLang="en-US" sz="1600" spc="-50" dirty="0"/>
+              <a:t>바람에너지는 </a:t>
+            </a:r>
+            <a:r>
+              <a:rPr lang="en-US" altLang="ko-KR" sz="1600" spc="-50" dirty="0"/>
+              <a:t>1</a:t>
+            </a:r>
+            <a:r>
+              <a:rPr lang="ko-KR" altLang="en-US" sz="1600" spc="-50" dirty="0"/>
+              <a:t>차에너지 이고</a:t>
+            </a:r>
+            <a:r>
+              <a:rPr lang="en-US" altLang="ko-KR" sz="1600" spc="-50" dirty="0"/>
+              <a:t>, </a:t>
+            </a:r>
+            <a:r>
+              <a:rPr lang="ko-KR" altLang="en-US" sz="1600" spc="-50" dirty="0"/>
+              <a:t>전기가 </a:t>
+            </a:r>
+            <a:r>
+              <a:rPr lang="en-US" altLang="ko-KR" sz="1600" spc="-50" dirty="0"/>
+              <a:t>2</a:t>
+            </a:r>
+            <a:r>
+              <a:rPr lang="ko-KR" altLang="en-US" sz="1600" spc="-50" dirty="0"/>
+              <a:t>차에너지다</a:t>
+            </a:r>
+            <a:r>
+              <a:rPr lang="en-US" altLang="ko-KR" sz="1600" spc="-50" dirty="0"/>
+              <a:t>.</a:t>
+            </a:r>
+          </a:p>
+        </p:txBody>
+      </p:sp>
+    </p:spTree>
+    <p:extLst>
+      <p:ext uri="{BB962C8B-B14F-4D97-AF65-F5344CB8AC3E}">
+        <p14:creationId xmlns:p14="http://schemas.microsoft.com/office/powerpoint/2010/main" val="3157007352"/>
+      </p:ext>
+    </p:extLst>
+  </p:cSld>
+  <p:clrMapOvr>
+    <a:masterClrMapping/>
+  </p:clrMapOvr>
+</p:sld>
+</file>
+
+<file path=ppt/slides/slide13.xml><?xml version="1.0" encoding="utf-8"?>
+<p:sld xmlns:a="http://schemas.openxmlformats.org/drawingml/2006/main" xmlns:r="http://schemas.openxmlformats.org/officeDocument/2006/relationships" xmlns:p="http://schemas.openxmlformats.org/presentationml/2006/main">
+  <p:cSld>
+    <p:spTree>
+      <p:nvGrpSpPr>
+        <p:cNvPr id="1" name="">
+          <a:extLst>
+            <a:ext uri="{FF2B5EF4-FFF2-40B4-BE49-F238E27FC236}">
+              <a16:creationId xmlns:a16="http://schemas.microsoft.com/office/drawing/2014/main" id="{9AC8B0EB-74B1-B51C-A4E6-7DD41C0B047F}"/>
+            </a:ext>
+          </a:extLst>
+        </p:cNvPr>
+        <p:cNvGrpSpPr/>
+        <p:nvPr/>
+      </p:nvGrpSpPr>
+      <p:grpSpPr>
+        <a:xfrm>
+          <a:off x="0" y="0"/>
+          <a:ext cx="0" cy="0"/>
+          <a:chOff x="0" y="0"/>
+          <a:chExt cx="0" cy="0"/>
+        </a:xfrm>
+      </p:grpSpPr>
+      <p:pic>
+        <p:nvPicPr>
+          <p:cNvPr id="3" name="그림 2" descr="텍스트, 로고, 원, 폰트이(가) 표시된 사진&#10;&#10;AI 생성 콘텐츠는 정확하지 않을 수 있습니다.">
+            <a:extLst>
+              <a:ext uri="{FF2B5EF4-FFF2-40B4-BE49-F238E27FC236}">
+                <a16:creationId xmlns:a16="http://schemas.microsoft.com/office/drawing/2014/main" id="{C524993C-D1C3-8436-D8C1-21698BE6D1B3}"/>
+              </a:ext>
+            </a:extLst>
+          </p:cNvPr>
+          <p:cNvPicPr>
+            <a:picLocks noChangeAspect="1"/>
+          </p:cNvPicPr>
+          <p:nvPr/>
+        </p:nvPicPr>
+        <p:blipFill>
+          <a:blip r:embed="rId2">
+            <a:alphaModFix amt="20000"/>
+            <a:extLst>
+              <a:ext uri="{28A0092B-C50C-407E-A947-70E740481C1C}">
+                <a14:useLocalDpi xmlns:a14="http://schemas.microsoft.com/office/drawing/2010/main" val="0"/>
+              </a:ext>
+            </a:extLst>
+          </a:blip>
+          <a:stretch>
+            <a:fillRect/>
+          </a:stretch>
+        </p:blipFill>
+        <p:spPr>
+          <a:xfrm>
+            <a:off x="4012070" y="1673061"/>
+            <a:ext cx="4167861" cy="4167861"/>
+          </a:xfrm>
+          <a:prstGeom prst="rect">
+            <a:avLst/>
+          </a:prstGeom>
+        </p:spPr>
+      </p:pic>
+      <p:sp>
+        <p:nvSpPr>
+          <p:cNvPr id="2" name="제목 1">
+            <a:extLst>
+              <a:ext uri="{FF2B5EF4-FFF2-40B4-BE49-F238E27FC236}">
+                <a16:creationId xmlns:a16="http://schemas.microsoft.com/office/drawing/2014/main" id="{051A9577-CCBA-F474-5E82-99100C452E21}"/>
+              </a:ext>
+            </a:extLst>
+          </p:cNvPr>
+          <p:cNvSpPr>
+            <a:spLocks noGrp="1"/>
+          </p:cNvSpPr>
+          <p:nvPr>
+            <p:ph type="title"/>
+          </p:nvPr>
+        </p:nvSpPr>
+        <p:spPr>
+          <a:xfrm>
+            <a:off x="831850" y="1709739"/>
+            <a:ext cx="10515600" cy="2134292"/>
+          </a:xfrm>
+          <a:effectLst>
+            <a:reflection blurRad="50800" stA="45000" endPos="44000" dir="5400000" sy="-100000" algn="bl" rotWithShape="0"/>
+          </a:effectLst>
+        </p:spPr>
+        <p:txBody>
+          <a:bodyPr/>
+          <a:lstStyle/>
+          <a:p>
+            <a:r>
+              <a:rPr lang="en-US" altLang="ko-KR" b="1" i="0" spc="150">
+                <a:solidFill>
+                  <a:schemeClr val="accent2"/>
+                </a:solidFill>
+              </a:rPr>
+              <a:t>T</a:t>
+            </a:r>
+            <a:r>
+              <a:rPr lang="en-US" altLang="ko-KR" sz="5400" i="0" spc="100"/>
+              <a:t>hank you</a:t>
+            </a:r>
+            <a:endParaRPr lang="ko-KR" altLang="en-US" sz="5400" i="0" spc="100"/>
+          </a:p>
+        </p:txBody>
+      </p:sp>
+      <p:sp>
+        <p:nvSpPr>
+          <p:cNvPr id="4" name="슬라이드 번호 개체 틀 3">
+            <a:extLst>
+              <a:ext uri="{FF2B5EF4-FFF2-40B4-BE49-F238E27FC236}">
+                <a16:creationId xmlns:a16="http://schemas.microsoft.com/office/drawing/2014/main" id="{AF4898E0-926C-D8DA-8874-21A66F64BB68}"/>
+              </a:ext>
+            </a:extLst>
+          </p:cNvPr>
+          <p:cNvSpPr>
+            <a:spLocks noGrp="1"/>
+          </p:cNvSpPr>
+          <p:nvPr>
+            <p:ph type="sldNum" sz="quarter" idx="12"/>
+          </p:nvPr>
+        </p:nvSpPr>
+        <p:spPr/>
+        <p:txBody>
+          <a:bodyPr/>
+          <a:lstStyle/>
+          <a:p>
+            <a:fld id="{109C872D-39A9-4065-8BF3-6A613116E2A1}" type="slidenum">
+              <a:rPr lang="ko-KR" altLang="en-US" smtClean="0"/>
+              <a:t>13</a:t>
+            </a:fld>
+            <a:endParaRPr lang="ko-KR" altLang="en-US"/>
+          </a:p>
+        </p:txBody>
+      </p:sp>
+    </p:spTree>
+    <p:extLst>
+      <p:ext uri="{BB962C8B-B14F-4D97-AF65-F5344CB8AC3E}">
+        <p14:creationId xmlns:p14="http://schemas.microsoft.com/office/powerpoint/2010/main" val="3130404870"/>
+      </p:ext>
+    </p:extLst>
+  </p:cSld>
+  <p:clrMapOvr>
+    <a:masterClrMapping/>
+  </p:clrMapOvr>
+</p:sld>
+</file>
+
 <file path=ppt/slides/slide2.xml><?xml version="1.0" encoding="utf-8"?>
 <p:sld xmlns:a="http://schemas.openxmlformats.org/drawingml/2006/main" xmlns:r="http://schemas.openxmlformats.org/officeDocument/2006/relationships" xmlns:p="http://schemas.openxmlformats.org/presentationml/2006/main">
   <p:cSld>
@@ -8407,7 +9999,7 @@
         <p:cNvPr id="1" name="">
           <a:extLst>
             <a:ext uri="{FF2B5EF4-FFF2-40B4-BE49-F238E27FC236}">
-              <a16:creationId xmlns:a16="http://schemas.microsoft.com/office/drawing/2014/main" id="{9AC8B0EB-74B1-B51C-A4E6-7DD41C0B047F}"/>
+              <a16:creationId xmlns:a16="http://schemas.microsoft.com/office/drawing/2014/main" id="{A8B71EBB-D2D8-9617-09A3-D11B6FF729A0}"/>
             </a:ext>
           </a:extLst>
         </p:cNvPr>
@@ -8422,49 +10014,12 @@
           <a:chExt cx="0" cy="0"/>
         </a:xfrm>
       </p:grpSpPr>
-      <p:pic>
-        <p:nvPicPr>
-          <p:cNvPr id="3" name="그림 2" descr="텍스트, 로고, 원, 폰트이(가) 표시된 사진&#10;&#10;AI 생성 콘텐츠는 정확하지 않을 수 있습니다.">
-            <a:extLst>
-              <a:ext uri="{FF2B5EF4-FFF2-40B4-BE49-F238E27FC236}">
-                <a16:creationId xmlns:a16="http://schemas.microsoft.com/office/drawing/2014/main" id="{C524993C-D1C3-8436-D8C1-21698BE6D1B3}"/>
-              </a:ext>
-            </a:extLst>
-          </p:cNvPr>
-          <p:cNvPicPr>
-            <a:picLocks noChangeAspect="1"/>
-          </p:cNvPicPr>
-          <p:nvPr/>
-        </p:nvPicPr>
-        <p:blipFill>
-          <a:blip r:embed="rId2">
-            <a:alphaModFix amt="20000"/>
-            <a:extLst>
-              <a:ext uri="{28A0092B-C50C-407E-A947-70E740481C1C}">
-                <a14:useLocalDpi xmlns:a14="http://schemas.microsoft.com/office/drawing/2010/main" val="0"/>
-              </a:ext>
-            </a:extLst>
-          </a:blip>
-          <a:stretch>
-            <a:fillRect/>
-          </a:stretch>
-        </p:blipFill>
-        <p:spPr>
-          <a:xfrm>
-            <a:off x="4012070" y="1673061"/>
-            <a:ext cx="4167861" cy="4167861"/>
-          </a:xfrm>
-          <a:prstGeom prst="rect">
-            <a:avLst/>
-          </a:prstGeom>
-        </p:spPr>
-      </p:pic>
       <p:sp>
         <p:nvSpPr>
           <p:cNvPr id="2" name="제목 1">
             <a:extLst>
               <a:ext uri="{FF2B5EF4-FFF2-40B4-BE49-F238E27FC236}">
-                <a16:creationId xmlns:a16="http://schemas.microsoft.com/office/drawing/2014/main" id="{051A9577-CCBA-F474-5E82-99100C452E21}"/>
+                <a16:creationId xmlns:a16="http://schemas.microsoft.com/office/drawing/2014/main" id="{FE22F78D-FB98-8132-782C-C73E86EAE733}"/>
               </a:ext>
             </a:extLst>
           </p:cNvPr>
@@ -8475,32 +10030,15 @@
             <p:ph type="title"/>
           </p:nvPr>
         </p:nvSpPr>
-        <p:spPr>
-          <a:xfrm>
-            <a:off x="831850" y="1709739"/>
-            <a:ext cx="10515600" cy="2134292"/>
-          </a:xfrm>
-          <a:effectLst>
-            <a:reflection blurRad="50800" stA="45000" endPos="44000" dir="5400000" sy="-100000" algn="bl" rotWithShape="0"/>
-          </a:effectLst>
-        </p:spPr>
+        <p:spPr/>
         <p:txBody>
           <a:bodyPr/>
           <a:lstStyle/>
           <a:p>
             <a:r>
-              <a:rPr lang="en-US" altLang="ko-KR" b="1" i="0" spc="150">
-                <a:solidFill>
-                  <a:schemeClr val="accent2"/>
-                </a:solidFill>
-              </a:rPr>
-              <a:t>T</a:t>
-            </a:r>
-            <a:r>
-              <a:rPr lang="en-US" altLang="ko-KR" sz="5400" i="0" spc="100"/>
-              <a:t>hank you</a:t>
-            </a:r>
-            <a:endParaRPr lang="ko-KR" altLang="en-US" sz="5400" i="0" spc="100"/>
+              <a:rPr lang="ko-KR" altLang="en-US" dirty="0"/>
+              <a:t>에너지의 여러가지 형태</a:t>
+            </a:r>
           </a:p>
         </p:txBody>
       </p:sp>
@@ -8509,7 +10047,7 @@
           <p:cNvPr id="4" name="슬라이드 번호 개체 틀 3">
             <a:extLst>
               <a:ext uri="{FF2B5EF4-FFF2-40B4-BE49-F238E27FC236}">
-                <a16:creationId xmlns:a16="http://schemas.microsoft.com/office/drawing/2014/main" id="{AF4898E0-926C-D8DA-8874-21A66F64BB68}"/>
+                <a16:creationId xmlns:a16="http://schemas.microsoft.com/office/drawing/2014/main" id="{C18B8E7D-C741-21A2-7291-9DF4D2462318}"/>
               </a:ext>
             </a:extLst>
           </p:cNvPr>
@@ -8533,10 +10071,1819 @@
           </a:p>
         </p:txBody>
       </p:sp>
+      <p:sp>
+        <p:nvSpPr>
+          <p:cNvPr id="7" name="TextBox 6">
+            <a:extLst>
+              <a:ext uri="{FF2B5EF4-FFF2-40B4-BE49-F238E27FC236}">
+                <a16:creationId xmlns:a16="http://schemas.microsoft.com/office/drawing/2014/main" id="{682EDD64-57EE-174F-25CE-330DED40693E}"/>
+              </a:ext>
+            </a:extLst>
+          </p:cNvPr>
+          <p:cNvSpPr txBox="1"/>
+          <p:nvPr/>
+        </p:nvSpPr>
+        <p:spPr>
+          <a:xfrm>
+            <a:off x="288790" y="958844"/>
+            <a:ext cx="11118453" cy="4107343"/>
+          </a:xfrm>
+          <a:prstGeom prst="rect">
+            <a:avLst/>
+          </a:prstGeom>
+          <a:noFill/>
+        </p:spPr>
+        <p:txBody>
+          <a:bodyPr wrap="square" rtlCol="0" anchor="t">
+            <a:spAutoFit/>
+          </a:bodyPr>
+          <a:lstStyle/>
+          <a:p>
+            <a:pPr marL="377825" indent="-285750">
+              <a:lnSpc>
+                <a:spcPct val="150000"/>
+              </a:lnSpc>
+              <a:buFont typeface="Arial" panose="020B0604020202020204" pitchFamily="34" charset="0"/>
+              <a:buChar char="•"/>
+            </a:pPr>
+            <a:r>
+              <a:rPr lang="ko-KR" altLang="en-US" sz="1600" spc="-50" dirty="0"/>
+              <a:t>직접 눈에 보이지는 않지만</a:t>
+            </a:r>
+            <a:r>
+              <a:rPr lang="en-US" altLang="ko-KR" sz="1600" spc="-50" dirty="0"/>
+              <a:t>, </a:t>
+            </a:r>
+            <a:r>
+              <a:rPr lang="ko-KR" altLang="en-US" sz="1600" spc="-50" dirty="0"/>
+              <a:t>일상 생활을 하다 보면 여러가지 형태의 에너지를 감지할 수 있다</a:t>
+            </a:r>
+            <a:r>
+              <a:rPr lang="en-US" altLang="ko-KR" sz="1600" spc="-50" dirty="0"/>
+              <a:t>.</a:t>
+            </a:r>
+          </a:p>
+          <a:p>
+            <a:pPr marL="835025" lvl="1" indent="-285750">
+              <a:lnSpc>
+                <a:spcPct val="150000"/>
+              </a:lnSpc>
+              <a:buFont typeface="Wingdings" panose="05000000000000000000" pitchFamily="2" charset="2"/>
+              <a:buChar char="ü"/>
+            </a:pPr>
+            <a:r>
+              <a:rPr lang="ko-KR" altLang="en-US" sz="1600" spc="-50" dirty="0"/>
+              <a:t>빛 에너지</a:t>
+            </a:r>
+            <a:r>
+              <a:rPr lang="en-US" altLang="ko-KR" sz="1600" spc="-50" dirty="0"/>
+              <a:t>: </a:t>
+            </a:r>
+            <a:r>
+              <a:rPr lang="ko-KR" altLang="en-US" sz="1600" spc="-50" dirty="0"/>
+              <a:t>우리 주변을 환하게 비추어주는 햇빛</a:t>
+            </a:r>
+            <a:r>
+              <a:rPr lang="en-US" altLang="ko-KR" sz="1600" spc="-50" dirty="0"/>
+              <a:t>, </a:t>
+            </a:r>
+            <a:r>
+              <a:rPr lang="ko-KR" altLang="en-US" sz="1600" spc="-50" dirty="0"/>
+              <a:t>조명</a:t>
+            </a:r>
+            <a:r>
+              <a:rPr lang="en-US" altLang="ko-KR" sz="1600" spc="-50" dirty="0"/>
+              <a:t>(LED </a:t>
+            </a:r>
+            <a:r>
+              <a:rPr lang="ko-KR" altLang="en-US" sz="1600" spc="-50" dirty="0"/>
+              <a:t>및 </a:t>
+            </a:r>
+            <a:r>
+              <a:rPr lang="ko-KR" altLang="en-US" sz="1600" spc="-50" dirty="0" err="1"/>
+              <a:t>백열구</a:t>
+            </a:r>
+            <a:r>
+              <a:rPr lang="en-US" altLang="ko-KR" sz="1600" spc="-50" dirty="0"/>
+              <a:t>)</a:t>
+            </a:r>
+            <a:r>
+              <a:rPr lang="ko-KR" altLang="en-US" sz="1600" spc="-50" dirty="0"/>
+              <a:t>은 빛을 낸다</a:t>
+            </a:r>
+            <a:r>
+              <a:rPr lang="en-US" altLang="ko-KR" sz="1600" spc="-50" dirty="0"/>
+              <a:t>.</a:t>
+            </a:r>
+            <a:r>
+              <a:rPr lang="ko-KR" altLang="en-US" sz="1600" spc="-50" dirty="0"/>
+              <a:t> </a:t>
+            </a:r>
+            <a:endParaRPr lang="en-US" altLang="ko-KR" sz="1600" spc="-50" dirty="0"/>
+          </a:p>
+          <a:p>
+            <a:pPr marL="835025" lvl="1" indent="-285750">
+              <a:lnSpc>
+                <a:spcPct val="150000"/>
+              </a:lnSpc>
+              <a:buFont typeface="Wingdings" panose="05000000000000000000" pitchFamily="2" charset="2"/>
+              <a:buChar char="ü"/>
+            </a:pPr>
+            <a:r>
+              <a:rPr lang="ko-KR" altLang="en-US" sz="1600" spc="-50" dirty="0"/>
+              <a:t>소리 에너지</a:t>
+            </a:r>
+            <a:r>
+              <a:rPr lang="en-US" altLang="ko-KR" sz="1600" spc="-50" dirty="0"/>
+              <a:t>: </a:t>
+            </a:r>
+            <a:r>
+              <a:rPr lang="ko-KR" altLang="en-US" sz="1600" spc="-50" dirty="0"/>
+              <a:t>사람 목소리</a:t>
+            </a:r>
+            <a:r>
+              <a:rPr lang="en-US" altLang="ko-KR" sz="1600" spc="-50" dirty="0"/>
+              <a:t>, </a:t>
+            </a:r>
+            <a:r>
+              <a:rPr lang="ko-KR" altLang="en-US" sz="1600" spc="-50" dirty="0"/>
+              <a:t>스피커 등에서 발생하는 소리는 공기의 진동이 우리 귀에 전달된다</a:t>
+            </a:r>
+            <a:r>
+              <a:rPr lang="en-US" altLang="ko-KR" sz="1600" spc="-50" dirty="0"/>
+              <a:t>.</a:t>
+            </a:r>
+          </a:p>
+          <a:p>
+            <a:pPr marL="835025" lvl="1" indent="-285750">
+              <a:lnSpc>
+                <a:spcPct val="150000"/>
+              </a:lnSpc>
+              <a:buFont typeface="Wingdings" panose="05000000000000000000" pitchFamily="2" charset="2"/>
+              <a:buChar char="ü"/>
+            </a:pPr>
+            <a:r>
+              <a:rPr lang="ko-KR" altLang="en-US" sz="1600" spc="-50" dirty="0"/>
+              <a:t>열 에너지</a:t>
+            </a:r>
+            <a:r>
+              <a:rPr lang="en-US" altLang="ko-KR" sz="1600" spc="-50" dirty="0"/>
+              <a:t>: </a:t>
+            </a:r>
+            <a:r>
+              <a:rPr lang="ko-KR" altLang="en-US" sz="1600" spc="-50" dirty="0"/>
+              <a:t>따뜻한 커피가 담긴 컵을 만지면 열이 전달되면서 손이 따뜻하게 느껴진다</a:t>
+            </a:r>
+            <a:r>
+              <a:rPr lang="en-US" altLang="ko-KR" sz="1600" spc="-50" dirty="0"/>
+              <a:t>.</a:t>
+            </a:r>
+          </a:p>
+          <a:p>
+            <a:pPr marL="835025" lvl="1" indent="-285750">
+              <a:lnSpc>
+                <a:spcPct val="150000"/>
+              </a:lnSpc>
+              <a:buFont typeface="Wingdings" panose="05000000000000000000" pitchFamily="2" charset="2"/>
+              <a:buChar char="ü"/>
+            </a:pPr>
+            <a:r>
+              <a:rPr lang="ko-KR" altLang="en-US" sz="1600" spc="-50" dirty="0"/>
+              <a:t>운동 에너지</a:t>
+            </a:r>
+            <a:r>
+              <a:rPr lang="en-US" altLang="ko-KR" sz="1600" spc="-50" dirty="0"/>
+              <a:t>: </a:t>
+            </a:r>
+            <a:r>
+              <a:rPr lang="ko-KR" altLang="en-US" sz="1600" spc="-50" dirty="0"/>
+              <a:t>달리는 자동차</a:t>
+            </a:r>
+            <a:r>
+              <a:rPr lang="en-US" altLang="ko-KR" sz="1600" spc="-50" dirty="0"/>
+              <a:t>, </a:t>
+            </a:r>
+            <a:r>
+              <a:rPr lang="ko-KR" altLang="en-US" sz="1600" spc="-50" dirty="0"/>
+              <a:t>흐르는 강물</a:t>
+            </a:r>
+            <a:r>
+              <a:rPr lang="en-US" altLang="ko-KR" sz="1600" spc="-50" dirty="0"/>
+              <a:t> </a:t>
+            </a:r>
+            <a:r>
+              <a:rPr lang="ko-KR" altLang="en-US" sz="1600" spc="-50" dirty="0"/>
+              <a:t>등 움직이는 모든 물체는 운동 에너지를 갖는다</a:t>
+            </a:r>
+            <a:r>
+              <a:rPr lang="en-US" altLang="ko-KR" sz="1600" spc="-50" dirty="0"/>
+              <a:t>. </a:t>
+            </a:r>
+          </a:p>
+          <a:p>
+            <a:pPr marL="835025" lvl="1" indent="-285750">
+              <a:lnSpc>
+                <a:spcPct val="150000"/>
+              </a:lnSpc>
+              <a:buFont typeface="Wingdings" panose="05000000000000000000" pitchFamily="2" charset="2"/>
+              <a:buChar char="ü"/>
+            </a:pPr>
+            <a:r>
+              <a:rPr lang="ko-KR" altLang="en-US" sz="1600" spc="-50" dirty="0"/>
+              <a:t>전기 에너지</a:t>
+            </a:r>
+            <a:r>
+              <a:rPr lang="en-US" altLang="ko-KR" sz="1600" spc="-50" dirty="0"/>
+              <a:t>: </a:t>
+            </a:r>
+            <a:r>
+              <a:rPr lang="ko-KR" altLang="en-US" sz="1600" spc="-50" dirty="0"/>
+              <a:t>선풍기를 콘센트와 연결하면 움직인다</a:t>
+            </a:r>
+            <a:r>
+              <a:rPr lang="en-US" altLang="ko-KR" sz="1600" spc="-50" dirty="0"/>
+              <a:t>.</a:t>
+            </a:r>
+          </a:p>
+          <a:p>
+            <a:pPr marL="835025" lvl="1" indent="-285750">
+              <a:lnSpc>
+                <a:spcPct val="150000"/>
+              </a:lnSpc>
+              <a:buFont typeface="Wingdings" panose="05000000000000000000" pitchFamily="2" charset="2"/>
+              <a:buChar char="ü"/>
+            </a:pPr>
+            <a:r>
+              <a:rPr lang="ko-KR" altLang="en-US" sz="1600" spc="-50" dirty="0"/>
+              <a:t>자기 에너지</a:t>
+            </a:r>
+            <a:r>
+              <a:rPr lang="en-US" altLang="ko-KR" sz="1600" spc="-50" dirty="0"/>
+              <a:t>: </a:t>
+            </a:r>
+            <a:r>
+              <a:rPr lang="ko-KR" altLang="en-US" sz="1600" spc="-50" dirty="0"/>
+              <a:t>냉장고에 자석을 가까이 대면 저절로 움직여서 붙는다</a:t>
+            </a:r>
+            <a:r>
+              <a:rPr lang="en-US" altLang="ko-KR" sz="1600" spc="-50" dirty="0"/>
+              <a:t>.</a:t>
+            </a:r>
+          </a:p>
+          <a:p>
+            <a:pPr marL="835025" lvl="1" indent="-285750">
+              <a:lnSpc>
+                <a:spcPct val="150000"/>
+              </a:lnSpc>
+              <a:buFont typeface="Wingdings" panose="05000000000000000000" pitchFamily="2" charset="2"/>
+              <a:buChar char="ü"/>
+            </a:pPr>
+            <a:r>
+              <a:rPr lang="ko-KR" altLang="en-US" sz="1600" spc="-50" dirty="0"/>
+              <a:t>위치 에너지</a:t>
+            </a:r>
+            <a:r>
+              <a:rPr lang="en-US" altLang="ko-KR" sz="1600" spc="-50" dirty="0"/>
+              <a:t>: </a:t>
+            </a:r>
+            <a:r>
+              <a:rPr lang="ko-KR" altLang="en-US" sz="1600" spc="-50" dirty="0"/>
+              <a:t>높은 곳에 있는 물체는 아래로 떨어지기 마련이다</a:t>
+            </a:r>
+            <a:r>
+              <a:rPr lang="en-US" altLang="ko-KR" sz="1600" spc="-50" dirty="0"/>
+              <a:t>.</a:t>
+            </a:r>
+          </a:p>
+          <a:p>
+            <a:pPr marL="835025" lvl="1" indent="-285750">
+              <a:lnSpc>
+                <a:spcPct val="150000"/>
+              </a:lnSpc>
+              <a:buFont typeface="Wingdings" panose="05000000000000000000" pitchFamily="2" charset="2"/>
+              <a:buChar char="ü"/>
+            </a:pPr>
+            <a:r>
+              <a:rPr lang="ko-KR" altLang="en-US" sz="1600" spc="-50" dirty="0"/>
+              <a:t>화학 에너지</a:t>
+            </a:r>
+            <a:r>
+              <a:rPr lang="en-US" altLang="ko-KR" sz="1600" spc="-50" dirty="0"/>
+              <a:t>: </a:t>
+            </a:r>
+            <a:r>
+              <a:rPr lang="ko-KR" altLang="en-US" sz="1600" spc="-50" dirty="0"/>
+              <a:t>석탄</a:t>
+            </a:r>
+            <a:r>
+              <a:rPr lang="en-US" altLang="ko-KR" sz="1600" spc="-50" dirty="0"/>
+              <a:t>, </a:t>
+            </a:r>
+            <a:r>
+              <a:rPr lang="ko-KR" altLang="en-US" sz="1600" spc="-50" dirty="0"/>
+              <a:t>석유</a:t>
+            </a:r>
+            <a:r>
+              <a:rPr lang="en-US" altLang="ko-KR" sz="1600" spc="-50" dirty="0"/>
+              <a:t>, </a:t>
+            </a:r>
+            <a:r>
+              <a:rPr lang="ko-KR" altLang="en-US" sz="1600" spc="-50" dirty="0"/>
+              <a:t>천연가스</a:t>
+            </a:r>
+            <a:r>
+              <a:rPr lang="en-US" altLang="ko-KR" sz="1600" spc="-50" dirty="0"/>
+              <a:t>, </a:t>
+            </a:r>
+            <a:r>
+              <a:rPr lang="ko-KR" altLang="en-US" sz="1600" spc="-50" dirty="0"/>
+              <a:t>음식</a:t>
+            </a:r>
+            <a:r>
+              <a:rPr lang="en-US" altLang="ko-KR" sz="1600" spc="-50" dirty="0"/>
+              <a:t>, </a:t>
+            </a:r>
+            <a:r>
+              <a:rPr lang="ko-KR" altLang="en-US" sz="1600" spc="-50" dirty="0"/>
+              <a:t>배터리</a:t>
+            </a:r>
+            <a:r>
+              <a:rPr lang="en-US" altLang="ko-KR" sz="1600" spc="-50" dirty="0"/>
+              <a:t> </a:t>
+            </a:r>
+            <a:r>
+              <a:rPr lang="ko-KR" altLang="en-US" sz="1600" spc="-50" dirty="0"/>
+              <a:t>등에는 화학 결합 속에 에너지가 저장되어 있다</a:t>
+            </a:r>
+            <a:r>
+              <a:rPr lang="en-US" altLang="ko-KR" sz="1600" spc="-50" dirty="0"/>
+              <a:t>. </a:t>
+            </a:r>
+          </a:p>
+          <a:p>
+            <a:pPr marL="835025" lvl="1" indent="-285750">
+              <a:lnSpc>
+                <a:spcPct val="150000"/>
+              </a:lnSpc>
+              <a:buFont typeface="Wingdings" panose="05000000000000000000" pitchFamily="2" charset="2"/>
+              <a:buChar char="ü"/>
+            </a:pPr>
+            <a:r>
+              <a:rPr lang="ko-KR" altLang="en-US" sz="1600" spc="-50" dirty="0"/>
+              <a:t>핵 에너지</a:t>
+            </a:r>
+            <a:r>
+              <a:rPr lang="en-US" altLang="ko-KR" sz="1600" spc="-50" dirty="0"/>
+              <a:t>: </a:t>
+            </a:r>
+            <a:r>
+              <a:rPr lang="ko-KR" altLang="en-US" sz="1600" spc="-50" dirty="0"/>
+              <a:t>원자핵 내부에는 막대한 에너지가 저장되어 있으며</a:t>
+            </a:r>
+            <a:r>
+              <a:rPr lang="en-US" altLang="ko-KR" sz="1600" spc="-50" dirty="0"/>
+              <a:t>, </a:t>
+            </a:r>
+            <a:r>
+              <a:rPr lang="ko-KR" altLang="en-US" sz="1600" spc="-50" dirty="0"/>
+              <a:t>원자력발전을 통해 이용할 수 있다</a:t>
+            </a:r>
+            <a:r>
+              <a:rPr lang="en-US" altLang="ko-KR" sz="1600" spc="-50" dirty="0"/>
+              <a:t>.</a:t>
+            </a:r>
+          </a:p>
+          <a:p>
+            <a:pPr marL="835025" lvl="1" indent="-285750">
+              <a:lnSpc>
+                <a:spcPct val="150000"/>
+              </a:lnSpc>
+              <a:buFont typeface="Wingdings" panose="05000000000000000000" pitchFamily="2" charset="2"/>
+              <a:buChar char="ü"/>
+            </a:pPr>
+            <a:endParaRPr lang="en-US" altLang="ko-KR" sz="1600" spc="-50" dirty="0"/>
+          </a:p>
+        </p:txBody>
+      </p:sp>
     </p:spTree>
     <p:extLst>
       <p:ext uri="{BB962C8B-B14F-4D97-AF65-F5344CB8AC3E}">
-        <p14:creationId xmlns:p14="http://schemas.microsoft.com/office/powerpoint/2010/main" val="3130404870"/>
+        <p14:creationId xmlns:p14="http://schemas.microsoft.com/office/powerpoint/2010/main" val="922221152"/>
+      </p:ext>
+    </p:extLst>
+  </p:cSld>
+  <p:clrMapOvr>
+    <a:masterClrMapping/>
+  </p:clrMapOvr>
+</p:sld>
+</file>
+
+<file path=ppt/slides/slide7.xml><?xml version="1.0" encoding="utf-8"?>
+<p:sld xmlns:a="http://schemas.openxmlformats.org/drawingml/2006/main" xmlns:r="http://schemas.openxmlformats.org/officeDocument/2006/relationships" xmlns:p="http://schemas.openxmlformats.org/presentationml/2006/main">
+  <p:cSld>
+    <p:spTree>
+      <p:nvGrpSpPr>
+        <p:cNvPr id="1" name="">
+          <a:extLst>
+            <a:ext uri="{FF2B5EF4-FFF2-40B4-BE49-F238E27FC236}">
+              <a16:creationId xmlns:a16="http://schemas.microsoft.com/office/drawing/2014/main" id="{453C3140-3073-FAD2-0D3D-7546D5E99E39}"/>
+            </a:ext>
+          </a:extLst>
+        </p:cNvPr>
+        <p:cNvGrpSpPr/>
+        <p:nvPr/>
+      </p:nvGrpSpPr>
+      <p:grpSpPr>
+        <a:xfrm>
+          <a:off x="0" y="0"/>
+          <a:ext cx="0" cy="0"/>
+          <a:chOff x="0" y="0"/>
+          <a:chExt cx="0" cy="0"/>
+        </a:xfrm>
+      </p:grpSpPr>
+      <p:sp>
+        <p:nvSpPr>
+          <p:cNvPr id="2" name="제목 1">
+            <a:extLst>
+              <a:ext uri="{FF2B5EF4-FFF2-40B4-BE49-F238E27FC236}">
+                <a16:creationId xmlns:a16="http://schemas.microsoft.com/office/drawing/2014/main" id="{A926CD74-A62C-1AA6-BED3-B2CCB7F563B3}"/>
+              </a:ext>
+            </a:extLst>
+          </p:cNvPr>
+          <p:cNvSpPr>
+            <a:spLocks noGrp="1"/>
+          </p:cNvSpPr>
+          <p:nvPr>
+            <p:ph type="title"/>
+          </p:nvPr>
+        </p:nvSpPr>
+        <p:spPr/>
+        <p:txBody>
+          <a:bodyPr/>
+          <a:lstStyle/>
+          <a:p>
+            <a:r>
+              <a:rPr lang="ko-KR" altLang="en-US" dirty="0"/>
+              <a:t>다양한 에너지 변환</a:t>
+            </a:r>
+          </a:p>
+        </p:txBody>
+      </p:sp>
+      <p:sp>
+        <p:nvSpPr>
+          <p:cNvPr id="4" name="슬라이드 번호 개체 틀 3">
+            <a:extLst>
+              <a:ext uri="{FF2B5EF4-FFF2-40B4-BE49-F238E27FC236}">
+                <a16:creationId xmlns:a16="http://schemas.microsoft.com/office/drawing/2014/main" id="{49A9CD73-B454-8B86-0FC5-CC8697C9DAD0}"/>
+              </a:ext>
+            </a:extLst>
+          </p:cNvPr>
+          <p:cNvSpPr>
+            <a:spLocks noGrp="1"/>
+          </p:cNvSpPr>
+          <p:nvPr>
+            <p:ph type="sldNum" sz="quarter" idx="12"/>
+          </p:nvPr>
+        </p:nvSpPr>
+        <p:spPr/>
+        <p:txBody>
+          <a:bodyPr/>
+          <a:lstStyle/>
+          <a:p>
+            <a:fld id="{109C872D-39A9-4065-8BF3-6A613116E2A1}" type="slidenum">
+              <a:rPr lang="ko-KR" altLang="en-US" smtClean="0"/>
+              <a:t>7</a:t>
+            </a:fld>
+            <a:endParaRPr lang="ko-KR" altLang="en-US"/>
+          </a:p>
+        </p:txBody>
+      </p:sp>
+      <p:sp>
+        <p:nvSpPr>
+          <p:cNvPr id="7" name="TextBox 6">
+            <a:extLst>
+              <a:ext uri="{FF2B5EF4-FFF2-40B4-BE49-F238E27FC236}">
+                <a16:creationId xmlns:a16="http://schemas.microsoft.com/office/drawing/2014/main" id="{150CC514-5395-6E71-C8E4-133A03D17712}"/>
+              </a:ext>
+            </a:extLst>
+          </p:cNvPr>
+          <p:cNvSpPr txBox="1"/>
+          <p:nvPr/>
+        </p:nvSpPr>
+        <p:spPr>
+          <a:xfrm>
+            <a:off x="288790" y="958844"/>
+            <a:ext cx="11118453" cy="5584670"/>
+          </a:xfrm>
+          <a:prstGeom prst="rect">
+            <a:avLst/>
+          </a:prstGeom>
+          <a:noFill/>
+        </p:spPr>
+        <p:txBody>
+          <a:bodyPr wrap="square" rtlCol="0" anchor="t">
+            <a:spAutoFit/>
+          </a:bodyPr>
+          <a:lstStyle/>
+          <a:p>
+            <a:pPr marL="377825" indent="-285750">
+              <a:lnSpc>
+                <a:spcPct val="150000"/>
+              </a:lnSpc>
+              <a:buFont typeface="Arial" panose="020B0604020202020204" pitchFamily="34" charset="0"/>
+              <a:buChar char="•"/>
+            </a:pPr>
+            <a:r>
+              <a:rPr lang="ko-KR" altLang="en-US" sz="1600" spc="-50" dirty="0"/>
+              <a:t>우리는 앞서 살펴본 여러가지 에너지 형태를 상황에 맞게 편리한 형태로 바꾸어 </a:t>
+            </a:r>
+            <a:r>
+              <a:rPr lang="en-US" altLang="ko-KR" sz="1600" spc="-50" dirty="0"/>
+              <a:t>(</a:t>
+            </a:r>
+            <a:r>
+              <a:rPr lang="ko-KR" altLang="en-US" sz="1600" spc="-50" dirty="0"/>
+              <a:t>에너지 변환</a:t>
+            </a:r>
+            <a:r>
+              <a:rPr lang="en-US" altLang="ko-KR" sz="1600" spc="-50" dirty="0"/>
+              <a:t>)</a:t>
+            </a:r>
+            <a:r>
+              <a:rPr lang="ko-KR" altLang="en-US" sz="1600" spc="-50" dirty="0"/>
+              <a:t> 가면서 생활한다</a:t>
+            </a:r>
+            <a:r>
+              <a:rPr lang="en-US" altLang="ko-KR" sz="1600" spc="-50" dirty="0"/>
+              <a:t>.</a:t>
+            </a:r>
+            <a:r>
+              <a:rPr lang="ko-KR" altLang="en-US" sz="1600" spc="-50" dirty="0"/>
+              <a:t> </a:t>
+            </a:r>
+            <a:endParaRPr lang="en-US" altLang="ko-KR" sz="1600" spc="-50" dirty="0"/>
+          </a:p>
+          <a:p>
+            <a:pPr marL="835025" lvl="1" indent="-285750">
+              <a:lnSpc>
+                <a:spcPct val="150000"/>
+              </a:lnSpc>
+              <a:buFont typeface="Wingdings" panose="05000000000000000000" pitchFamily="2" charset="2"/>
+              <a:buChar char="ü"/>
+            </a:pPr>
+            <a:r>
+              <a:rPr lang="ko-KR" altLang="en-US" sz="1600" spc="-50" dirty="0" err="1"/>
+              <a:t>헤어드라이기는</a:t>
+            </a:r>
+            <a:r>
+              <a:rPr lang="ko-KR" altLang="en-US" sz="1600" spc="-50" dirty="0"/>
+              <a:t> 전기를 열 에너지와 운동에너지로 변환 시킨다</a:t>
+            </a:r>
+            <a:r>
+              <a:rPr lang="en-US" altLang="ko-KR" sz="1600" spc="-50" dirty="0"/>
+              <a:t>.</a:t>
+            </a:r>
+          </a:p>
+          <a:p>
+            <a:pPr marL="1292225" lvl="2" indent="-285750">
+              <a:lnSpc>
+                <a:spcPct val="150000"/>
+              </a:lnSpc>
+              <a:buFont typeface="Wingdings" panose="05000000000000000000" pitchFamily="2" charset="2"/>
+              <a:buChar char="Ø"/>
+            </a:pPr>
+            <a:r>
+              <a:rPr lang="ko-KR" altLang="en-US" sz="1600" spc="-50" dirty="0"/>
+              <a:t>콘센트</a:t>
+            </a:r>
+            <a:r>
+              <a:rPr lang="en-US" altLang="ko-KR" sz="1600" spc="-50" dirty="0"/>
+              <a:t>(</a:t>
+            </a:r>
+            <a:r>
+              <a:rPr lang="ko-KR" altLang="en-US" sz="1600" spc="-50" dirty="0"/>
+              <a:t>전기</a:t>
+            </a:r>
+            <a:r>
+              <a:rPr lang="en-US" altLang="ko-KR" sz="1600" spc="-50" dirty="0"/>
+              <a:t>)</a:t>
+            </a:r>
+            <a:r>
+              <a:rPr lang="ko-KR" altLang="en-US" sz="1600" spc="-50" dirty="0"/>
+              <a:t>를 꼽으면 뜨거운 바람</a:t>
+            </a:r>
+            <a:r>
+              <a:rPr lang="en-US" altLang="ko-KR" sz="1600" spc="-50" dirty="0"/>
+              <a:t>(</a:t>
+            </a:r>
+            <a:r>
+              <a:rPr lang="ko-KR" altLang="en-US" sz="1600" spc="-50" dirty="0"/>
+              <a:t>열</a:t>
+            </a:r>
+            <a:r>
+              <a:rPr lang="en-US" altLang="ko-KR" sz="1600" spc="-50" dirty="0"/>
+              <a:t>+</a:t>
+            </a:r>
+            <a:r>
+              <a:rPr lang="ko-KR" altLang="en-US" sz="1600" spc="-50" dirty="0"/>
+              <a:t>운동</a:t>
+            </a:r>
+            <a:r>
+              <a:rPr lang="en-US" altLang="ko-KR" sz="1600" spc="-50" dirty="0"/>
+              <a:t>)</a:t>
+            </a:r>
+            <a:r>
+              <a:rPr lang="ko-KR" altLang="en-US" sz="1600" spc="-50" dirty="0"/>
+              <a:t>이 나온다</a:t>
+            </a:r>
+            <a:r>
+              <a:rPr lang="en-US" altLang="ko-KR" sz="1600" spc="-50" dirty="0"/>
+              <a:t>.</a:t>
+            </a:r>
+          </a:p>
+          <a:p>
+            <a:pPr marL="1292225" lvl="2" indent="-285750">
+              <a:lnSpc>
+                <a:spcPct val="150000"/>
+              </a:lnSpc>
+              <a:buFont typeface="Wingdings" panose="05000000000000000000" pitchFamily="2" charset="2"/>
+              <a:buChar char="Ø"/>
+            </a:pPr>
+            <a:endParaRPr lang="en-US" altLang="ko-KR" sz="1600" spc="-50" dirty="0"/>
+          </a:p>
+          <a:p>
+            <a:pPr marL="835025" lvl="1" indent="-285750">
+              <a:lnSpc>
+                <a:spcPct val="150000"/>
+              </a:lnSpc>
+              <a:buFont typeface="Wingdings" panose="05000000000000000000" pitchFamily="2" charset="2"/>
+              <a:buChar char="ü"/>
+            </a:pPr>
+            <a:r>
+              <a:rPr lang="ko-KR" altLang="en-US" sz="1600" spc="-50" dirty="0"/>
+              <a:t>사람 몸은 화학에너지를 운동에너지로 변환 시킨다</a:t>
+            </a:r>
+            <a:r>
+              <a:rPr lang="en-US" altLang="ko-KR" sz="1600" spc="-50" dirty="0"/>
+              <a:t>.</a:t>
+            </a:r>
+          </a:p>
+          <a:p>
+            <a:pPr marL="1292225" lvl="2" indent="-285750">
+              <a:lnSpc>
+                <a:spcPct val="150000"/>
+              </a:lnSpc>
+              <a:buFont typeface="Wingdings" panose="05000000000000000000" pitchFamily="2" charset="2"/>
+              <a:buChar char="Ø"/>
+            </a:pPr>
+            <a:r>
+              <a:rPr lang="ko-KR" altLang="en-US" sz="1600" spc="-50" dirty="0"/>
+              <a:t>음식</a:t>
+            </a:r>
+            <a:r>
+              <a:rPr lang="en-US" altLang="ko-KR" sz="1600" spc="-50" dirty="0"/>
+              <a:t>(</a:t>
+            </a:r>
+            <a:r>
+              <a:rPr lang="ko-KR" altLang="en-US" sz="1600" spc="-50" dirty="0"/>
+              <a:t>화학</a:t>
+            </a:r>
+            <a:r>
+              <a:rPr lang="en-US" altLang="ko-KR" sz="1600" spc="-50" dirty="0"/>
+              <a:t>)</a:t>
+            </a:r>
+            <a:r>
+              <a:rPr lang="ko-KR" altLang="en-US" sz="1600" spc="-50" dirty="0"/>
+              <a:t>을 먹으면</a:t>
+            </a:r>
+            <a:r>
+              <a:rPr lang="en-US" altLang="ko-KR" sz="1600" spc="-50" dirty="0"/>
+              <a:t>, </a:t>
+            </a:r>
+            <a:r>
+              <a:rPr lang="ko-KR" altLang="en-US" sz="1600" spc="-50" dirty="0"/>
+              <a:t>걷고</a:t>
+            </a:r>
+            <a:r>
+              <a:rPr lang="en-US" altLang="ko-KR" sz="1600" spc="-50" dirty="0"/>
+              <a:t>, </a:t>
+            </a:r>
+            <a:r>
+              <a:rPr lang="ko-KR" altLang="en-US" sz="1600" spc="-50" dirty="0"/>
+              <a:t>뛰고 </a:t>
+            </a:r>
+            <a:r>
+              <a:rPr lang="ko-KR" altLang="en-US" sz="1600" spc="-50" dirty="0" err="1"/>
+              <a:t>움직</a:t>
+            </a:r>
+            <a:r>
+              <a:rPr lang="en-US" altLang="ko-KR" sz="1600" spc="-50" dirty="0"/>
+              <a:t>(</a:t>
+            </a:r>
+            <a:r>
+              <a:rPr lang="ko-KR" altLang="en-US" sz="1600" spc="-50" dirty="0"/>
+              <a:t>운동</a:t>
+            </a:r>
+            <a:r>
+              <a:rPr lang="en-US" altLang="ko-KR" sz="1600" spc="-50" dirty="0"/>
+              <a:t>+</a:t>
+            </a:r>
+            <a:r>
+              <a:rPr lang="ko-KR" altLang="en-US" sz="1600" spc="-50" dirty="0"/>
+              <a:t>열</a:t>
+            </a:r>
+            <a:r>
+              <a:rPr lang="en-US" altLang="ko-KR" sz="1600" spc="-50" dirty="0"/>
+              <a:t>)</a:t>
+            </a:r>
+            <a:r>
+              <a:rPr lang="ko-KR" altLang="en-US" sz="1600" spc="-50" dirty="0"/>
+              <a:t>일 수 있다</a:t>
+            </a:r>
+            <a:r>
+              <a:rPr lang="en-US" altLang="ko-KR" sz="1600" spc="-50" dirty="0"/>
+              <a:t>.</a:t>
+            </a:r>
+          </a:p>
+          <a:p>
+            <a:pPr marL="1292225" lvl="2" indent="-285750">
+              <a:lnSpc>
+                <a:spcPct val="150000"/>
+              </a:lnSpc>
+              <a:buFont typeface="Wingdings" panose="05000000000000000000" pitchFamily="2" charset="2"/>
+              <a:buChar char="Ø"/>
+            </a:pPr>
+            <a:endParaRPr lang="en-US" altLang="ko-KR" sz="1600" spc="-50" dirty="0"/>
+          </a:p>
+          <a:p>
+            <a:pPr marL="835025" lvl="1" indent="-285750">
+              <a:lnSpc>
+                <a:spcPct val="150000"/>
+              </a:lnSpc>
+              <a:buFont typeface="Wingdings" panose="05000000000000000000" pitchFamily="2" charset="2"/>
+              <a:buChar char="ü"/>
+            </a:pPr>
+            <a:r>
+              <a:rPr lang="ko-KR" altLang="en-US" sz="1600" spc="-50" dirty="0"/>
+              <a:t>선풍기는 전기에너지를 운동에너지로 변환 시킨다</a:t>
+            </a:r>
+            <a:r>
+              <a:rPr lang="en-US" altLang="ko-KR" sz="1600" spc="-50" dirty="0"/>
+              <a:t>.</a:t>
+            </a:r>
+          </a:p>
+          <a:p>
+            <a:pPr marL="1292225" lvl="2" indent="-285750">
+              <a:lnSpc>
+                <a:spcPct val="150000"/>
+              </a:lnSpc>
+              <a:buFont typeface="Wingdings" panose="05000000000000000000" pitchFamily="2" charset="2"/>
+              <a:buChar char="Ø"/>
+            </a:pPr>
+            <a:r>
+              <a:rPr lang="ko-KR" altLang="en-US" sz="1600" spc="-50" dirty="0"/>
+              <a:t>콘센트</a:t>
+            </a:r>
+            <a:r>
+              <a:rPr lang="en-US" altLang="ko-KR" sz="1600" spc="-50" dirty="0"/>
+              <a:t>(</a:t>
+            </a:r>
+            <a:r>
+              <a:rPr lang="ko-KR" altLang="en-US" sz="1600" spc="-50" dirty="0"/>
+              <a:t>전기</a:t>
+            </a:r>
+            <a:r>
+              <a:rPr lang="en-US" altLang="ko-KR" sz="1600" spc="-50" dirty="0"/>
+              <a:t>)</a:t>
+            </a:r>
+            <a:r>
+              <a:rPr lang="ko-KR" altLang="en-US" sz="1600" spc="-50" dirty="0"/>
+              <a:t>를 꼽으면</a:t>
+            </a:r>
+            <a:r>
+              <a:rPr lang="en-US" altLang="ko-KR" sz="1600" spc="-50" dirty="0"/>
+              <a:t>, </a:t>
+            </a:r>
+            <a:r>
+              <a:rPr lang="ko-KR" altLang="en-US" sz="1600" spc="-50" dirty="0"/>
+              <a:t>날개가 돌아가서</a:t>
+            </a:r>
+            <a:r>
+              <a:rPr lang="en-US" altLang="ko-KR" sz="1600" spc="-50" dirty="0"/>
+              <a:t>(</a:t>
+            </a:r>
+            <a:r>
+              <a:rPr lang="ko-KR" altLang="en-US" sz="1600" spc="-50" dirty="0"/>
+              <a:t>운동</a:t>
+            </a:r>
+            <a:r>
+              <a:rPr lang="en-US" altLang="ko-KR" sz="1600" spc="-50" dirty="0"/>
+              <a:t>)</a:t>
+            </a:r>
+            <a:r>
+              <a:rPr lang="ko-KR" altLang="en-US" sz="1600" spc="-50" dirty="0"/>
+              <a:t> 바람이 분다</a:t>
+            </a:r>
+            <a:r>
+              <a:rPr lang="en-US" altLang="ko-KR" sz="1600" spc="-50" dirty="0"/>
+              <a:t>.</a:t>
+            </a:r>
+          </a:p>
+          <a:p>
+            <a:pPr marL="1292225" lvl="2" indent="-285750">
+              <a:lnSpc>
+                <a:spcPct val="150000"/>
+              </a:lnSpc>
+              <a:buFont typeface="Wingdings" panose="05000000000000000000" pitchFamily="2" charset="2"/>
+              <a:buChar char="Ø"/>
+            </a:pPr>
+            <a:endParaRPr lang="en-US" altLang="ko-KR" sz="1600" spc="-50" dirty="0"/>
+          </a:p>
+          <a:p>
+            <a:pPr marL="835025" lvl="1" indent="-285750">
+              <a:lnSpc>
+                <a:spcPct val="150000"/>
+              </a:lnSpc>
+              <a:buFont typeface="Wingdings" panose="05000000000000000000" pitchFamily="2" charset="2"/>
+              <a:buChar char="ü"/>
+            </a:pPr>
+            <a:r>
+              <a:rPr lang="ko-KR" altLang="en-US" sz="1600" spc="-50" dirty="0"/>
+              <a:t>풍력발전은 운동에너지를 전기에너지로 변환 시킨다</a:t>
+            </a:r>
+            <a:r>
+              <a:rPr lang="en-US" altLang="ko-KR" sz="1600" spc="-50" dirty="0"/>
+              <a:t>.</a:t>
+            </a:r>
+          </a:p>
+          <a:p>
+            <a:pPr marL="1292225" lvl="2" indent="-285750">
+              <a:lnSpc>
+                <a:spcPct val="150000"/>
+              </a:lnSpc>
+              <a:buFont typeface="Wingdings" panose="05000000000000000000" pitchFamily="2" charset="2"/>
+              <a:buChar char="Ø"/>
+            </a:pPr>
+            <a:r>
+              <a:rPr lang="ko-KR" altLang="en-US" sz="1600" spc="-50" dirty="0"/>
+              <a:t>바람</a:t>
+            </a:r>
+            <a:r>
+              <a:rPr lang="en-US" altLang="ko-KR" sz="1600" spc="-50" dirty="0"/>
+              <a:t>(</a:t>
+            </a:r>
+            <a:r>
+              <a:rPr lang="ko-KR" altLang="en-US" sz="1600" spc="-50" dirty="0"/>
+              <a:t>운동</a:t>
+            </a:r>
+            <a:r>
+              <a:rPr lang="en-US" altLang="ko-KR" sz="1600" spc="-50" dirty="0"/>
+              <a:t>)</a:t>
+            </a:r>
+            <a:r>
+              <a:rPr lang="ko-KR" altLang="en-US" sz="1600" spc="-50" dirty="0"/>
+              <a:t>이 불면</a:t>
+            </a:r>
+            <a:r>
+              <a:rPr lang="en-US" altLang="ko-KR" sz="1600" spc="-50" dirty="0"/>
+              <a:t>, </a:t>
+            </a:r>
+            <a:r>
+              <a:rPr lang="ko-KR" altLang="en-US" sz="1600" spc="-50" dirty="0"/>
+              <a:t>날개가 돌아가서 전기</a:t>
+            </a:r>
+            <a:r>
+              <a:rPr lang="en-US" altLang="ko-KR" sz="1600" spc="-50" dirty="0"/>
+              <a:t>(</a:t>
+            </a:r>
+            <a:r>
+              <a:rPr lang="ko-KR" altLang="en-US" sz="1600" spc="-50" dirty="0"/>
+              <a:t>전기</a:t>
+            </a:r>
+            <a:r>
+              <a:rPr lang="en-US" altLang="ko-KR" sz="1600" spc="-50" dirty="0"/>
+              <a:t>)</a:t>
+            </a:r>
+            <a:r>
+              <a:rPr lang="ko-KR" altLang="en-US" sz="1600" spc="-50" dirty="0"/>
+              <a:t>가 생성된다</a:t>
+            </a:r>
+            <a:r>
+              <a:rPr lang="en-US" altLang="ko-KR" sz="1600" spc="-50" dirty="0"/>
+              <a:t>.</a:t>
+            </a:r>
+          </a:p>
+          <a:p>
+            <a:pPr marL="1292225" lvl="2" indent="-285750">
+              <a:lnSpc>
+                <a:spcPct val="150000"/>
+              </a:lnSpc>
+              <a:buFont typeface="Wingdings" panose="05000000000000000000" pitchFamily="2" charset="2"/>
+              <a:buChar char="Ø"/>
+            </a:pPr>
+            <a:endParaRPr lang="en-US" altLang="ko-KR" sz="1600" spc="-50" dirty="0"/>
+          </a:p>
+          <a:p>
+            <a:pPr marL="835025" lvl="1" indent="-285750">
+              <a:lnSpc>
+                <a:spcPct val="150000"/>
+              </a:lnSpc>
+              <a:buFont typeface="Wingdings" panose="05000000000000000000" pitchFamily="2" charset="2"/>
+              <a:buChar char="ü"/>
+            </a:pPr>
+            <a:r>
+              <a:rPr lang="ko-KR" altLang="en-US" sz="1600" spc="-50" dirty="0"/>
+              <a:t>자동차는 화학에너지를 열에너지로 바꾸고</a:t>
+            </a:r>
+            <a:r>
+              <a:rPr lang="en-US" altLang="ko-KR" sz="1600" spc="-50" dirty="0"/>
+              <a:t>, </a:t>
+            </a:r>
+            <a:r>
+              <a:rPr lang="ko-KR" altLang="en-US" sz="1600" spc="-50" dirty="0"/>
+              <a:t>그 열에너지가 운동에너지로 변환 시킨다</a:t>
+            </a:r>
+            <a:r>
+              <a:rPr lang="en-US" altLang="ko-KR" sz="1600" spc="-50" dirty="0"/>
+              <a:t>.</a:t>
+            </a:r>
+          </a:p>
+          <a:p>
+            <a:pPr marL="1292225" lvl="2" indent="-285750">
+              <a:lnSpc>
+                <a:spcPct val="150000"/>
+              </a:lnSpc>
+              <a:buFont typeface="Wingdings" panose="05000000000000000000" pitchFamily="2" charset="2"/>
+              <a:buChar char="Ø"/>
+            </a:pPr>
+            <a:r>
+              <a:rPr lang="ko-KR" altLang="en-US" sz="1600" spc="-50" dirty="0"/>
+              <a:t>휘발유</a:t>
+            </a:r>
+            <a:r>
+              <a:rPr lang="en-US" altLang="ko-KR" sz="1600" spc="-50" dirty="0"/>
+              <a:t>(</a:t>
+            </a:r>
+            <a:r>
+              <a:rPr lang="ko-KR" altLang="en-US" sz="1600" spc="-50" dirty="0"/>
+              <a:t>화학</a:t>
+            </a:r>
+            <a:r>
+              <a:rPr lang="en-US" altLang="ko-KR" sz="1600" spc="-50" dirty="0"/>
+              <a:t>)</a:t>
+            </a:r>
+            <a:r>
+              <a:rPr lang="ko-KR" altLang="en-US" sz="1600" spc="-50" dirty="0"/>
+              <a:t>를 연소시켜</a:t>
+            </a:r>
+            <a:r>
+              <a:rPr lang="en-US" altLang="ko-KR" sz="1600" spc="-50" dirty="0"/>
+              <a:t>, </a:t>
+            </a:r>
+            <a:r>
+              <a:rPr lang="ko-KR" altLang="en-US" sz="1600" spc="-50" dirty="0"/>
+              <a:t>고온</a:t>
+            </a:r>
+            <a:r>
+              <a:rPr lang="en-US" altLang="ko-KR" sz="1600" spc="-50" dirty="0"/>
+              <a:t>·</a:t>
+            </a:r>
+            <a:r>
+              <a:rPr lang="ko-KR" altLang="en-US" sz="1600" spc="-50" dirty="0"/>
+              <a:t>고압의 가스</a:t>
+            </a:r>
+            <a:r>
+              <a:rPr lang="en-US" altLang="ko-KR" sz="1600" spc="-50" dirty="0"/>
+              <a:t>(</a:t>
+            </a:r>
+            <a:r>
+              <a:rPr lang="ko-KR" altLang="en-US" sz="1600" spc="-50" dirty="0"/>
+              <a:t>열에너지</a:t>
+            </a:r>
+            <a:r>
+              <a:rPr lang="en-US" altLang="ko-KR" sz="1600" spc="-50" dirty="0"/>
+              <a:t>)</a:t>
+            </a:r>
+            <a:r>
+              <a:rPr lang="ko-KR" altLang="en-US" sz="1600" spc="-50" dirty="0"/>
+              <a:t>가 피스톤을 움직여</a:t>
+            </a:r>
+            <a:r>
+              <a:rPr lang="en-US" altLang="ko-KR" sz="1600" spc="-50" dirty="0"/>
+              <a:t>, </a:t>
+            </a:r>
+            <a:r>
+              <a:rPr lang="ko-KR" altLang="en-US" sz="1600" spc="-50" dirty="0"/>
+              <a:t>바퀴가 돌아간다 </a:t>
+            </a:r>
+            <a:r>
+              <a:rPr lang="en-US" altLang="ko-KR" sz="1600" spc="-50" dirty="0"/>
+              <a:t>(</a:t>
+            </a:r>
+            <a:r>
+              <a:rPr lang="ko-KR" altLang="en-US" sz="1600" spc="-50" dirty="0"/>
+              <a:t>운동에너지</a:t>
+            </a:r>
+            <a:r>
+              <a:rPr lang="en-US" altLang="ko-KR" sz="1600" spc="-50" dirty="0"/>
+              <a:t>).</a:t>
+            </a:r>
+          </a:p>
+        </p:txBody>
+      </p:sp>
+    </p:spTree>
+    <p:extLst>
+      <p:ext uri="{BB962C8B-B14F-4D97-AF65-F5344CB8AC3E}">
+        <p14:creationId xmlns:p14="http://schemas.microsoft.com/office/powerpoint/2010/main" val="1417943336"/>
+      </p:ext>
+    </p:extLst>
+  </p:cSld>
+  <p:clrMapOvr>
+    <a:masterClrMapping/>
+  </p:clrMapOvr>
+</p:sld>
+</file>
+
+<file path=ppt/slides/slide8.xml><?xml version="1.0" encoding="utf-8"?>
+<p:sld xmlns:a="http://schemas.openxmlformats.org/drawingml/2006/main" xmlns:r="http://schemas.openxmlformats.org/officeDocument/2006/relationships" xmlns:p="http://schemas.openxmlformats.org/presentationml/2006/main">
+  <p:cSld>
+    <p:spTree>
+      <p:nvGrpSpPr>
+        <p:cNvPr id="1" name="">
+          <a:extLst>
+            <a:ext uri="{FF2B5EF4-FFF2-40B4-BE49-F238E27FC236}">
+              <a16:creationId xmlns:a16="http://schemas.microsoft.com/office/drawing/2014/main" id="{8084B9DF-0E27-4FE3-8CA6-663D5F892822}"/>
+            </a:ext>
+          </a:extLst>
+        </p:cNvPr>
+        <p:cNvGrpSpPr/>
+        <p:nvPr/>
+      </p:nvGrpSpPr>
+      <p:grpSpPr>
+        <a:xfrm>
+          <a:off x="0" y="0"/>
+          <a:ext cx="0" cy="0"/>
+          <a:chOff x="0" y="0"/>
+          <a:chExt cx="0" cy="0"/>
+        </a:xfrm>
+      </p:grpSpPr>
+      <p:sp>
+        <p:nvSpPr>
+          <p:cNvPr id="2" name="제목 1">
+            <a:extLst>
+              <a:ext uri="{FF2B5EF4-FFF2-40B4-BE49-F238E27FC236}">
+                <a16:creationId xmlns:a16="http://schemas.microsoft.com/office/drawing/2014/main" id="{96281199-1994-9321-1DE5-4A2347B7FB8A}"/>
+              </a:ext>
+            </a:extLst>
+          </p:cNvPr>
+          <p:cNvSpPr>
+            <a:spLocks noGrp="1"/>
+          </p:cNvSpPr>
+          <p:nvPr>
+            <p:ph type="title"/>
+          </p:nvPr>
+        </p:nvSpPr>
+        <p:spPr/>
+        <p:txBody>
+          <a:bodyPr/>
+          <a:lstStyle/>
+          <a:p>
+            <a:r>
+              <a:rPr lang="ko-KR" altLang="en-US" dirty="0"/>
+              <a:t>에너지 측정</a:t>
+            </a:r>
+          </a:p>
+        </p:txBody>
+      </p:sp>
+      <p:sp>
+        <p:nvSpPr>
+          <p:cNvPr id="4" name="슬라이드 번호 개체 틀 3">
+            <a:extLst>
+              <a:ext uri="{FF2B5EF4-FFF2-40B4-BE49-F238E27FC236}">
+                <a16:creationId xmlns:a16="http://schemas.microsoft.com/office/drawing/2014/main" id="{6140A506-1B5D-1AF9-3782-5B291087FB11}"/>
+              </a:ext>
+            </a:extLst>
+          </p:cNvPr>
+          <p:cNvSpPr>
+            <a:spLocks noGrp="1"/>
+          </p:cNvSpPr>
+          <p:nvPr>
+            <p:ph type="sldNum" sz="quarter" idx="12"/>
+          </p:nvPr>
+        </p:nvSpPr>
+        <p:spPr/>
+        <p:txBody>
+          <a:bodyPr/>
+          <a:lstStyle/>
+          <a:p>
+            <a:fld id="{109C872D-39A9-4065-8BF3-6A613116E2A1}" type="slidenum">
+              <a:rPr lang="ko-KR" altLang="en-US" smtClean="0"/>
+              <a:t>8</a:t>
+            </a:fld>
+            <a:endParaRPr lang="ko-KR" altLang="en-US"/>
+          </a:p>
+        </p:txBody>
+      </p:sp>
+      <p:sp>
+        <p:nvSpPr>
+          <p:cNvPr id="7" name="TextBox 6">
+            <a:extLst>
+              <a:ext uri="{FF2B5EF4-FFF2-40B4-BE49-F238E27FC236}">
+                <a16:creationId xmlns:a16="http://schemas.microsoft.com/office/drawing/2014/main" id="{56FC863E-D264-ABEC-C0AC-5A8C80DED4F6}"/>
+              </a:ext>
+            </a:extLst>
+          </p:cNvPr>
+          <p:cNvSpPr txBox="1"/>
+          <p:nvPr/>
+        </p:nvSpPr>
+        <p:spPr>
+          <a:xfrm>
+            <a:off x="288790" y="958844"/>
+            <a:ext cx="11118453" cy="1891352"/>
+          </a:xfrm>
+          <a:prstGeom prst="rect">
+            <a:avLst/>
+          </a:prstGeom>
+          <a:noFill/>
+        </p:spPr>
+        <p:txBody>
+          <a:bodyPr wrap="square" rtlCol="0" anchor="t">
+            <a:spAutoFit/>
+          </a:bodyPr>
+          <a:lstStyle/>
+          <a:p>
+            <a:pPr marL="377825" indent="-285750">
+              <a:lnSpc>
+                <a:spcPct val="150000"/>
+              </a:lnSpc>
+              <a:buFont typeface="Arial" panose="020B0604020202020204" pitchFamily="34" charset="0"/>
+              <a:buChar char="•"/>
+            </a:pPr>
+            <a:r>
+              <a:rPr lang="ko-KR" altLang="en-US" sz="1600" spc="-50" dirty="0"/>
+              <a:t>에너지 단위는 줄</a:t>
+            </a:r>
+            <a:r>
+              <a:rPr lang="en-US" altLang="ko-KR" sz="1600" spc="-50" dirty="0"/>
+              <a:t>(Joule)</a:t>
+            </a:r>
+            <a:r>
+              <a:rPr lang="ko-KR" altLang="en-US" sz="1600" spc="-50" dirty="0"/>
+              <a:t>로 측정한다</a:t>
+            </a:r>
+            <a:r>
+              <a:rPr lang="en-US" altLang="ko-KR" sz="1600" spc="-50" dirty="0"/>
+              <a:t>.</a:t>
+            </a:r>
+          </a:p>
+          <a:p>
+            <a:pPr marL="835025" lvl="1" indent="-285750">
+              <a:lnSpc>
+                <a:spcPct val="150000"/>
+              </a:lnSpc>
+              <a:buFont typeface="Wingdings" panose="05000000000000000000" pitchFamily="2" charset="2"/>
+              <a:buChar char="ü"/>
+            </a:pPr>
+            <a:r>
+              <a:rPr lang="ko-KR" altLang="en-US" sz="1600" spc="-50" dirty="0"/>
+              <a:t>물리학적으로 줄이란 </a:t>
+            </a:r>
+            <a:r>
+              <a:rPr lang="en-US" altLang="ko-KR" sz="1600" spc="-50" dirty="0"/>
+              <a:t>1</a:t>
+            </a:r>
+            <a:r>
+              <a:rPr lang="ko-KR" altLang="en-US" sz="1600" spc="-50" dirty="0"/>
+              <a:t>뉴턴</a:t>
+            </a:r>
+            <a:r>
+              <a:rPr lang="en-US" altLang="ko-KR" sz="1600" spc="-50" dirty="0"/>
+              <a:t>(N)</a:t>
+            </a:r>
+            <a:r>
+              <a:rPr lang="ko-KR" altLang="en-US" sz="1600" spc="-50" dirty="0"/>
+              <a:t>의 힘으로 물체를 </a:t>
+            </a:r>
+            <a:r>
+              <a:rPr lang="en-US" altLang="ko-KR" sz="1600" spc="-50" dirty="0"/>
+              <a:t>1m </a:t>
+            </a:r>
+            <a:r>
+              <a:rPr lang="ko-KR" altLang="en-US" sz="1600" spc="-50" dirty="0"/>
+              <a:t>이동시키는데 필요한 에너지 로 정의된다</a:t>
+            </a:r>
+            <a:r>
+              <a:rPr lang="en-US" altLang="ko-KR" sz="1600" spc="-50" dirty="0"/>
+              <a:t>.</a:t>
+            </a:r>
+          </a:p>
+          <a:p>
+            <a:pPr marL="1292225" lvl="2" indent="-285750">
+              <a:lnSpc>
+                <a:spcPct val="150000"/>
+              </a:lnSpc>
+              <a:buFont typeface="Wingdings" panose="05000000000000000000" pitchFamily="2" charset="2"/>
+              <a:buChar char="Ø"/>
+            </a:pPr>
+            <a:r>
+              <a:rPr lang="en-US" altLang="ko-KR" sz="1600" spc="-50" dirty="0"/>
+              <a:t>1</a:t>
+            </a:r>
+            <a:r>
+              <a:rPr lang="ko-KR" altLang="en-US" sz="1600" spc="-50" dirty="0"/>
+              <a:t>뉴턴이란 질량 </a:t>
+            </a:r>
+            <a:r>
+              <a:rPr lang="en-US" altLang="ko-KR" sz="1600" spc="-50" dirty="0"/>
+              <a:t>1kg</a:t>
+            </a:r>
+            <a:r>
+              <a:rPr lang="ko-KR" altLang="en-US" sz="1600" spc="-50" dirty="0"/>
+              <a:t>인 물체를 </a:t>
+            </a:r>
+            <a:r>
+              <a:rPr lang="en-US" altLang="ko-KR" sz="1600" spc="-50" dirty="0"/>
+              <a:t>1m/s</a:t>
+            </a:r>
+            <a:r>
+              <a:rPr lang="en-US" altLang="ko-KR" sz="1600" spc="-50" baseline="30000" dirty="0"/>
+              <a:t>2 </a:t>
+            </a:r>
+            <a:r>
+              <a:rPr lang="ko-KR" altLang="en-US" sz="1600" spc="-50" dirty="0"/>
+              <a:t>의 가속도로 움직이게 하는 힘 으로 정의된다</a:t>
+            </a:r>
+            <a:r>
+              <a:rPr lang="en-US" altLang="ko-KR" sz="1600" spc="-50" dirty="0"/>
+              <a:t>.</a:t>
+            </a:r>
+          </a:p>
+          <a:p>
+            <a:pPr marL="835025" lvl="1" indent="-285750">
+              <a:lnSpc>
+                <a:spcPct val="150000"/>
+              </a:lnSpc>
+              <a:buFont typeface="Wingdings" panose="05000000000000000000" pitchFamily="2" charset="2"/>
+              <a:buChar char="ü"/>
+            </a:pPr>
+            <a:r>
+              <a:rPr lang="ko-KR" altLang="en-US" sz="1600" spc="-50" dirty="0"/>
+              <a:t>다시 말하면 </a:t>
+            </a:r>
+            <a:r>
+              <a:rPr lang="en-US" altLang="ko-KR" sz="1600" spc="-50" dirty="0"/>
+              <a:t>1</a:t>
+            </a:r>
+            <a:r>
+              <a:rPr lang="ko-KR" altLang="en-US" sz="1600" spc="-50" dirty="0"/>
+              <a:t>줄은 </a:t>
+            </a:r>
+            <a:r>
+              <a:rPr lang="en-US" altLang="ko-KR" sz="1600" spc="-50" dirty="0"/>
+              <a:t>1kg</a:t>
+            </a:r>
+            <a:r>
+              <a:rPr lang="ko-KR" altLang="en-US" sz="1600" spc="-50" dirty="0"/>
+              <a:t>인 물체에 </a:t>
+            </a:r>
+            <a:r>
+              <a:rPr lang="en-US" altLang="ko-KR" sz="1600" spc="-50" dirty="0"/>
+              <a:t>1m/s</a:t>
+            </a:r>
+            <a:r>
+              <a:rPr lang="en-US" altLang="ko-KR" sz="1600" spc="-50" baseline="30000" dirty="0"/>
+              <a:t>2 </a:t>
+            </a:r>
+            <a:r>
+              <a:rPr lang="ko-KR" altLang="en-US" sz="1600" spc="-50" dirty="0"/>
+              <a:t>의 가속도를 발생시키는 힘을</a:t>
+            </a:r>
+            <a:r>
+              <a:rPr lang="en-US" altLang="ko-KR" sz="1600" spc="-50" dirty="0"/>
+              <a:t> </a:t>
+            </a:r>
+            <a:r>
+              <a:rPr lang="ko-KR" altLang="en-US" sz="1600" spc="-50" dirty="0"/>
+              <a:t>가하여</a:t>
+            </a:r>
+            <a:r>
+              <a:rPr lang="en-US" altLang="ko-KR" sz="1600" spc="-50" dirty="0"/>
+              <a:t>, </a:t>
+            </a:r>
+            <a:r>
+              <a:rPr lang="ko-KR" altLang="en-US" sz="1600" spc="-50" dirty="0"/>
+              <a:t>그 물체를 힘의 방향으로 </a:t>
+            </a:r>
+            <a:r>
+              <a:rPr lang="en-US" altLang="ko-KR" sz="1600" spc="-50" dirty="0"/>
+              <a:t>1m </a:t>
+            </a:r>
+            <a:r>
+              <a:rPr lang="ko-KR" altLang="en-US" sz="1600" spc="-50" dirty="0"/>
+              <a:t>이동시키는데 필요한 에너지 이다</a:t>
+            </a:r>
+            <a:r>
+              <a:rPr lang="en-US" altLang="ko-KR" sz="1600" spc="-50" dirty="0"/>
+              <a:t>.</a:t>
+            </a:r>
+          </a:p>
+        </p:txBody>
+      </p:sp>
+    </p:spTree>
+    <p:extLst>
+      <p:ext uri="{BB962C8B-B14F-4D97-AF65-F5344CB8AC3E}">
+        <p14:creationId xmlns:p14="http://schemas.microsoft.com/office/powerpoint/2010/main" val="1656464459"/>
+      </p:ext>
+    </p:extLst>
+  </p:cSld>
+  <p:clrMapOvr>
+    <a:masterClrMapping/>
+  </p:clrMapOvr>
+</p:sld>
+</file>
+
+<file path=ppt/slides/slide9.xml><?xml version="1.0" encoding="utf-8"?>
+<p:sld xmlns:a="http://schemas.openxmlformats.org/drawingml/2006/main" xmlns:r="http://schemas.openxmlformats.org/officeDocument/2006/relationships" xmlns:p="http://schemas.openxmlformats.org/presentationml/2006/main">
+  <p:cSld>
+    <p:spTree>
+      <p:nvGrpSpPr>
+        <p:cNvPr id="1" name="">
+          <a:extLst>
+            <a:ext uri="{FF2B5EF4-FFF2-40B4-BE49-F238E27FC236}">
+              <a16:creationId xmlns:a16="http://schemas.microsoft.com/office/drawing/2014/main" id="{AF6BF624-26E9-2E60-F460-597C1B6DA9D0}"/>
+            </a:ext>
+          </a:extLst>
+        </p:cNvPr>
+        <p:cNvGrpSpPr/>
+        <p:nvPr/>
+      </p:nvGrpSpPr>
+      <p:grpSpPr>
+        <a:xfrm>
+          <a:off x="0" y="0"/>
+          <a:ext cx="0" cy="0"/>
+          <a:chOff x="0" y="0"/>
+          <a:chExt cx="0" cy="0"/>
+        </a:xfrm>
+      </p:grpSpPr>
+      <p:sp>
+        <p:nvSpPr>
+          <p:cNvPr id="2" name="제목 1">
+            <a:extLst>
+              <a:ext uri="{FF2B5EF4-FFF2-40B4-BE49-F238E27FC236}">
+                <a16:creationId xmlns:a16="http://schemas.microsoft.com/office/drawing/2014/main" id="{1D3A0CB6-A471-A379-E6F2-9D851173AB6F}"/>
+              </a:ext>
+            </a:extLst>
+          </p:cNvPr>
+          <p:cNvSpPr>
+            <a:spLocks noGrp="1"/>
+          </p:cNvSpPr>
+          <p:nvPr>
+            <p:ph type="title"/>
+          </p:nvPr>
+        </p:nvSpPr>
+        <p:spPr/>
+        <p:txBody>
+          <a:bodyPr/>
+          <a:lstStyle/>
+          <a:p>
+            <a:r>
+              <a:rPr lang="ko-KR" altLang="en-US" dirty="0"/>
+              <a:t>에너지 단위 변환</a:t>
+            </a:r>
+          </a:p>
+        </p:txBody>
+      </p:sp>
+      <p:sp>
+        <p:nvSpPr>
+          <p:cNvPr id="4" name="슬라이드 번호 개체 틀 3">
+            <a:extLst>
+              <a:ext uri="{FF2B5EF4-FFF2-40B4-BE49-F238E27FC236}">
+                <a16:creationId xmlns:a16="http://schemas.microsoft.com/office/drawing/2014/main" id="{EAB18857-BE01-254C-4058-2D3ACC429111}"/>
+              </a:ext>
+            </a:extLst>
+          </p:cNvPr>
+          <p:cNvSpPr>
+            <a:spLocks noGrp="1"/>
+          </p:cNvSpPr>
+          <p:nvPr>
+            <p:ph type="sldNum" sz="quarter" idx="12"/>
+          </p:nvPr>
+        </p:nvSpPr>
+        <p:spPr/>
+        <p:txBody>
+          <a:bodyPr/>
+          <a:lstStyle/>
+          <a:p>
+            <a:fld id="{109C872D-39A9-4065-8BF3-6A613116E2A1}" type="slidenum">
+              <a:rPr lang="ko-KR" altLang="en-US" smtClean="0"/>
+              <a:t>9</a:t>
+            </a:fld>
+            <a:endParaRPr lang="ko-KR" altLang="en-US"/>
+          </a:p>
+        </p:txBody>
+      </p:sp>
+      <p:sp>
+        <p:nvSpPr>
+          <p:cNvPr id="7" name="TextBox 6">
+            <a:extLst>
+              <a:ext uri="{FF2B5EF4-FFF2-40B4-BE49-F238E27FC236}">
+                <a16:creationId xmlns:a16="http://schemas.microsoft.com/office/drawing/2014/main" id="{7427916E-1F92-C0E3-A9D4-F760E4E298A6}"/>
+              </a:ext>
+            </a:extLst>
+          </p:cNvPr>
+          <p:cNvSpPr txBox="1"/>
+          <p:nvPr/>
+        </p:nvSpPr>
+        <p:spPr>
+          <a:xfrm>
+            <a:off x="288790" y="958844"/>
+            <a:ext cx="11118453" cy="3368679"/>
+          </a:xfrm>
+          <a:prstGeom prst="rect">
+            <a:avLst/>
+          </a:prstGeom>
+          <a:noFill/>
+        </p:spPr>
+        <p:txBody>
+          <a:bodyPr wrap="square" rtlCol="0" anchor="t">
+            <a:spAutoFit/>
+          </a:bodyPr>
+          <a:lstStyle/>
+          <a:p>
+            <a:pPr marL="377825" indent="-285750">
+              <a:lnSpc>
+                <a:spcPct val="150000"/>
+              </a:lnSpc>
+              <a:buFont typeface="Arial" panose="020B0604020202020204" pitchFamily="34" charset="0"/>
+              <a:buChar char="•"/>
+            </a:pPr>
+            <a:r>
+              <a:rPr lang="ko-KR" altLang="en-US" sz="1600" spc="-50" dirty="0"/>
+              <a:t>우리는 줄</a:t>
+            </a:r>
+            <a:r>
+              <a:rPr lang="en-US" altLang="ko-KR" sz="1600" spc="-50" dirty="0"/>
+              <a:t>(J)</a:t>
+            </a:r>
+            <a:r>
+              <a:rPr lang="ko-KR" altLang="en-US" sz="1600" spc="-50" dirty="0"/>
+              <a:t> 이라는 단위보다 음식 포장지에 적힌 칼로리</a:t>
+            </a:r>
+            <a:r>
+              <a:rPr lang="en-US" altLang="ko-KR" sz="1600" spc="-50" dirty="0"/>
+              <a:t>(</a:t>
+            </a:r>
+            <a:r>
+              <a:rPr lang="en-US" altLang="ko-KR" sz="1600" spc="-50" dirty="0" err="1"/>
+              <a:t>cal</a:t>
+            </a:r>
+            <a:r>
+              <a:rPr lang="en-US" altLang="ko-KR" sz="1600" spc="-50" dirty="0"/>
+              <a:t>)</a:t>
+            </a:r>
+            <a:r>
+              <a:rPr lang="ko-KR" altLang="en-US" sz="1600" spc="-50" dirty="0"/>
+              <a:t> 라고 하는 단위가 더 익숙하다</a:t>
+            </a:r>
+            <a:r>
+              <a:rPr lang="en-US" altLang="ko-KR" sz="1600" spc="-50" dirty="0"/>
+              <a:t>.</a:t>
+            </a:r>
+          </a:p>
+          <a:p>
+            <a:pPr marL="835025" lvl="1" indent="-285750">
+              <a:lnSpc>
+                <a:spcPct val="150000"/>
+              </a:lnSpc>
+              <a:buFont typeface="Wingdings" panose="05000000000000000000" pitchFamily="2" charset="2"/>
+              <a:buChar char="ü"/>
+            </a:pPr>
+            <a:r>
+              <a:rPr lang="ko-KR" altLang="en-US" sz="1600" spc="-50" dirty="0"/>
+              <a:t>줄과 칼로리</a:t>
+            </a:r>
+            <a:r>
+              <a:rPr lang="en-US" altLang="ko-KR" sz="1600" spc="-50" dirty="0"/>
+              <a:t>, </a:t>
+            </a:r>
+            <a:r>
+              <a:rPr lang="ko-KR" altLang="en-US" sz="1600" spc="-50" dirty="0"/>
+              <a:t>이 두 단위는 우리가 길이를 </a:t>
+            </a:r>
+            <a:r>
+              <a:rPr lang="en-US" altLang="ko-KR" sz="1600" spc="-50" dirty="0"/>
+              <a:t>cm</a:t>
+            </a:r>
+            <a:r>
+              <a:rPr lang="ko-KR" altLang="en-US" sz="1600" spc="-50" dirty="0"/>
+              <a:t>와 </a:t>
+            </a:r>
+            <a:r>
+              <a:rPr lang="en-US" altLang="ko-KR" sz="1600" spc="-50" dirty="0"/>
+              <a:t>inch, </a:t>
+            </a:r>
+            <a:r>
+              <a:rPr lang="ko-KR" altLang="en-US" sz="1600" spc="-50" dirty="0"/>
+              <a:t>온도를 섭씨와 화씨로 다양하게 표현하는 것처럼</a:t>
+            </a:r>
+            <a:r>
+              <a:rPr lang="en-US" altLang="ko-KR" sz="1600" spc="-50" dirty="0"/>
+              <a:t>, </a:t>
+            </a:r>
+            <a:r>
+              <a:rPr lang="ko-KR" altLang="en-US" sz="1600" spc="-50" dirty="0"/>
+              <a:t>에너지도 서로 다른 단위로 나타낸 것일 뿐이다</a:t>
+            </a:r>
+            <a:r>
+              <a:rPr lang="en-US" altLang="ko-KR" sz="1600" spc="-50" dirty="0"/>
+              <a:t>.</a:t>
+            </a:r>
+          </a:p>
+          <a:p>
+            <a:pPr marL="1292225" lvl="2" indent="-285750">
+              <a:lnSpc>
+                <a:spcPct val="150000"/>
+              </a:lnSpc>
+              <a:buFont typeface="Wingdings" panose="05000000000000000000" pitchFamily="2" charset="2"/>
+              <a:buChar char="Ø"/>
+            </a:pPr>
+            <a:r>
+              <a:rPr lang="en-US" altLang="ko-KR" sz="1600" spc="-50" dirty="0"/>
+              <a:t>1</a:t>
+            </a:r>
+            <a:r>
+              <a:rPr lang="ko-KR" altLang="en-US" sz="1600" spc="-50" dirty="0"/>
+              <a:t>줄 </a:t>
+            </a:r>
+            <a:r>
+              <a:rPr lang="en-US" altLang="ko-KR" sz="1600" spc="-50" dirty="0"/>
+              <a:t>= 0.239</a:t>
+            </a:r>
+            <a:r>
+              <a:rPr lang="ko-KR" altLang="en-US" sz="1600" spc="-50" dirty="0"/>
+              <a:t>칼로리</a:t>
+            </a:r>
+            <a:r>
+              <a:rPr lang="en-US" altLang="ko-KR" sz="1600" spc="-50" dirty="0"/>
+              <a:t>,  </a:t>
+            </a:r>
+            <a:r>
+              <a:rPr lang="ko-KR" altLang="en-US" sz="1600" spc="-50" dirty="0"/>
+              <a:t>참고로 </a:t>
+            </a:r>
+            <a:r>
+              <a:rPr lang="en-US" altLang="ko-KR" sz="1600" spc="-50" dirty="0"/>
+              <a:t>1</a:t>
+            </a:r>
+            <a:r>
+              <a:rPr lang="ko-KR" altLang="en-US" sz="1600" spc="-50" dirty="0"/>
+              <a:t>센티미터</a:t>
+            </a:r>
+            <a:r>
+              <a:rPr lang="en-US" altLang="ko-KR" sz="1600" spc="-50" dirty="0"/>
+              <a:t> =</a:t>
+            </a:r>
+            <a:r>
+              <a:rPr lang="ko-KR" altLang="en-US" sz="1600" spc="-50" dirty="0"/>
+              <a:t> </a:t>
+            </a:r>
+            <a:r>
+              <a:rPr lang="en-US" altLang="ko-KR" sz="1600" spc="-50" dirty="0"/>
+              <a:t>0.39</a:t>
+            </a:r>
+            <a:r>
+              <a:rPr lang="ko-KR" altLang="en-US" sz="1600" spc="-50" dirty="0"/>
+              <a:t>인치</a:t>
+            </a:r>
+            <a:r>
+              <a:rPr lang="en-US" altLang="ko-KR" sz="1600" spc="-50" dirty="0"/>
+              <a:t>, </a:t>
+            </a:r>
+            <a:r>
+              <a:rPr lang="ko-KR" altLang="en-US" sz="1600" spc="-50" dirty="0"/>
+              <a:t>섭씨</a:t>
+            </a:r>
+            <a:r>
+              <a:rPr lang="en-US" altLang="ko-KR" sz="1600" spc="-50" dirty="0"/>
+              <a:t>10</a:t>
+            </a:r>
+            <a:r>
+              <a:rPr lang="ko-KR" altLang="en-US" sz="1600" spc="-50" dirty="0"/>
+              <a:t>도 </a:t>
+            </a:r>
+            <a:r>
+              <a:rPr lang="en-US" altLang="ko-KR" sz="1600" spc="-50" dirty="0"/>
+              <a:t>=</a:t>
+            </a:r>
+            <a:r>
+              <a:rPr lang="ko-KR" altLang="en-US" sz="1600" spc="-50" dirty="0"/>
+              <a:t>화씨 </a:t>
+            </a:r>
+            <a:r>
+              <a:rPr lang="en-US" altLang="ko-KR" sz="1600" spc="-50" dirty="0"/>
+              <a:t>50</a:t>
+            </a:r>
+            <a:r>
+              <a:rPr lang="ko-KR" altLang="en-US" sz="1600" spc="-50" dirty="0"/>
+              <a:t>도와 같다</a:t>
+            </a:r>
+            <a:r>
+              <a:rPr lang="en-US" altLang="ko-KR" sz="1600" spc="-50"/>
+              <a:t>.</a:t>
+            </a:r>
+            <a:endParaRPr lang="en-US" altLang="ko-KR" sz="1600" spc="-50" dirty="0"/>
+          </a:p>
+          <a:p>
+            <a:pPr marL="835025" lvl="1" indent="-285750">
+              <a:lnSpc>
+                <a:spcPct val="150000"/>
+              </a:lnSpc>
+              <a:buFont typeface="Wingdings" panose="05000000000000000000" pitchFamily="2" charset="2"/>
+              <a:buChar char="ü"/>
+            </a:pPr>
+            <a:r>
+              <a:rPr lang="ko-KR" altLang="en-US" sz="1600" spc="-50" dirty="0"/>
+              <a:t>둘 간에는 스케일만 다를 뿐 같은 개념이다</a:t>
+            </a:r>
+            <a:r>
+              <a:rPr lang="en-US" altLang="ko-KR" sz="1600" spc="-50" dirty="0"/>
+              <a:t>.</a:t>
+            </a:r>
+          </a:p>
+          <a:p>
+            <a:pPr marL="835025" lvl="1" indent="-285750">
+              <a:lnSpc>
+                <a:spcPct val="150000"/>
+              </a:lnSpc>
+              <a:buFont typeface="Wingdings" panose="05000000000000000000" pitchFamily="2" charset="2"/>
+              <a:buChar char="ü"/>
+            </a:pPr>
+            <a:r>
+              <a:rPr lang="en-US" altLang="ko-KR" sz="1600" spc="-50" dirty="0"/>
+              <a:t>1</a:t>
+            </a:r>
+            <a:r>
+              <a:rPr lang="ko-KR" altLang="en-US" sz="1600" spc="-50" dirty="0"/>
+              <a:t>줄</a:t>
+            </a:r>
+            <a:r>
+              <a:rPr lang="en-US" altLang="ko-KR" sz="1600" spc="-50" dirty="0"/>
+              <a:t>(J, joule)</a:t>
+            </a:r>
+            <a:r>
+              <a:rPr lang="ko-KR" altLang="en-US" sz="1600" spc="-50" dirty="0"/>
+              <a:t>은 약 </a:t>
+            </a:r>
+            <a:r>
+              <a:rPr lang="en-US" altLang="ko-KR" sz="1600" spc="-50" dirty="0"/>
+              <a:t>0.00024 </a:t>
+            </a:r>
+            <a:r>
+              <a:rPr lang="ko-KR" altLang="en-US" sz="1600" spc="-50" dirty="0"/>
+              <a:t>칼로리 </a:t>
+            </a:r>
+            <a:r>
+              <a:rPr lang="en-US" altLang="ko-KR" sz="1600" spc="-50" dirty="0"/>
+              <a:t>(</a:t>
+            </a:r>
+            <a:r>
+              <a:rPr lang="en-US" altLang="ko-KR" sz="1600" spc="-50" dirty="0" err="1"/>
+              <a:t>cal</a:t>
+            </a:r>
+            <a:r>
+              <a:rPr lang="en-US" altLang="ko-KR" sz="1600" spc="-50" dirty="0"/>
+              <a:t>, calorie) </a:t>
+            </a:r>
+            <a:r>
+              <a:rPr lang="ko-KR" altLang="en-US" sz="1600" spc="-50" dirty="0"/>
+              <a:t>이다</a:t>
+            </a:r>
+            <a:r>
+              <a:rPr lang="en-US" altLang="ko-KR" sz="1600" spc="-50" dirty="0"/>
+              <a:t>.</a:t>
+            </a:r>
+          </a:p>
+          <a:p>
+            <a:pPr marL="835025" lvl="1" indent="-285750">
+              <a:lnSpc>
+                <a:spcPct val="150000"/>
+              </a:lnSpc>
+              <a:buFont typeface="Wingdings" panose="05000000000000000000" pitchFamily="2" charset="2"/>
+              <a:buChar char="ü"/>
+            </a:pPr>
+            <a:r>
+              <a:rPr lang="ko-KR" altLang="en-US" sz="1600" spc="-50" dirty="0"/>
+              <a:t>비유하자면</a:t>
+            </a:r>
+            <a:r>
+              <a:rPr lang="en-US" altLang="ko-KR" sz="1600" spc="-50" dirty="0"/>
+              <a:t>, </a:t>
+            </a:r>
+            <a:r>
+              <a:rPr lang="ko-KR" altLang="en-US" sz="1600" spc="-50" dirty="0"/>
+              <a:t>길이를 </a:t>
+            </a:r>
+            <a:r>
+              <a:rPr lang="en-US" altLang="ko-KR" sz="1600" spc="-50" dirty="0"/>
+              <a:t>cm</a:t>
+            </a:r>
+            <a:r>
+              <a:rPr lang="ko-KR" altLang="en-US" sz="1600" spc="-50" dirty="0"/>
+              <a:t>로 재기도하고</a:t>
+            </a:r>
+            <a:r>
+              <a:rPr lang="en-US" altLang="ko-KR" sz="1600" spc="-50" dirty="0"/>
+              <a:t>, inch</a:t>
+            </a:r>
+            <a:r>
+              <a:rPr lang="ko-KR" altLang="en-US" sz="1600" spc="-50" dirty="0"/>
+              <a:t>로 재기도 한다</a:t>
+            </a:r>
+            <a:r>
+              <a:rPr lang="en-US" altLang="ko-KR" sz="1600" spc="-50" dirty="0"/>
+              <a:t>. (1cm</a:t>
+            </a:r>
+            <a:r>
+              <a:rPr lang="ko-KR" altLang="en-US" sz="1600" spc="-50" dirty="0"/>
+              <a:t>는 </a:t>
+            </a:r>
+            <a:r>
+              <a:rPr lang="en-US" altLang="ko-KR" sz="1600" spc="-50" dirty="0"/>
+              <a:t>0.394 inch</a:t>
+            </a:r>
+            <a:r>
+              <a:rPr lang="ko-KR" altLang="en-US" sz="1600" spc="-50" dirty="0"/>
+              <a:t>와 같다</a:t>
+            </a:r>
+            <a:r>
+              <a:rPr lang="en-US" altLang="ko-KR" sz="1600" spc="-50" dirty="0"/>
+              <a:t>.) </a:t>
+            </a:r>
+            <a:r>
+              <a:rPr lang="ko-KR" altLang="en-US" sz="1600" spc="-50" dirty="0"/>
+              <a:t>또 다른 예로는 섭씨와 화씨</a:t>
+            </a:r>
+            <a:r>
+              <a:rPr lang="en-US" altLang="ko-KR" sz="1600" spc="-50" dirty="0"/>
+              <a:t>, km</a:t>
+            </a:r>
+            <a:r>
+              <a:rPr lang="ko-KR" altLang="en-US" sz="1600" spc="-50" dirty="0"/>
+              <a:t>와 </a:t>
+            </a:r>
+            <a:r>
+              <a:rPr lang="en-US" altLang="ko-KR" sz="1600" spc="-50" dirty="0"/>
+              <a:t>mile </a:t>
+            </a:r>
+            <a:r>
+              <a:rPr lang="ko-KR" altLang="en-US" sz="1600" spc="-50" dirty="0"/>
+              <a:t>등이 있다</a:t>
+            </a:r>
+            <a:r>
+              <a:rPr lang="en-US" altLang="ko-KR" sz="1600" spc="-50" dirty="0"/>
+              <a:t>. </a:t>
+            </a:r>
+            <a:r>
+              <a:rPr lang="ko-KR" altLang="en-US" sz="1600" spc="-50" dirty="0"/>
+              <a:t>에너지도 똑같이 </a:t>
+            </a:r>
+            <a:r>
+              <a:rPr lang="en-US" altLang="ko-KR" sz="1600" spc="-50" dirty="0"/>
+              <a:t>MJ</a:t>
+            </a:r>
+            <a:r>
+              <a:rPr lang="ko-KR" altLang="en-US" sz="1600" spc="-50" dirty="0"/>
+              <a:t>로 재기도하고</a:t>
+            </a:r>
+            <a:r>
+              <a:rPr lang="en-US" altLang="ko-KR" sz="1600" spc="-50" dirty="0"/>
+              <a:t>, kcal</a:t>
+            </a:r>
+            <a:r>
+              <a:rPr lang="ko-KR" altLang="en-US" sz="1600" spc="-50" dirty="0"/>
+              <a:t>로 재기도 하는 것이다</a:t>
+            </a:r>
+            <a:r>
+              <a:rPr lang="en-US" altLang="ko-KR" sz="1600" spc="-50" dirty="0"/>
+              <a:t>.</a:t>
+            </a:r>
+          </a:p>
+          <a:p>
+            <a:pPr marL="835025" lvl="1" indent="-285750">
+              <a:lnSpc>
+                <a:spcPct val="150000"/>
+              </a:lnSpc>
+              <a:buFont typeface="Wingdings" panose="05000000000000000000" pitchFamily="2" charset="2"/>
+              <a:buChar char="ü"/>
+            </a:pPr>
+            <a:endParaRPr lang="en-US" altLang="ko-KR" sz="1600" spc="-50" dirty="0"/>
+          </a:p>
+        </p:txBody>
+      </p:sp>
+    </p:spTree>
+    <p:extLst>
+      <p:ext uri="{BB962C8B-B14F-4D97-AF65-F5344CB8AC3E}">
+        <p14:creationId xmlns:p14="http://schemas.microsoft.com/office/powerpoint/2010/main" val="3533296213"/>
       </p:ext>
     </p:extLst>
   </p:cSld>

--- a/에너지경제학/자원에너지경제학_Chapter_1.pptx
+++ b/에너지경제학/자원에너지경제학_Chapter_1.pptx
@@ -5,7 +5,7 @@
     <p:sldMasterId id="2147483648" r:id="rId1"/>
   </p:sldMasterIdLst>
   <p:notesMasterIdLst>
-    <p:notesMasterId r:id="rId15"/>
+    <p:notesMasterId r:id="rId16"/>
   </p:notesMasterIdLst>
   <p:sldIdLst>
     <p:sldId id="375" r:id="rId2"/>
@@ -16,11 +16,12 @@
     <p:sldId id="555" r:id="rId7"/>
     <p:sldId id="557" r:id="rId8"/>
     <p:sldId id="558" r:id="rId9"/>
-    <p:sldId id="559" r:id="rId10"/>
-    <p:sldId id="560" r:id="rId11"/>
-    <p:sldId id="556" r:id="rId12"/>
-    <p:sldId id="554" r:id="rId13"/>
-    <p:sldId id="364" r:id="rId14"/>
+    <p:sldId id="631" r:id="rId10"/>
+    <p:sldId id="559" r:id="rId11"/>
+    <p:sldId id="560" r:id="rId12"/>
+    <p:sldId id="556" r:id="rId13"/>
+    <p:sldId id="554" r:id="rId14"/>
+    <p:sldId id="364" r:id="rId15"/>
   </p:sldIdLst>
   <p:sldSz cx="12192000" cy="6858000"/>
   <p:notesSz cx="6858000" cy="9144000"/>
@@ -7241,6 +7242,483 @@
         <p:cNvPr id="1" name="">
           <a:extLst>
             <a:ext uri="{FF2B5EF4-FFF2-40B4-BE49-F238E27FC236}">
+              <a16:creationId xmlns:a16="http://schemas.microsoft.com/office/drawing/2014/main" id="{AF6BF624-26E9-2E60-F460-597C1B6DA9D0}"/>
+            </a:ext>
+          </a:extLst>
+        </p:cNvPr>
+        <p:cNvGrpSpPr/>
+        <p:nvPr/>
+      </p:nvGrpSpPr>
+      <p:grpSpPr>
+        <a:xfrm>
+          <a:off x="0" y="0"/>
+          <a:ext cx="0" cy="0"/>
+          <a:chOff x="0" y="0"/>
+          <a:chExt cx="0" cy="0"/>
+        </a:xfrm>
+      </p:grpSpPr>
+      <p:sp>
+        <p:nvSpPr>
+          <p:cNvPr id="2" name="제목 1">
+            <a:extLst>
+              <a:ext uri="{FF2B5EF4-FFF2-40B4-BE49-F238E27FC236}">
+                <a16:creationId xmlns:a16="http://schemas.microsoft.com/office/drawing/2014/main" id="{1D3A0CB6-A471-A379-E6F2-9D851173AB6F}"/>
+              </a:ext>
+            </a:extLst>
+          </p:cNvPr>
+          <p:cNvSpPr>
+            <a:spLocks noGrp="1"/>
+          </p:cNvSpPr>
+          <p:nvPr>
+            <p:ph type="title"/>
+          </p:nvPr>
+        </p:nvSpPr>
+        <p:spPr/>
+        <p:txBody>
+          <a:bodyPr/>
+          <a:lstStyle/>
+          <a:p>
+            <a:r>
+              <a:rPr lang="ko-KR" altLang="en-US" dirty="0"/>
+              <a:t>에너지 단위 변환</a:t>
+            </a:r>
+          </a:p>
+        </p:txBody>
+      </p:sp>
+      <p:sp>
+        <p:nvSpPr>
+          <p:cNvPr id="4" name="슬라이드 번호 개체 틀 3">
+            <a:extLst>
+              <a:ext uri="{FF2B5EF4-FFF2-40B4-BE49-F238E27FC236}">
+                <a16:creationId xmlns:a16="http://schemas.microsoft.com/office/drawing/2014/main" id="{EAB18857-BE01-254C-4058-2D3ACC429111}"/>
+              </a:ext>
+            </a:extLst>
+          </p:cNvPr>
+          <p:cNvSpPr>
+            <a:spLocks noGrp="1"/>
+          </p:cNvSpPr>
+          <p:nvPr>
+            <p:ph type="sldNum" sz="quarter" idx="12"/>
+          </p:nvPr>
+        </p:nvSpPr>
+        <p:spPr/>
+        <p:txBody>
+          <a:bodyPr/>
+          <a:lstStyle/>
+          <a:p>
+            <a:fld id="{109C872D-39A9-4065-8BF3-6A613116E2A1}" type="slidenum">
+              <a:rPr lang="ko-KR" altLang="en-US" smtClean="0"/>
+              <a:t>10</a:t>
+            </a:fld>
+            <a:endParaRPr lang="ko-KR" altLang="en-US"/>
+          </a:p>
+        </p:txBody>
+      </p:sp>
+      <p:sp>
+        <p:nvSpPr>
+          <p:cNvPr id="7" name="TextBox 6">
+            <a:extLst>
+              <a:ext uri="{FF2B5EF4-FFF2-40B4-BE49-F238E27FC236}">
+                <a16:creationId xmlns:a16="http://schemas.microsoft.com/office/drawing/2014/main" id="{7427916E-1F92-C0E3-A9D4-F760E4E298A6}"/>
+              </a:ext>
+            </a:extLst>
+          </p:cNvPr>
+          <p:cNvSpPr txBox="1"/>
+          <p:nvPr/>
+        </p:nvSpPr>
+        <p:spPr>
+          <a:xfrm>
+            <a:off x="288790" y="958844"/>
+            <a:ext cx="11118453" cy="3368679"/>
+          </a:xfrm>
+          <a:prstGeom prst="rect">
+            <a:avLst/>
+          </a:prstGeom>
+          <a:noFill/>
+        </p:spPr>
+        <p:txBody>
+          <a:bodyPr wrap="square" rtlCol="0" anchor="t">
+            <a:spAutoFit/>
+          </a:bodyPr>
+          <a:lstStyle/>
+          <a:p>
+            <a:pPr marL="377825" indent="-285750">
+              <a:lnSpc>
+                <a:spcPct val="150000"/>
+              </a:lnSpc>
+              <a:buFont typeface="Arial" panose="020B0604020202020204" pitchFamily="34" charset="0"/>
+              <a:buChar char="•"/>
+            </a:pPr>
+            <a:r>
+              <a:rPr lang="ko-KR" altLang="en-US" sz="1600" spc="-50" dirty="0"/>
+              <a:t>우리는 줄</a:t>
+            </a:r>
+            <a:r>
+              <a:rPr lang="en-US" altLang="ko-KR" sz="1600" spc="-50" dirty="0"/>
+              <a:t>(J)</a:t>
+            </a:r>
+            <a:r>
+              <a:rPr lang="ko-KR" altLang="en-US" sz="1600" spc="-50" dirty="0"/>
+              <a:t> 이라는 단위보다 음식 포장지에 적힌 칼로리</a:t>
+            </a:r>
+            <a:r>
+              <a:rPr lang="en-US" altLang="ko-KR" sz="1600" spc="-50" dirty="0"/>
+              <a:t>(</a:t>
+            </a:r>
+            <a:r>
+              <a:rPr lang="en-US" altLang="ko-KR" sz="1600" spc="-50" dirty="0" err="1"/>
+              <a:t>cal</a:t>
+            </a:r>
+            <a:r>
+              <a:rPr lang="en-US" altLang="ko-KR" sz="1600" spc="-50" dirty="0"/>
+              <a:t>, calorie)</a:t>
+            </a:r>
+            <a:r>
+              <a:rPr lang="ko-KR" altLang="en-US" sz="1600" spc="-50" dirty="0"/>
+              <a:t> 라고 하는 단위가 더 익숙하다</a:t>
+            </a:r>
+            <a:r>
+              <a:rPr lang="en-US" altLang="ko-KR" sz="1600" spc="-50" dirty="0"/>
+              <a:t>.</a:t>
+            </a:r>
+          </a:p>
+          <a:p>
+            <a:pPr marL="835025" lvl="1" indent="-285750">
+              <a:lnSpc>
+                <a:spcPct val="150000"/>
+              </a:lnSpc>
+              <a:buFont typeface="Wingdings" panose="05000000000000000000" pitchFamily="2" charset="2"/>
+              <a:buChar char="ü"/>
+            </a:pPr>
+            <a:r>
+              <a:rPr lang="ko-KR" altLang="en-US" sz="1600" spc="-50" dirty="0"/>
+              <a:t>우리가 길이를 </a:t>
+            </a:r>
+            <a:r>
+              <a:rPr lang="en-US" altLang="ko-KR" sz="1600" spc="-50" dirty="0"/>
+              <a:t>cm</a:t>
+            </a:r>
+            <a:r>
+              <a:rPr lang="ko-KR" altLang="en-US" sz="1600" spc="-50" dirty="0"/>
+              <a:t>와 </a:t>
+            </a:r>
+            <a:r>
+              <a:rPr lang="en-US" altLang="ko-KR" sz="1600" spc="-50" dirty="0"/>
+              <a:t>inch, </a:t>
+            </a:r>
+            <a:r>
+              <a:rPr lang="ko-KR" altLang="en-US" sz="1600" spc="-50" dirty="0"/>
+              <a:t>온도를 섭씨와 화씨로 다양하게 표현하는 것처럼</a:t>
+            </a:r>
+            <a:r>
+              <a:rPr lang="en-US" altLang="ko-KR" sz="1600" spc="-50" dirty="0"/>
+              <a:t>, </a:t>
+            </a:r>
+            <a:r>
+              <a:rPr lang="ko-KR" altLang="en-US" sz="1600" spc="-50" dirty="0"/>
+              <a:t>줄과 칼로리도 서로 다른 단위로 에너지 양을 나타내는 것일 뿐이다</a:t>
+            </a:r>
+            <a:r>
+              <a:rPr lang="en-US" altLang="ko-KR" sz="1600" spc="-50" dirty="0"/>
+              <a:t>.</a:t>
+            </a:r>
+          </a:p>
+          <a:p>
+            <a:pPr marL="1292225" lvl="2" indent="-285750">
+              <a:lnSpc>
+                <a:spcPct val="150000"/>
+              </a:lnSpc>
+              <a:buFont typeface="Wingdings" panose="05000000000000000000" pitchFamily="2" charset="2"/>
+              <a:buChar char="Ø"/>
+            </a:pPr>
+            <a:r>
+              <a:rPr lang="en-US" altLang="ko-KR" sz="1600" spc="-50" dirty="0"/>
+              <a:t>1J</a:t>
+            </a:r>
+            <a:r>
+              <a:rPr lang="ko-KR" altLang="en-US" sz="1600" spc="-50" dirty="0"/>
+              <a:t> </a:t>
+            </a:r>
+            <a:r>
+              <a:rPr lang="en-US" altLang="ko-KR" sz="1600" spc="-50" dirty="0"/>
+              <a:t>= 0.239cal (</a:t>
+            </a:r>
+            <a:r>
+              <a:rPr lang="ko-KR" altLang="en-US" sz="1600" spc="-50" dirty="0"/>
+              <a:t>참고로 </a:t>
+            </a:r>
+            <a:r>
+              <a:rPr lang="en-US" altLang="ko-KR" sz="1600" spc="-50" dirty="0"/>
+              <a:t>1</a:t>
+            </a:r>
+            <a:r>
+              <a:rPr lang="ko-KR" altLang="en-US" sz="1600" spc="-50" dirty="0"/>
+              <a:t>센티미터</a:t>
+            </a:r>
+            <a:r>
+              <a:rPr lang="en-US" altLang="ko-KR" sz="1600" spc="-50" dirty="0"/>
+              <a:t> =</a:t>
+            </a:r>
+            <a:r>
+              <a:rPr lang="ko-KR" altLang="en-US" sz="1600" spc="-50" dirty="0"/>
+              <a:t> </a:t>
+            </a:r>
+            <a:r>
+              <a:rPr lang="en-US" altLang="ko-KR" sz="1600" spc="-50" dirty="0"/>
+              <a:t>0.39</a:t>
+            </a:r>
+            <a:r>
+              <a:rPr lang="ko-KR" altLang="en-US" sz="1600" spc="-50" dirty="0"/>
+              <a:t>인치</a:t>
+            </a:r>
+            <a:r>
+              <a:rPr lang="en-US" altLang="ko-KR" sz="1600" spc="-50" dirty="0"/>
+              <a:t>, </a:t>
+            </a:r>
+            <a:r>
+              <a:rPr lang="ko-KR" altLang="en-US" sz="1600" spc="-50" dirty="0"/>
+              <a:t>섭씨</a:t>
+            </a:r>
+            <a:r>
+              <a:rPr lang="en-US" altLang="ko-KR" sz="1600" spc="-50" dirty="0"/>
+              <a:t>10</a:t>
+            </a:r>
+            <a:r>
+              <a:rPr lang="ko-KR" altLang="en-US" sz="1600" spc="-50" dirty="0"/>
+              <a:t>도 </a:t>
+            </a:r>
+            <a:r>
+              <a:rPr lang="en-US" altLang="ko-KR" sz="1600" spc="-50" dirty="0"/>
+              <a:t>=</a:t>
+            </a:r>
+            <a:r>
+              <a:rPr lang="ko-KR" altLang="en-US" sz="1600" spc="-50" dirty="0"/>
+              <a:t>화씨 </a:t>
+            </a:r>
+            <a:r>
+              <a:rPr lang="en-US" altLang="ko-KR" sz="1600" spc="-50" dirty="0"/>
+              <a:t>50</a:t>
+            </a:r>
+            <a:r>
+              <a:rPr lang="ko-KR" altLang="en-US" sz="1600" spc="-50" dirty="0"/>
+              <a:t>도와 같다</a:t>
+            </a:r>
+            <a:r>
+              <a:rPr lang="en-US" altLang="ko-KR" sz="1600" spc="-50" dirty="0"/>
+              <a:t>.)</a:t>
+            </a:r>
+          </a:p>
+          <a:p>
+            <a:pPr marL="835025" lvl="1" indent="-285750">
+              <a:lnSpc>
+                <a:spcPct val="150000"/>
+              </a:lnSpc>
+              <a:buFont typeface="Wingdings" panose="05000000000000000000" pitchFamily="2" charset="2"/>
+              <a:buChar char="ü"/>
+            </a:pPr>
+            <a:r>
+              <a:rPr lang="ko-KR" altLang="en-US" sz="1600" spc="-50" dirty="0"/>
+              <a:t>비유하자면</a:t>
+            </a:r>
+            <a:r>
+              <a:rPr lang="en-US" altLang="ko-KR" sz="1600" spc="-50" dirty="0"/>
+              <a:t>, </a:t>
+            </a:r>
+            <a:r>
+              <a:rPr lang="ko-KR" altLang="en-US" sz="1600" spc="-50" dirty="0"/>
+              <a:t>길이를 </a:t>
+            </a:r>
+            <a:r>
+              <a:rPr lang="en-US" altLang="ko-KR" sz="1600" spc="-50" dirty="0"/>
+              <a:t>cm</a:t>
+            </a:r>
+            <a:r>
+              <a:rPr lang="ko-KR" altLang="en-US" sz="1600" spc="-50" dirty="0"/>
+              <a:t>로 재기도하고</a:t>
+            </a:r>
+            <a:r>
+              <a:rPr lang="en-US" altLang="ko-KR" sz="1600" spc="-50" dirty="0"/>
+              <a:t>, inch</a:t>
+            </a:r>
+            <a:r>
+              <a:rPr lang="ko-KR" altLang="en-US" sz="1600" spc="-50" dirty="0"/>
+              <a:t>로 재기도 한다</a:t>
+            </a:r>
+            <a:r>
+              <a:rPr lang="en-US" altLang="ko-KR" sz="1600" spc="-50" dirty="0"/>
+              <a:t>. (1cm</a:t>
+            </a:r>
+            <a:r>
+              <a:rPr lang="ko-KR" altLang="en-US" sz="1600" spc="-50" dirty="0"/>
+              <a:t>는 </a:t>
+            </a:r>
+            <a:r>
+              <a:rPr lang="en-US" altLang="ko-KR" sz="1600" spc="-50" dirty="0"/>
+              <a:t>0.394 inch</a:t>
+            </a:r>
+            <a:r>
+              <a:rPr lang="ko-KR" altLang="en-US" sz="1600" spc="-50" dirty="0"/>
+              <a:t>와 같다</a:t>
+            </a:r>
+            <a:r>
+              <a:rPr lang="en-US" altLang="ko-KR" sz="1600" spc="-50" dirty="0"/>
+              <a:t>.) </a:t>
+            </a:r>
+            <a:r>
+              <a:rPr lang="ko-KR" altLang="en-US" sz="1600" spc="-50" dirty="0"/>
+              <a:t>또 다른 예로는 섭씨와 화씨</a:t>
+            </a:r>
+            <a:r>
+              <a:rPr lang="en-US" altLang="ko-KR" sz="1600" spc="-50" dirty="0"/>
+              <a:t>, km</a:t>
+            </a:r>
+            <a:r>
+              <a:rPr lang="ko-KR" altLang="en-US" sz="1600" spc="-50" dirty="0"/>
+              <a:t>와 </a:t>
+            </a:r>
+            <a:r>
+              <a:rPr lang="en-US" altLang="ko-KR" sz="1600" spc="-50" dirty="0"/>
+              <a:t>mile </a:t>
+            </a:r>
+            <a:r>
+              <a:rPr lang="ko-KR" altLang="en-US" sz="1600" spc="-50" dirty="0"/>
+              <a:t>등이 있다</a:t>
+            </a:r>
+            <a:r>
+              <a:rPr lang="en-US" altLang="ko-KR" sz="1600" spc="-50" dirty="0"/>
+              <a:t>.</a:t>
+            </a:r>
+          </a:p>
+          <a:p>
+            <a:pPr marL="835025" lvl="1" indent="-285750">
+              <a:lnSpc>
+                <a:spcPct val="150000"/>
+              </a:lnSpc>
+              <a:buFont typeface="Wingdings" panose="05000000000000000000" pitchFamily="2" charset="2"/>
+              <a:buChar char="ü"/>
+            </a:pPr>
+            <a:endParaRPr lang="en-US" altLang="ko-KR" sz="1600" spc="-50" dirty="0"/>
+          </a:p>
+          <a:p>
+            <a:pPr marL="377825" indent="-285750">
+              <a:lnSpc>
+                <a:spcPct val="150000"/>
+              </a:lnSpc>
+              <a:buFont typeface="Arial" panose="020B0604020202020204" pitchFamily="34" charset="0"/>
+              <a:buChar char="•"/>
+            </a:pPr>
+            <a:r>
+              <a:rPr lang="ko-KR" altLang="en-US" sz="1600" spc="-50" dirty="0"/>
+              <a:t>오른쪽에 보이는 </a:t>
+            </a:r>
+            <a:r>
+              <a:rPr lang="en-US" altLang="ko-KR" sz="1600" spc="-50" dirty="0"/>
+              <a:t>250</a:t>
+            </a:r>
+            <a:r>
+              <a:rPr lang="ko-KR" altLang="en-US" sz="1600" spc="-50" dirty="0"/>
+              <a:t>밀리리터</a:t>
+            </a:r>
+            <a:r>
+              <a:rPr lang="en-US" altLang="ko-KR" sz="1600" spc="-50" dirty="0"/>
+              <a:t>(ml, milliliter)</a:t>
+            </a:r>
+            <a:r>
+              <a:rPr lang="ko-KR" altLang="en-US" sz="1600" spc="-50" dirty="0" err="1"/>
+              <a:t>짜리</a:t>
+            </a:r>
+            <a:r>
+              <a:rPr lang="ko-KR" altLang="en-US" sz="1600" spc="-50" dirty="0"/>
+              <a:t> </a:t>
+            </a:r>
+            <a:r>
+              <a:rPr lang="ko-KR" altLang="en-US" sz="1600" spc="-50" dirty="0" err="1"/>
+              <a:t>캔콜라는</a:t>
+            </a:r>
+            <a:r>
+              <a:rPr lang="ko-KR" altLang="en-US" sz="1600" spc="-50" dirty="0"/>
+              <a:t> </a:t>
+            </a:r>
+            <a:r>
+              <a:rPr lang="en-US" altLang="ko-KR" sz="1600" spc="-50" dirty="0"/>
+              <a:t>108kcal</a:t>
+            </a:r>
+            <a:r>
+              <a:rPr lang="ko-KR" altLang="en-US" sz="1600" spc="-50" dirty="0"/>
+              <a:t> 의 에너지를 갖고 있다</a:t>
+            </a:r>
+            <a:r>
+              <a:rPr lang="en-US" altLang="ko-KR" sz="1600" spc="-50" dirty="0"/>
+              <a:t>.</a:t>
+            </a:r>
+          </a:p>
+          <a:p>
+            <a:pPr marL="835025" lvl="1" indent="-285750">
+              <a:lnSpc>
+                <a:spcPct val="150000"/>
+              </a:lnSpc>
+              <a:buFont typeface="Wingdings" panose="05000000000000000000" pitchFamily="2" charset="2"/>
+              <a:buChar char="ü"/>
+            </a:pPr>
+            <a:r>
+              <a:rPr lang="ko-KR" altLang="en-US" sz="1600" spc="-50" dirty="0"/>
+              <a:t>우선 </a:t>
+            </a:r>
+            <a:endParaRPr lang="en-US" altLang="ko-KR" sz="1600" spc="-50" dirty="0"/>
+          </a:p>
+        </p:txBody>
+      </p:sp>
+      <p:pic>
+        <p:nvPicPr>
+          <p:cNvPr id="8" name="그림 7">
+            <a:extLst>
+              <a:ext uri="{FF2B5EF4-FFF2-40B4-BE49-F238E27FC236}">
+                <a16:creationId xmlns:a16="http://schemas.microsoft.com/office/drawing/2014/main" id="{F6960635-173F-8015-FAF9-039BBC0E704F}"/>
+              </a:ext>
+            </a:extLst>
+          </p:cNvPr>
+          <p:cNvPicPr>
+            <a:picLocks noChangeAspect="1"/>
+          </p:cNvPicPr>
+          <p:nvPr/>
+        </p:nvPicPr>
+        <p:blipFill>
+          <a:blip r:embed="rId2"/>
+          <a:stretch>
+            <a:fillRect/>
+          </a:stretch>
+        </p:blipFill>
+        <p:spPr>
+          <a:xfrm>
+            <a:off x="9114826" y="3577666"/>
+            <a:ext cx="1193478" cy="2755900"/>
+          </a:xfrm>
+          <a:prstGeom prst="rect">
+            <a:avLst/>
+          </a:prstGeom>
+        </p:spPr>
+      </p:pic>
+    </p:spTree>
+    <p:extLst>
+      <p:ext uri="{BB962C8B-B14F-4D97-AF65-F5344CB8AC3E}">
+        <p14:creationId xmlns:p14="http://schemas.microsoft.com/office/powerpoint/2010/main" val="3533296213"/>
+      </p:ext>
+    </p:extLst>
+  </p:cSld>
+  <p:clrMapOvr>
+    <a:masterClrMapping/>
+  </p:clrMapOvr>
+</p:sld>
+</file>
+
+<file path=ppt/slides/slide11.xml><?xml version="1.0" encoding="utf-8"?>
+<p:sld xmlns:a="http://schemas.openxmlformats.org/drawingml/2006/main" xmlns:r="http://schemas.openxmlformats.org/officeDocument/2006/relationships" xmlns:p="http://schemas.openxmlformats.org/presentationml/2006/main">
+  <p:cSld>
+    <p:spTree>
+      <p:nvGrpSpPr>
+        <p:cNvPr id="1" name="">
+          <a:extLst>
+            <a:ext uri="{FF2B5EF4-FFF2-40B4-BE49-F238E27FC236}">
               <a16:creationId xmlns:a16="http://schemas.microsoft.com/office/drawing/2014/main" id="{04B381B5-F69D-5A39-2273-AC354F035998}"/>
             </a:ext>
           </a:extLst>
@@ -7307,7 +7785,7 @@
           <a:p>
             <a:fld id="{109C872D-39A9-4065-8BF3-6A613116E2A1}" type="slidenum">
               <a:rPr lang="ko-KR" altLang="en-US" smtClean="0"/>
-              <a:t>10</a:t>
+              <a:t>11</a:t>
             </a:fld>
             <a:endParaRPr lang="ko-KR" altLang="en-US"/>
           </a:p>
@@ -7446,7 +7924,7 @@
 </p:sld>
 </file>
 
-<file path=ppt/slides/slide11.xml><?xml version="1.0" encoding="utf-8"?>
+<file path=ppt/slides/slide12.xml><?xml version="1.0" encoding="utf-8"?>
 <p:sld xmlns:a="http://schemas.openxmlformats.org/drawingml/2006/main" xmlns:r="http://schemas.openxmlformats.org/officeDocument/2006/relationships" xmlns:p="http://schemas.openxmlformats.org/presentationml/2006/main">
   <p:cSld>
     <p:spTree>
@@ -7520,7 +7998,7 @@
           <a:p>
             <a:fld id="{109C872D-39A9-4065-8BF3-6A613116E2A1}" type="slidenum">
               <a:rPr lang="ko-KR" altLang="en-US" smtClean="0"/>
-              <a:t>11</a:t>
+              <a:t>12</a:t>
             </a:fld>
             <a:endParaRPr lang="ko-KR" altLang="en-US"/>
           </a:p>
@@ -8098,7 +8576,7 @@
 </p:sld>
 </file>
 
-<file path=ppt/slides/slide12.xml><?xml version="1.0" encoding="utf-8"?>
+<file path=ppt/slides/slide13.xml><?xml version="1.0" encoding="utf-8"?>
 <p:sld xmlns:a="http://schemas.openxmlformats.org/drawingml/2006/main" xmlns:r="http://schemas.openxmlformats.org/officeDocument/2006/relationships" xmlns:p="http://schemas.openxmlformats.org/presentationml/2006/main">
   <p:cSld>
     <p:spTree>
@@ -8172,7 +8650,7 @@
           <a:p>
             <a:fld id="{109C872D-39A9-4065-8BF3-6A613116E2A1}" type="slidenum">
               <a:rPr lang="ko-KR" altLang="en-US" smtClean="0"/>
-              <a:t>12</a:t>
+              <a:t>13</a:t>
             </a:fld>
             <a:endParaRPr lang="ko-KR" altLang="en-US"/>
           </a:p>
@@ -8671,7 +9149,7 @@
 </p:sld>
 </file>
 
-<file path=ppt/slides/slide13.xml><?xml version="1.0" encoding="utf-8"?>
+<file path=ppt/slides/slide14.xml><?xml version="1.0" encoding="utf-8"?>
 <p:sld xmlns:a="http://schemas.openxmlformats.org/drawingml/2006/main" xmlns:r="http://schemas.openxmlformats.org/officeDocument/2006/relationships" xmlns:p="http://schemas.openxmlformats.org/presentationml/2006/main">
   <p:cSld>
     <p:spTree>
@@ -8799,7 +9277,7 @@
           <a:p>
             <a:fld id="{109C872D-39A9-4065-8BF3-6A613116E2A1}" type="slidenum">
               <a:rPr lang="ko-KR" altLang="en-US" smtClean="0"/>
-              <a:t>13</a:t>
+              <a:t>14</a:t>
             </a:fld>
             <a:endParaRPr lang="ko-KR" altLang="en-US"/>
           </a:p>
@@ -10086,7 +10564,7 @@
         <p:spPr>
           <a:xfrm>
             <a:off x="288790" y="958844"/>
-            <a:ext cx="11118453" cy="4107343"/>
+            <a:ext cx="11118453" cy="3738011"/>
           </a:xfrm>
           <a:prstGeom prst="rect">
             <a:avLst/>
@@ -10169,17 +10647,20 @@
             </a:r>
             <a:r>
               <a:rPr lang="ko-KR" altLang="en-US" sz="1600" spc="-50" dirty="0"/>
-              <a:t>은 빛을 낸다</a:t>
+              <a:t>은 빛을 내서</a:t>
+            </a:r>
+            <a:r>
+              <a:rPr lang="en-US" altLang="ko-KR" sz="1600" spc="-50" dirty="0"/>
+              <a:t>, </a:t>
+            </a:r>
+            <a:r>
+              <a:rPr lang="ko-KR" altLang="en-US" sz="1600" spc="-50" dirty="0"/>
+              <a:t>우리 눈에 들어온다</a:t>
             </a:r>
             <a:r>
               <a:rPr lang="en-US" altLang="ko-KR" sz="1600" spc="-50" dirty="0"/>
               <a:t>.</a:t>
             </a:r>
-            <a:r>
-              <a:rPr lang="ko-KR" altLang="en-US" sz="1600" spc="-50" dirty="0"/>
-              <a:t> </a:t>
-            </a:r>
-            <a:endParaRPr lang="en-US" altLang="ko-KR" sz="1600" spc="-50" dirty="0"/>
           </a:p>
           <a:p>
             <a:pPr marL="835025" lvl="1" indent="-285750">
@@ -10298,7 +10779,7 @@
             </a:r>
             <a:r>
               <a:rPr lang="ko-KR" altLang="en-US" sz="1600" spc="-50" dirty="0"/>
-              <a:t>선풍기를 콘센트와 연결하면 움직인다</a:t>
+              <a:t>충전된 핸드폰으로 여러가지 일을 할 수 있다</a:t>
             </a:r>
             <a:r>
               <a:rPr lang="en-US" altLang="ko-KR" sz="1600" spc="-50" dirty="0"/>
@@ -10452,16 +10933,6 @@
               <a:rPr lang="en-US" altLang="ko-KR" sz="1600" spc="-50" dirty="0"/>
               <a:t>.</a:t>
             </a:r>
-          </a:p>
-          <a:p>
-            <a:pPr marL="835025" lvl="1" indent="-285750">
-              <a:lnSpc>
-                <a:spcPct val="150000"/>
-              </a:lnSpc>
-              <a:buFont typeface="Wingdings" panose="05000000000000000000" pitchFamily="2" charset="2"/>
-              <a:buChar char="ü"/>
-            </a:pPr>
-            <a:endParaRPr lang="en-US" altLang="ko-KR" sz="1600" spc="-50" dirty="0"/>
           </a:p>
         </p:txBody>
       </p:sp>
@@ -10595,7 +11066,7 @@
             </a:pPr>
             <a:r>
               <a:rPr lang="ko-KR" altLang="en-US" sz="1600" spc="-50" dirty="0"/>
-              <a:t>우리는 앞서 살펴본 여러가지 에너지 형태를 상황에 맞게 편리한 형태로 바꾸어 </a:t>
+              <a:t>우리는 에너지 형태를 상황에 맞게 편리한 형태로 바꾸어 </a:t>
             </a:r>
             <a:r>
               <a:rPr lang="en-US" altLang="ko-KR" sz="1600" spc="-50" dirty="0"/>
@@ -11199,7 +11670,7 @@
         <p:spPr>
           <a:xfrm>
             <a:off x="288790" y="958844"/>
-            <a:ext cx="11118453" cy="1891352"/>
+            <a:ext cx="11118453" cy="2999347"/>
           </a:xfrm>
           <a:prstGeom prst="rect">
             <a:avLst/>
@@ -11258,7 +11729,7 @@
             </a:r>
             <a:r>
               <a:rPr lang="en-US" altLang="ko-KR" sz="1600" spc="-50" dirty="0"/>
-              <a:t>(N)</a:t>
+              <a:t>(N, Newton)</a:t>
             </a:r>
             <a:r>
               <a:rPr lang="ko-KR" altLang="en-US" sz="1600" spc="-50" dirty="0"/>
@@ -11266,11 +11737,19 @@
             </a:r>
             <a:r>
               <a:rPr lang="en-US" altLang="ko-KR" sz="1600" spc="-50" dirty="0"/>
-              <a:t>1m </a:t>
-            </a:r>
-            <a:r>
-              <a:rPr lang="ko-KR" altLang="en-US" sz="1600" spc="-50" dirty="0"/>
-              <a:t>이동시키는데 필요한 에너지 로 정의된다</a:t>
+              <a:t>1</a:t>
+            </a:r>
+            <a:r>
+              <a:rPr lang="ko-KR" altLang="en-US" sz="1600" spc="-50" dirty="0"/>
+              <a:t>미터 </a:t>
+            </a:r>
+            <a:r>
+              <a:rPr lang="en-US" altLang="ko-KR" sz="1600" spc="-50" dirty="0"/>
+              <a:t>(m, meter) </a:t>
+            </a:r>
+            <a:r>
+              <a:rPr lang="ko-KR" altLang="en-US" sz="1600" spc="-50" dirty="0"/>
+              <a:t>이동시키는데 필요한 에너지로 정의된다</a:t>
             </a:r>
             <a:r>
               <a:rPr lang="en-US" altLang="ko-KR" sz="1600" spc="-50" dirty="0"/>
@@ -11319,32 +11798,46 @@
             </a:r>
           </a:p>
           <a:p>
-            <a:pPr marL="835025" lvl="1" indent="-285750">
+            <a:pPr marL="377825" indent="-285750">
               <a:lnSpc>
                 <a:spcPct val="150000"/>
               </a:lnSpc>
-              <a:buFont typeface="Wingdings" panose="05000000000000000000" pitchFamily="2" charset="2"/>
-              <a:buChar char="ü"/>
+              <a:buFont typeface="Arial" panose="020B0604020202020204" pitchFamily="34" charset="0"/>
+              <a:buChar char="•"/>
             </a:pPr>
-            <a:r>
-              <a:rPr lang="ko-KR" altLang="en-US" sz="1600" spc="-50" dirty="0"/>
-              <a:t>다시 말하면 </a:t>
-            </a:r>
-            <a:r>
-              <a:rPr lang="en-US" altLang="ko-KR" sz="1600" spc="-50" dirty="0"/>
-              <a:t>1</a:t>
-            </a:r>
-            <a:r>
-              <a:rPr lang="ko-KR" altLang="en-US" sz="1600" spc="-50" dirty="0"/>
-              <a:t>줄은 </a:t>
-            </a:r>
+            <a:endParaRPr lang="en-US" altLang="ko-KR" sz="1600" spc="-50" dirty="0"/>
+          </a:p>
+          <a:p>
+            <a:pPr marL="377825" indent="-285750">
+              <a:lnSpc>
+                <a:spcPct val="150000"/>
+              </a:lnSpc>
+              <a:buFont typeface="Arial" panose="020B0604020202020204" pitchFamily="34" charset="0"/>
+              <a:buChar char="•"/>
+            </a:pPr>
             <a:r>
               <a:rPr lang="en-US" altLang="ko-KR" sz="1600" spc="-50" dirty="0"/>
               <a:t>1kg</a:t>
             </a:r>
             <a:r>
               <a:rPr lang="ko-KR" altLang="en-US" sz="1600" spc="-50" dirty="0"/>
-              <a:t>인 물체에 </a:t>
+              <a:t> </a:t>
+            </a:r>
+            <a:r>
+              <a:rPr lang="ko-KR" altLang="en-US" sz="1600" spc="-50" dirty="0" err="1"/>
+              <a:t>짜리</a:t>
+            </a:r>
+            <a:r>
+              <a:rPr lang="ko-KR" altLang="en-US" sz="1600" spc="-50" dirty="0"/>
+              <a:t> 물체에 </a:t>
+            </a:r>
+            <a:r>
+              <a:rPr lang="en-US" altLang="ko-KR" sz="1600" spc="-50" dirty="0"/>
+              <a:t>1N</a:t>
+            </a:r>
+            <a:r>
+              <a:rPr lang="ko-KR" altLang="en-US" sz="1600" spc="-50" dirty="0"/>
+              <a:t>의 힘을 가하면 그 물체는 </a:t>
             </a:r>
             <a:r>
               <a:rPr lang="en-US" altLang="ko-KR" sz="1600" spc="-50" dirty="0"/>
@@ -11352,11 +11845,11 @@
             </a:r>
             <a:r>
               <a:rPr lang="en-US" altLang="ko-KR" sz="1600" spc="-50" baseline="30000" dirty="0"/>
-              <a:t>2 </a:t>
-            </a:r>
-            <a:r>
-              <a:rPr lang="ko-KR" altLang="en-US" sz="1600" spc="-50" dirty="0"/>
-              <a:t>의 가속도를 발생시키는 힘을</a:t>
+              <a:t>2  </a:t>
+            </a:r>
+            <a:r>
+              <a:rPr lang="ko-KR" altLang="en-US" sz="1600" spc="-50" dirty="0"/>
+              <a:t>의</a:t>
             </a:r>
             <a:r>
               <a:rPr lang="en-US" altLang="ko-KR" sz="1600" spc="-50" dirty="0"/>
@@ -11364,7 +11857,40 @@
             </a:r>
             <a:r>
               <a:rPr lang="ko-KR" altLang="en-US" sz="1600" spc="-50" dirty="0"/>
-              <a:t>가하여</a:t>
+              <a:t>가속도를 갖는다</a:t>
+            </a:r>
+            <a:r>
+              <a:rPr lang="en-US" altLang="ko-KR" sz="1600" spc="-50" dirty="0"/>
+              <a:t>.</a:t>
+            </a:r>
+          </a:p>
+          <a:p>
+            <a:pPr marL="377825" indent="-285750">
+              <a:lnSpc>
+                <a:spcPct val="150000"/>
+              </a:lnSpc>
+              <a:buFont typeface="Arial" panose="020B0604020202020204" pitchFamily="34" charset="0"/>
+              <a:buChar char="•"/>
+            </a:pPr>
+            <a:r>
+              <a:rPr lang="ko-KR" altLang="en-US" sz="1600" spc="-50" dirty="0"/>
+              <a:t>그 </a:t>
+            </a:r>
+            <a:r>
+              <a:rPr lang="en-US" altLang="ko-KR" sz="1600" spc="-50" dirty="0"/>
+              <a:t>1N</a:t>
+            </a:r>
+            <a:r>
+              <a:rPr lang="ko-KR" altLang="en-US" sz="1600" spc="-50" dirty="0"/>
+              <a:t>의 힘으로 물체를 </a:t>
+            </a:r>
+            <a:r>
+              <a:rPr lang="en-US" altLang="ko-KR" sz="1600" spc="-50" dirty="0"/>
+              <a:t>1m </a:t>
+            </a:r>
+            <a:r>
+              <a:rPr lang="ko-KR" altLang="en-US" sz="1600" spc="-50" dirty="0"/>
+              <a:t>이동시키면</a:t>
             </a:r>
             <a:r>
               <a:rPr lang="en-US" altLang="ko-KR" sz="1600" spc="-50" dirty="0"/>
@@ -11372,15 +11898,106 @@
             </a:r>
             <a:r>
               <a:rPr lang="ko-KR" altLang="en-US" sz="1600" spc="-50" dirty="0"/>
-              <a:t>그 물체를 힘의 방향으로 </a:t>
-            </a:r>
-            <a:r>
-              <a:rPr lang="en-US" altLang="ko-KR" sz="1600" spc="-50" dirty="0"/>
-              <a:t>1m </a:t>
-            </a:r>
-            <a:r>
-              <a:rPr lang="ko-KR" altLang="en-US" sz="1600" spc="-50" dirty="0"/>
-              <a:t>이동시키는데 필요한 에너지 이다</a:t>
+              <a:t>그때 사용된 에너지는 </a:t>
+            </a:r>
+            <a:r>
+              <a:rPr lang="en-US" altLang="ko-KR" sz="1600" spc="-50" dirty="0"/>
+              <a:t>1J </a:t>
+            </a:r>
+            <a:r>
+              <a:rPr lang="ko-KR" altLang="en-US" sz="1600" spc="-50" dirty="0"/>
+              <a:t>이다</a:t>
+            </a:r>
+            <a:r>
+              <a:rPr lang="en-US" altLang="ko-KR" sz="1600" spc="-50" dirty="0"/>
+              <a:t>.</a:t>
+            </a:r>
+          </a:p>
+          <a:p>
+            <a:pPr marL="377825" indent="-285750">
+              <a:lnSpc>
+                <a:spcPct val="150000"/>
+              </a:lnSpc>
+              <a:buFont typeface="Arial" panose="020B0604020202020204" pitchFamily="34" charset="0"/>
+              <a:buChar char="•"/>
+            </a:pPr>
+            <a:endParaRPr lang="en-US" altLang="ko-KR" sz="1600" spc="-50" dirty="0"/>
+          </a:p>
+          <a:p>
+            <a:pPr marL="377825" indent="-285750">
+              <a:lnSpc>
+                <a:spcPct val="150000"/>
+              </a:lnSpc>
+              <a:buFont typeface="Arial" panose="020B0604020202020204" pitchFamily="34" charset="0"/>
+              <a:buChar char="•"/>
+            </a:pPr>
+            <a:r>
+              <a:rPr lang="ko-KR" altLang="en-US" sz="1600" spc="-50" dirty="0"/>
+              <a:t>앞서 살펴본 모든 에너지 형태</a:t>
+            </a:r>
+            <a:r>
+              <a:rPr lang="en-US" altLang="ko-KR" sz="1600" spc="-50" dirty="0"/>
+              <a:t> (</a:t>
+            </a:r>
+            <a:r>
+              <a:rPr lang="ko-KR" altLang="en-US" sz="1600" spc="-50" dirty="0"/>
+              <a:t>빛</a:t>
+            </a:r>
+            <a:r>
+              <a:rPr lang="en-US" altLang="ko-KR" sz="1600" spc="-50" dirty="0"/>
+              <a:t>, </a:t>
+            </a:r>
+            <a:r>
+              <a:rPr lang="ko-KR" altLang="en-US" sz="1600" spc="-50" dirty="0"/>
+              <a:t>소리</a:t>
+            </a:r>
+            <a:r>
+              <a:rPr lang="en-US" altLang="ko-KR" sz="1600" spc="-50" dirty="0"/>
+              <a:t>, </a:t>
+            </a:r>
+            <a:r>
+              <a:rPr lang="ko-KR" altLang="en-US" sz="1600" spc="-50" dirty="0"/>
+              <a:t>열</a:t>
+            </a:r>
+            <a:r>
+              <a:rPr lang="en-US" altLang="ko-KR" sz="1600" spc="-50" dirty="0"/>
+              <a:t>, </a:t>
+            </a:r>
+            <a:r>
+              <a:rPr lang="ko-KR" altLang="en-US" sz="1600" spc="-50" dirty="0"/>
+              <a:t>운동 </a:t>
+            </a:r>
+            <a:r>
+              <a:rPr lang="en-US" altLang="ko-KR" sz="1600" spc="-50" dirty="0"/>
+              <a:t>··· </a:t>
+            </a:r>
+            <a:r>
+              <a:rPr lang="ko-KR" altLang="en-US" sz="1600" spc="-50" dirty="0"/>
+              <a:t>등등</a:t>
+            </a:r>
+            <a:r>
+              <a:rPr lang="en-US" altLang="ko-KR" sz="1600" spc="-50" dirty="0"/>
+              <a:t>) </a:t>
+            </a:r>
+            <a:r>
+              <a:rPr lang="ko-KR" altLang="en-US" sz="1600" spc="-50" dirty="0"/>
+              <a:t>에 대해 그 에너지의 양은 모두 이 줄</a:t>
+            </a:r>
+            <a:r>
+              <a:rPr lang="en-US" altLang="ko-KR" sz="1600" spc="-50" dirty="0"/>
+              <a:t>(J)</a:t>
+            </a:r>
+            <a:r>
+              <a:rPr lang="ko-KR" altLang="en-US" sz="1600" spc="-50" dirty="0"/>
+              <a:t>로</a:t>
+            </a:r>
+            <a:r>
+              <a:rPr lang="en-US" altLang="ko-KR" sz="1600" spc="-50" dirty="0"/>
+              <a:t> </a:t>
+            </a:r>
+            <a:r>
+              <a:rPr lang="ko-KR" altLang="en-US" sz="1600" spc="-50" dirty="0"/>
+              <a:t>측정이 가능하다</a:t>
             </a:r>
             <a:r>
               <a:rPr lang="en-US" altLang="ko-KR" sz="1600" spc="-50" dirty="0"/>
@@ -11407,13 +12024,7 @@
   <p:cSld>
     <p:spTree>
       <p:nvGrpSpPr>
-        <p:cNvPr id="1" name="">
-          <a:extLst>
-            <a:ext uri="{FF2B5EF4-FFF2-40B4-BE49-F238E27FC236}">
-              <a16:creationId xmlns:a16="http://schemas.microsoft.com/office/drawing/2014/main" id="{AF6BF624-26E9-2E60-F460-597C1B6DA9D0}"/>
-            </a:ext>
-          </a:extLst>
-        </p:cNvPr>
+        <p:cNvPr id="1" name=""/>
         <p:cNvGrpSpPr/>
         <p:nvPr/>
       </p:nvGrpSpPr>
@@ -11430,7 +12041,7 @@
           <p:cNvPr id="2" name="제목 1">
             <a:extLst>
               <a:ext uri="{FF2B5EF4-FFF2-40B4-BE49-F238E27FC236}">
-                <a16:creationId xmlns:a16="http://schemas.microsoft.com/office/drawing/2014/main" id="{1D3A0CB6-A471-A379-E6F2-9D851173AB6F}"/>
+                <a16:creationId xmlns:a16="http://schemas.microsoft.com/office/drawing/2014/main" id="{3203222F-C683-AD65-D283-AE30AFDA8A5B}"/>
               </a:ext>
             </a:extLst>
           </p:cNvPr>
@@ -11447,8 +12058,20 @@
           <a:lstStyle/>
           <a:p>
             <a:r>
+              <a:rPr lang="en-US" altLang="ko-KR" dirty="0"/>
+              <a:t>(</a:t>
+            </a:r>
+            <a:r>
               <a:rPr lang="ko-KR" altLang="en-US" dirty="0"/>
-              <a:t>에너지 단위 변환</a:t>
+              <a:t>참고자료</a:t>
+            </a:r>
+            <a:r>
+              <a:rPr lang="en-US" altLang="ko-KR" dirty="0"/>
+              <a:t>) SI </a:t>
+            </a:r>
+            <a:r>
+              <a:rPr lang="ko-KR" altLang="en-US" dirty="0"/>
+              <a:t>접두어</a:t>
             </a:r>
           </a:p>
         </p:txBody>
@@ -11458,7 +12081,7 @@
           <p:cNvPr id="4" name="슬라이드 번호 개체 틀 3">
             <a:extLst>
               <a:ext uri="{FF2B5EF4-FFF2-40B4-BE49-F238E27FC236}">
-                <a16:creationId xmlns:a16="http://schemas.microsoft.com/office/drawing/2014/main" id="{EAB18857-BE01-254C-4058-2D3ACC429111}"/>
+                <a16:creationId xmlns:a16="http://schemas.microsoft.com/office/drawing/2014/main" id="{EA8583F4-A729-47CF-A318-D08799C0EDEA}"/>
               </a:ext>
             </a:extLst>
           </p:cNvPr>
@@ -11484,10 +12107,10 @@
       </p:sp>
       <p:sp>
         <p:nvSpPr>
-          <p:cNvPr id="7" name="TextBox 6">
+          <p:cNvPr id="5" name="TextBox 4">
             <a:extLst>
               <a:ext uri="{FF2B5EF4-FFF2-40B4-BE49-F238E27FC236}">
-                <a16:creationId xmlns:a16="http://schemas.microsoft.com/office/drawing/2014/main" id="{7427916E-1F92-C0E3-A9D4-F760E4E298A6}"/>
+                <a16:creationId xmlns:a16="http://schemas.microsoft.com/office/drawing/2014/main" id="{C5FA2FB6-C5ED-9F02-34BB-9636C91CEC3B}"/>
               </a:ext>
             </a:extLst>
           </p:cNvPr>
@@ -11497,7 +12120,7 @@
         <p:spPr>
           <a:xfrm>
             <a:off x="288790" y="958844"/>
-            <a:ext cx="11118453" cy="3368679"/>
+            <a:ext cx="11229216" cy="5584670"/>
           </a:xfrm>
           <a:prstGeom prst="rect">
             <a:avLst/>
@@ -11510,6 +12133,94 @@
           </a:bodyPr>
           <a:lstStyle/>
           <a:p>
+            <a:pPr>
+              <a:lnSpc>
+                <a:spcPct val="150000"/>
+              </a:lnSpc>
+            </a:pPr>
+            <a:r>
+              <a:rPr lang="ko-KR" altLang="en-US" sz="1600" b="1" u="sng" dirty="0">
+                <a:ln w="3175">
+                  <a:noFill/>
+                </a:ln>
+                <a:latin typeface="+mn-ea"/>
+              </a:rPr>
+              <a:t>평소에 들어본 킬로</a:t>
+            </a:r>
+            <a:r>
+              <a:rPr lang="en-US" altLang="ko-KR" sz="1600" b="1" u="sng" dirty="0">
+                <a:ln w="3175">
+                  <a:noFill/>
+                </a:ln>
+                <a:latin typeface="+mn-ea"/>
+              </a:rPr>
+              <a:t>, </a:t>
+            </a:r>
+            <a:r>
+              <a:rPr lang="ko-KR" altLang="en-US" sz="1600" b="1" u="sng" dirty="0">
+                <a:ln w="3175">
+                  <a:noFill/>
+                </a:ln>
+                <a:latin typeface="+mn-ea"/>
+              </a:rPr>
+              <a:t>메가</a:t>
+            </a:r>
+            <a:r>
+              <a:rPr lang="en-US" altLang="ko-KR" sz="1600" b="1" u="sng" dirty="0">
+                <a:ln w="3175">
+                  <a:noFill/>
+                </a:ln>
+                <a:latin typeface="+mn-ea"/>
+              </a:rPr>
+              <a:t>, </a:t>
+            </a:r>
+            <a:r>
+              <a:rPr lang="ko-KR" altLang="en-US" sz="1600" b="1" u="sng" dirty="0">
+                <a:ln w="3175">
+                  <a:noFill/>
+                </a:ln>
+                <a:latin typeface="+mn-ea"/>
+              </a:rPr>
+              <a:t>기가</a:t>
+            </a:r>
+            <a:r>
+              <a:rPr lang="en-US" altLang="ko-KR" sz="1600" b="1" u="sng" dirty="0">
+                <a:ln w="3175">
+                  <a:noFill/>
+                </a:ln>
+                <a:latin typeface="+mn-ea"/>
+              </a:rPr>
+              <a:t> </a:t>
+            </a:r>
+            <a:r>
+              <a:rPr lang="ko-KR" altLang="en-US" sz="1600" b="1" u="sng" dirty="0">
+                <a:ln w="3175">
+                  <a:noFill/>
+                </a:ln>
+                <a:latin typeface="+mn-ea"/>
+              </a:rPr>
+              <a:t>이런 단위가 </a:t>
+            </a:r>
+            <a:r>
+              <a:rPr lang="ko-KR" altLang="en-US" sz="1600" b="1" u="sng" dirty="0" err="1">
+                <a:ln w="3175">
+                  <a:noFill/>
+                </a:ln>
+                <a:latin typeface="+mn-ea"/>
+              </a:rPr>
+              <a:t>뭘까</a:t>
+            </a:r>
+            <a:r>
+              <a:rPr lang="en-US" altLang="ko-KR" sz="1600" b="1" u="sng" dirty="0">
+                <a:ln w="3175">
+                  <a:noFill/>
+                </a:ln>
+                <a:latin typeface="+mn-ea"/>
+              </a:rPr>
+              <a:t>?</a:t>
+            </a:r>
+          </a:p>
+          <a:p>
             <a:pPr marL="377825" indent="-285750">
               <a:lnSpc>
                 <a:spcPct val="150000"/>
@@ -11519,31 +12230,72 @@
             </a:pPr>
             <a:r>
               <a:rPr lang="ko-KR" altLang="en-US" sz="1600" spc="-50" dirty="0"/>
-              <a:t>우리는 줄</a:t>
-            </a:r>
-            <a:r>
-              <a:rPr lang="en-US" altLang="ko-KR" sz="1600" spc="-50" dirty="0"/>
-              <a:t>(J)</a:t>
-            </a:r>
-            <a:r>
-              <a:rPr lang="ko-KR" altLang="en-US" sz="1600" spc="-50" dirty="0"/>
-              <a:t> 이라는 단위보다 음식 포장지에 적힌 칼로리</a:t>
-            </a:r>
-            <a:r>
-              <a:rPr lang="en-US" altLang="ko-KR" sz="1600" spc="-50" dirty="0"/>
-              <a:t>(</a:t>
-            </a:r>
-            <a:r>
-              <a:rPr lang="en-US" altLang="ko-KR" sz="1600" spc="-50" dirty="0" err="1"/>
-              <a:t>cal</a:t>
-            </a:r>
-            <a:r>
-              <a:rPr lang="en-US" altLang="ko-KR" sz="1600" spc="-50" dirty="0"/>
-              <a:t>)</a:t>
-            </a:r>
-            <a:r>
-              <a:rPr lang="ko-KR" altLang="en-US" sz="1600" spc="-50" dirty="0"/>
-              <a:t> 라고 하는 단위가 더 익숙하다</a:t>
+              <a:t>킬로</a:t>
+            </a:r>
+            <a:r>
+              <a:rPr lang="en-US" altLang="ko-KR" sz="1600" spc="-50" dirty="0"/>
+              <a:t>, </a:t>
+            </a:r>
+            <a:r>
+              <a:rPr lang="ko-KR" altLang="en-US" sz="1600" spc="-50" dirty="0"/>
+              <a:t>메가</a:t>
+            </a:r>
+            <a:r>
+              <a:rPr lang="en-US" altLang="ko-KR" sz="1600" spc="-50" dirty="0"/>
+              <a:t>, </a:t>
+            </a:r>
+            <a:r>
+              <a:rPr lang="ko-KR" altLang="en-US" sz="1600" spc="-50" dirty="0"/>
+              <a:t>기가와 같은 단위를 </a:t>
+            </a:r>
+            <a:r>
+              <a:rPr lang="en-US" altLang="ko-KR" sz="1600" spc="-50" dirty="0"/>
+              <a:t>SI </a:t>
+            </a:r>
+            <a:r>
+              <a:rPr lang="ko-KR" altLang="en-US" sz="1600" spc="-50" dirty="0" err="1"/>
+              <a:t>접두어라고</a:t>
+            </a:r>
+            <a:r>
+              <a:rPr lang="ko-KR" altLang="en-US" sz="1600" spc="-50" dirty="0"/>
+              <a:t> 한다</a:t>
+            </a:r>
+            <a:r>
+              <a:rPr lang="en-US" altLang="ko-KR" sz="1600" spc="-50" dirty="0"/>
+              <a:t>.</a:t>
+            </a:r>
+          </a:p>
+          <a:p>
+            <a:pPr marL="377825" indent="-285750">
+              <a:lnSpc>
+                <a:spcPct val="150000"/>
+              </a:lnSpc>
+              <a:buFont typeface="Arial" panose="020B0604020202020204" pitchFamily="34" charset="0"/>
+              <a:buChar char="•"/>
+            </a:pPr>
+            <a:r>
+              <a:rPr lang="ko-KR" altLang="en-US" sz="1600" spc="-50" dirty="0"/>
+              <a:t>너무 큰 숫자를 표기할 때</a:t>
+            </a:r>
+            <a:r>
+              <a:rPr lang="en-US" altLang="ko-KR" sz="1600" spc="-50" dirty="0"/>
+              <a:t>, 0</a:t>
+            </a:r>
+            <a:r>
+              <a:rPr lang="ko-KR" altLang="en-US" sz="1600" spc="-50" dirty="0"/>
+              <a:t>을 보기 힘들게 많이 표시하지 말고</a:t>
+            </a:r>
+            <a:r>
+              <a:rPr lang="en-US" altLang="ko-KR" sz="1600" spc="-50" dirty="0"/>
+              <a:t>, </a:t>
+            </a:r>
+            <a:r>
+              <a:rPr lang="ko-KR" altLang="en-US" sz="1600" spc="-50" dirty="0" err="1"/>
+              <a:t>접두어를</a:t>
+            </a:r>
+            <a:r>
+              <a:rPr lang="ko-KR" altLang="en-US" sz="1600" spc="-50" dirty="0"/>
+              <a:t> 활용하자는 약속이다</a:t>
             </a:r>
             <a:r>
               <a:rPr lang="en-US" altLang="ko-KR" sz="1600" spc="-50" dirty="0"/>
@@ -11560,7 +12312,7 @@
             </a:pPr>
             <a:r>
               <a:rPr lang="ko-KR" altLang="en-US" sz="1600" spc="-50" dirty="0"/>
-              <a:t>줄과 칼로리</a:t>
+              <a:t>첫번째 파일의 크기는 눈에 쉽게 들어오고</a:t>
             </a:r>
             <a:r>
               <a:rPr lang="en-US" altLang="ko-KR" sz="1600" spc="-50" dirty="0"/>
@@ -11568,130 +12320,20 @@
             </a:r>
             <a:r>
               <a:rPr lang="ko-KR" altLang="en-US" sz="1600" spc="-50" dirty="0"/>
-              <a:t>이 두 단위는 우리가 길이를 </a:t>
-            </a:r>
-            <a:r>
-              <a:rPr lang="en-US" altLang="ko-KR" sz="1600" spc="-50" dirty="0"/>
-              <a:t>cm</a:t>
-            </a:r>
-            <a:r>
-              <a:rPr lang="ko-KR" altLang="en-US" sz="1600" spc="-50" dirty="0"/>
-              <a:t>와 </a:t>
-            </a:r>
-            <a:r>
-              <a:rPr lang="en-US" altLang="ko-KR" sz="1600" spc="-50" dirty="0"/>
-              <a:t>inch, </a:t>
-            </a:r>
-            <a:r>
-              <a:rPr lang="ko-KR" altLang="en-US" sz="1600" spc="-50" dirty="0"/>
-              <a:t>온도를 섭씨와 화씨로 다양하게 표현하는 것처럼</a:t>
-            </a:r>
-            <a:r>
-              <a:rPr lang="en-US" altLang="ko-KR" sz="1600" spc="-50" dirty="0"/>
-              <a:t>, </a:t>
-            </a:r>
-            <a:r>
-              <a:rPr lang="ko-KR" altLang="en-US" sz="1600" spc="-50" dirty="0"/>
-              <a:t>에너지도 서로 다른 단위로 나타낸 것일 뿐이다</a:t>
-            </a:r>
-            <a:r>
-              <a:rPr lang="en-US" altLang="ko-KR" sz="1600" spc="-50" dirty="0"/>
-              <a:t>.</a:t>
-            </a:r>
-          </a:p>
-          <a:p>
-            <a:pPr marL="1292225" lvl="2" indent="-285750">
-              <a:lnSpc>
-                <a:spcPct val="150000"/>
-              </a:lnSpc>
-              <a:buFont typeface="Wingdings" panose="05000000000000000000" pitchFamily="2" charset="2"/>
-              <a:buChar char="Ø"/>
-            </a:pPr>
-            <a:r>
-              <a:rPr lang="en-US" altLang="ko-KR" sz="1600" spc="-50" dirty="0"/>
-              <a:t>1</a:t>
-            </a:r>
-            <a:r>
-              <a:rPr lang="ko-KR" altLang="en-US" sz="1600" spc="-50" dirty="0"/>
-              <a:t>줄 </a:t>
-            </a:r>
-            <a:r>
-              <a:rPr lang="en-US" altLang="ko-KR" sz="1600" spc="-50" dirty="0"/>
-              <a:t>= 0.239</a:t>
-            </a:r>
-            <a:r>
-              <a:rPr lang="ko-KR" altLang="en-US" sz="1600" spc="-50" dirty="0"/>
-              <a:t>칼로리</a:t>
-            </a:r>
-            <a:r>
-              <a:rPr lang="en-US" altLang="ko-KR" sz="1600" spc="-50" dirty="0"/>
-              <a:t>,  </a:t>
-            </a:r>
-            <a:r>
-              <a:rPr lang="ko-KR" altLang="en-US" sz="1600" spc="-50" dirty="0"/>
-              <a:t>참고로 </a:t>
-            </a:r>
-            <a:r>
-              <a:rPr lang="en-US" altLang="ko-KR" sz="1600" spc="-50" dirty="0"/>
-              <a:t>1</a:t>
-            </a:r>
-            <a:r>
-              <a:rPr lang="ko-KR" altLang="en-US" sz="1600" spc="-50" dirty="0"/>
-              <a:t>센티미터</a:t>
-            </a:r>
-            <a:r>
-              <a:rPr lang="en-US" altLang="ko-KR" sz="1600" spc="-50" dirty="0"/>
-              <a:t> =</a:t>
-            </a:r>
-            <a:r>
-              <a:rPr lang="ko-KR" altLang="en-US" sz="1600" spc="-50" dirty="0"/>
-              <a:t> </a:t>
-            </a:r>
-            <a:r>
-              <a:rPr lang="en-US" altLang="ko-KR" sz="1600" spc="-50" dirty="0"/>
-              <a:t>0.39</a:t>
-            </a:r>
-            <a:r>
-              <a:rPr lang="ko-KR" altLang="en-US" sz="1600" spc="-50" dirty="0"/>
-              <a:t>인치</a:t>
-            </a:r>
-            <a:r>
-              <a:rPr lang="en-US" altLang="ko-KR" sz="1600" spc="-50" dirty="0"/>
-              <a:t>, </a:t>
-            </a:r>
-            <a:r>
-              <a:rPr lang="ko-KR" altLang="en-US" sz="1600" spc="-50" dirty="0"/>
-              <a:t>섭씨</a:t>
-            </a:r>
-            <a:r>
-              <a:rPr lang="en-US" altLang="ko-KR" sz="1600" spc="-50" dirty="0"/>
-              <a:t>10</a:t>
-            </a:r>
-            <a:r>
-              <a:rPr lang="ko-KR" altLang="en-US" sz="1600" spc="-50" dirty="0"/>
-              <a:t>도 </a:t>
-            </a:r>
-            <a:r>
-              <a:rPr lang="en-US" altLang="ko-KR" sz="1600" spc="-50" dirty="0"/>
-              <a:t>=</a:t>
-            </a:r>
-            <a:r>
-              <a:rPr lang="ko-KR" altLang="en-US" sz="1600" spc="-50" dirty="0"/>
-              <a:t>화씨 </a:t>
-            </a:r>
-            <a:r>
-              <a:rPr lang="en-US" altLang="ko-KR" sz="1600" spc="-50" dirty="0"/>
-              <a:t>50</a:t>
-            </a:r>
-            <a:r>
-              <a:rPr lang="ko-KR" altLang="en-US" sz="1600" spc="-50" dirty="0"/>
-              <a:t>도와 같다</a:t>
-            </a:r>
-            <a:r>
-              <a:rPr lang="en-US" altLang="ko-KR" sz="1600" spc="-50"/>
-              <a:t>.</a:t>
-            </a:r>
-            <a:endParaRPr lang="en-US" altLang="ko-KR" sz="1600" spc="-50" dirty="0"/>
+              <a:t>읽기도 편하다</a:t>
+            </a:r>
+            <a:r>
+              <a:rPr lang="en-US" altLang="ko-KR" sz="1600" spc="-50" dirty="0"/>
+              <a:t>. (</a:t>
+            </a:r>
+            <a:r>
+              <a:rPr lang="ko-KR" altLang="en-US" sz="1600" spc="-50" dirty="0"/>
+              <a:t>오른쪽 예시</a:t>
+            </a:r>
+            <a:r>
+              <a:rPr lang="en-US" altLang="ko-KR" sz="1600" spc="-50" dirty="0"/>
+              <a:t>)</a:t>
+            </a:r>
           </a:p>
           <a:p>
             <a:pPr marL="835025" lvl="1" indent="-285750">
@@ -11703,7 +12345,15 @@
             </a:pPr>
             <a:r>
               <a:rPr lang="ko-KR" altLang="en-US" sz="1600" spc="-50" dirty="0"/>
-              <a:t>둘 간에는 스케일만 다를 뿐 같은 개념이다</a:t>
+              <a:t>두번째 파일의 크기는 바로 눈에 쉽게 안 들어오고</a:t>
+            </a:r>
+            <a:r>
+              <a:rPr lang="en-US" altLang="ko-KR" sz="1600" spc="-50" dirty="0"/>
+              <a:t>, </a:t>
+            </a:r>
+            <a:r>
+              <a:rPr lang="ko-KR" altLang="en-US" sz="1600" spc="-50" dirty="0"/>
+              <a:t>읽기 불편하다</a:t>
             </a:r>
             <a:r>
               <a:rPr lang="en-US" altLang="ko-KR" sz="1600" spc="-50" dirty="0"/>
@@ -11711,52 +12361,24 @@
             </a:r>
           </a:p>
           <a:p>
-            <a:pPr marL="835025" lvl="1" indent="-285750">
+            <a:pPr marL="377825" indent="-285750">
               <a:lnSpc>
                 <a:spcPct val="150000"/>
               </a:lnSpc>
-              <a:buFont typeface="Wingdings" panose="05000000000000000000" pitchFamily="2" charset="2"/>
-              <a:buChar char="ü"/>
+              <a:buFont typeface="Arial" panose="020B0604020202020204" pitchFamily="34" charset="0"/>
+              <a:buChar char="•"/>
             </a:pPr>
             <a:r>
-              <a:rPr lang="en-US" altLang="ko-KR" sz="1600" spc="-50" dirty="0"/>
-              <a:t>1</a:t>
-            </a:r>
-            <a:r>
-              <a:rPr lang="ko-KR" altLang="en-US" sz="1600" spc="-50" dirty="0"/>
-              <a:t>줄</a:t>
-            </a:r>
-            <a:r>
-              <a:rPr lang="en-US" altLang="ko-KR" sz="1600" spc="-50" dirty="0"/>
-              <a:t>(J, joule)</a:t>
-            </a:r>
-            <a:r>
-              <a:rPr lang="ko-KR" altLang="en-US" sz="1600" spc="-50" dirty="0"/>
-              <a:t>은 약 </a:t>
-            </a:r>
-            <a:r>
-              <a:rPr lang="en-US" altLang="ko-KR" sz="1600" spc="-50" dirty="0"/>
-              <a:t>0.00024 </a:t>
-            </a:r>
-            <a:r>
-              <a:rPr lang="ko-KR" altLang="en-US" sz="1600" spc="-50" dirty="0"/>
-              <a:t>칼로리 </a:t>
-            </a:r>
-            <a:r>
-              <a:rPr lang="en-US" altLang="ko-KR" sz="1600" spc="-50" dirty="0"/>
-              <a:t>(</a:t>
-            </a:r>
-            <a:r>
-              <a:rPr lang="en-US" altLang="ko-KR" sz="1600" spc="-50" dirty="0" err="1"/>
-              <a:t>cal</a:t>
-            </a:r>
-            <a:r>
-              <a:rPr lang="en-US" altLang="ko-KR" sz="1600" spc="-50" dirty="0"/>
-              <a:t>, calorie) </a:t>
-            </a:r>
-            <a:r>
-              <a:rPr lang="ko-KR" altLang="en-US" sz="1600" spc="-50" dirty="0"/>
-              <a:t>이다</a:t>
+              <a:rPr lang="ko-KR" altLang="en-US" sz="1600" spc="-50" dirty="0"/>
+              <a:t>이러한 불편함을 없애고자 </a:t>
+            </a:r>
+            <a:r>
+              <a:rPr lang="en-US" altLang="ko-KR" sz="1600" spc="-50" dirty="0"/>
+              <a:t>1,000</a:t>
+            </a:r>
+            <a:r>
+              <a:rPr lang="ko-KR" altLang="en-US" sz="1600" spc="-50" dirty="0"/>
+              <a:t>배씩 단위를 만들어 냈다</a:t>
             </a:r>
             <a:r>
               <a:rPr lang="en-US" altLang="ko-KR" sz="1600" spc="-50" dirty="0"/>
@@ -11764,109 +12386,44 @@
             </a:r>
           </a:p>
           <a:p>
-            <a:pPr marL="835025" lvl="1" indent="-285750">
+            <a:pPr marL="377825" indent="-285750">
               <a:lnSpc>
                 <a:spcPct val="150000"/>
               </a:lnSpc>
-              <a:buFont typeface="Wingdings" panose="05000000000000000000" pitchFamily="2" charset="2"/>
-              <a:buChar char="ü"/>
+              <a:buFont typeface="Arial" panose="020B0604020202020204" pitchFamily="34" charset="0"/>
+              <a:buChar char="•"/>
             </a:pPr>
-            <a:r>
-              <a:rPr lang="ko-KR" altLang="en-US" sz="1600" spc="-50" dirty="0"/>
-              <a:t>비유하자면</a:t>
-            </a:r>
-            <a:r>
-              <a:rPr lang="en-US" altLang="ko-KR" sz="1600" spc="-50" dirty="0"/>
-              <a:t>, </a:t>
-            </a:r>
-            <a:r>
-              <a:rPr lang="ko-KR" altLang="en-US" sz="1600" spc="-50" dirty="0"/>
-              <a:t>길이를 </a:t>
-            </a:r>
-            <a:r>
-              <a:rPr lang="en-US" altLang="ko-KR" sz="1600" spc="-50" dirty="0"/>
-              <a:t>cm</a:t>
-            </a:r>
-            <a:r>
-              <a:rPr lang="ko-KR" altLang="en-US" sz="1600" spc="-50" dirty="0"/>
-              <a:t>로 재기도하고</a:t>
-            </a:r>
-            <a:r>
-              <a:rPr lang="en-US" altLang="ko-KR" sz="1600" spc="-50" dirty="0"/>
-              <a:t>, inch</a:t>
-            </a:r>
-            <a:r>
-              <a:rPr lang="ko-KR" altLang="en-US" sz="1600" spc="-50" dirty="0"/>
-              <a:t>로 재기도 한다</a:t>
-            </a:r>
-            <a:r>
-              <a:rPr lang="en-US" altLang="ko-KR" sz="1600" spc="-50" dirty="0"/>
-              <a:t>. (1cm</a:t>
-            </a:r>
-            <a:r>
-              <a:rPr lang="ko-KR" altLang="en-US" sz="1600" spc="-50" dirty="0"/>
-              <a:t>는 </a:t>
-            </a:r>
-            <a:r>
-              <a:rPr lang="en-US" altLang="ko-KR" sz="1600" spc="-50" dirty="0"/>
-              <a:t>0.394 inch</a:t>
-            </a:r>
-            <a:r>
-              <a:rPr lang="ko-KR" altLang="en-US" sz="1600" spc="-50" dirty="0"/>
-              <a:t>와 같다</a:t>
-            </a:r>
-            <a:r>
-              <a:rPr lang="en-US" altLang="ko-KR" sz="1600" spc="-50" dirty="0"/>
-              <a:t>.) </a:t>
-            </a:r>
-            <a:r>
-              <a:rPr lang="ko-KR" altLang="en-US" sz="1600" spc="-50" dirty="0"/>
-              <a:t>또 다른 예로는 섭씨와 화씨</a:t>
-            </a:r>
-            <a:r>
-              <a:rPr lang="en-US" altLang="ko-KR" sz="1600" spc="-50" dirty="0"/>
-              <a:t>, km</a:t>
-            </a:r>
-            <a:r>
-              <a:rPr lang="ko-KR" altLang="en-US" sz="1600" spc="-50" dirty="0"/>
-              <a:t>와 </a:t>
-            </a:r>
-            <a:r>
-              <a:rPr lang="en-US" altLang="ko-KR" sz="1600" spc="-50" dirty="0"/>
-              <a:t>mile </a:t>
-            </a:r>
-            <a:r>
-              <a:rPr lang="ko-KR" altLang="en-US" sz="1600" spc="-50" dirty="0"/>
-              <a:t>등이 있다</a:t>
-            </a:r>
-            <a:r>
-              <a:rPr lang="en-US" altLang="ko-KR" sz="1600" spc="-50" dirty="0"/>
-              <a:t>. </a:t>
-            </a:r>
-            <a:r>
-              <a:rPr lang="ko-KR" altLang="en-US" sz="1600" spc="-50" dirty="0"/>
-              <a:t>에너지도 똑같이 </a:t>
-            </a:r>
-            <a:r>
-              <a:rPr lang="en-US" altLang="ko-KR" sz="1600" spc="-50" dirty="0"/>
-              <a:t>MJ</a:t>
-            </a:r>
-            <a:r>
-              <a:rPr lang="ko-KR" altLang="en-US" sz="1600" spc="-50" dirty="0"/>
-              <a:t>로 재기도하고</a:t>
-            </a:r>
-            <a:r>
-              <a:rPr lang="en-US" altLang="ko-KR" sz="1600" spc="-50" dirty="0"/>
-              <a:t>, kcal</a:t>
-            </a:r>
-            <a:r>
-              <a:rPr lang="ko-KR" altLang="en-US" sz="1600" spc="-50" dirty="0"/>
-              <a:t>로 재기도 하는 것이다</a:t>
-            </a:r>
-            <a:r>
-              <a:rPr lang="en-US" altLang="ko-KR" sz="1600" spc="-50" dirty="0"/>
-              <a:t>.</a:t>
-            </a:r>
+            <a:endParaRPr lang="en-US" altLang="ko-KR" sz="1600" spc="-50" dirty="0"/>
+          </a:p>
+          <a:p>
+            <a:pPr marL="377825" indent="-285750">
+              <a:lnSpc>
+                <a:spcPct val="150000"/>
+              </a:lnSpc>
+              <a:buFont typeface="Arial" panose="020B0604020202020204" pitchFamily="34" charset="0"/>
+              <a:buChar char="•"/>
+            </a:pPr>
+            <a:endParaRPr lang="en-US" altLang="ko-KR" sz="1600" spc="-50" dirty="0"/>
+          </a:p>
+          <a:p>
+            <a:pPr marL="377825" indent="-285750">
+              <a:lnSpc>
+                <a:spcPct val="150000"/>
+              </a:lnSpc>
+              <a:buFont typeface="Arial" panose="020B0604020202020204" pitchFamily="34" charset="0"/>
+              <a:buChar char="•"/>
+            </a:pPr>
+            <a:endParaRPr lang="en-US" altLang="ko-KR" sz="1600" spc="-50" dirty="0"/>
+          </a:p>
+          <a:p>
+            <a:pPr marL="377825" indent="-285750">
+              <a:lnSpc>
+                <a:spcPct val="150000"/>
+              </a:lnSpc>
+              <a:buFont typeface="Arial" panose="020B0604020202020204" pitchFamily="34" charset="0"/>
+              <a:buChar char="•"/>
+            </a:pPr>
+            <a:endParaRPr lang="en-US" altLang="ko-KR" sz="1600" spc="-50" dirty="0"/>
           </a:p>
           <a:p>
             <a:pPr marL="835025" lvl="1" indent="-285750">
@@ -11878,12 +12435,2229 @@
             </a:pPr>
             <a:endParaRPr lang="en-US" altLang="ko-KR" sz="1600" spc="-50" dirty="0"/>
           </a:p>
+          <a:p>
+            <a:pPr marL="835025" lvl="1" indent="-285750">
+              <a:lnSpc>
+                <a:spcPct val="150000"/>
+              </a:lnSpc>
+              <a:buFont typeface="Wingdings" panose="05000000000000000000" pitchFamily="2" charset="2"/>
+              <a:buChar char="ü"/>
+            </a:pPr>
+            <a:r>
+              <a:rPr lang="en-US" altLang="ko-KR" sz="1600" spc="-50" dirty="0"/>
+              <a:t>SI </a:t>
+            </a:r>
+            <a:r>
+              <a:rPr lang="ko-KR" altLang="en-US" sz="1600" spc="-50" dirty="0" err="1"/>
+              <a:t>접두어를</a:t>
+            </a:r>
+            <a:r>
+              <a:rPr lang="ko-KR" altLang="en-US" sz="1600" spc="-50" dirty="0"/>
+              <a:t> 활용해서 두번째 파일을 읽어보면 </a:t>
+            </a:r>
+            <a:r>
+              <a:rPr lang="en-US" altLang="ko-KR" sz="1600" spc="-50" dirty="0"/>
+              <a:t>107.9</a:t>
+            </a:r>
+            <a:r>
+              <a:rPr lang="ko-KR" altLang="en-US" sz="1600" spc="-50" dirty="0"/>
+              <a:t>메가바이트 혹은 </a:t>
+            </a:r>
+            <a:r>
+              <a:rPr lang="en-US" altLang="ko-KR" sz="1600" spc="-50" dirty="0"/>
+              <a:t>1.079 </a:t>
+            </a:r>
+            <a:r>
+              <a:rPr lang="ko-KR" altLang="en-US" sz="1600" spc="-50" dirty="0"/>
+              <a:t>기가바이트 라고 읽을 수 있다</a:t>
+            </a:r>
+            <a:r>
+              <a:rPr lang="en-US" altLang="ko-KR" sz="1600" spc="-50" dirty="0"/>
+              <a:t>.</a:t>
+            </a:r>
+          </a:p>
+          <a:p>
+            <a:pPr marL="835025" lvl="1" indent="-285750">
+              <a:lnSpc>
+                <a:spcPct val="150000"/>
+              </a:lnSpc>
+              <a:buFont typeface="Wingdings" panose="05000000000000000000" pitchFamily="2" charset="2"/>
+              <a:buChar char="ü"/>
+            </a:pPr>
+            <a:r>
+              <a:rPr lang="ko-KR" altLang="en-US" sz="1600" spc="-50" dirty="0"/>
+              <a:t>한밭대에서 부산역까지 거리 </a:t>
+            </a:r>
+            <a:r>
+              <a:rPr lang="en-US" altLang="ko-KR" sz="1600" spc="-50" dirty="0"/>
+              <a:t>(</a:t>
+            </a:r>
+            <a:r>
+              <a:rPr lang="ko-KR" altLang="en-US" sz="1600" spc="-50" dirty="0"/>
+              <a:t>고속도로 기준</a:t>
+            </a:r>
+            <a:r>
+              <a:rPr lang="en-US" altLang="ko-KR" sz="1600" spc="-50" dirty="0"/>
+              <a:t>)</a:t>
+            </a:r>
+            <a:r>
+              <a:rPr lang="ko-KR" altLang="en-US" sz="1600" spc="-50" dirty="0"/>
+              <a:t>가 </a:t>
+            </a:r>
+            <a:r>
+              <a:rPr lang="en-US" altLang="ko-KR" sz="1600" spc="-50" dirty="0"/>
+              <a:t>275km </a:t>
+            </a:r>
+            <a:r>
+              <a:rPr lang="ko-KR" altLang="en-US" sz="1600" spc="-50" dirty="0"/>
+              <a:t>였는데</a:t>
+            </a:r>
+            <a:r>
+              <a:rPr lang="en-US" altLang="ko-KR" sz="1600" spc="-50" dirty="0"/>
+              <a:t>, </a:t>
+            </a:r>
+            <a:r>
+              <a:rPr lang="ko-KR" altLang="en-US" sz="1600" spc="-50" dirty="0"/>
+              <a:t>이거를 </a:t>
+            </a:r>
+            <a:r>
+              <a:rPr lang="en-US" altLang="ko-KR" sz="1600" spc="-50" dirty="0"/>
+              <a:t>0.284Mm (</a:t>
+            </a:r>
+            <a:r>
+              <a:rPr lang="ko-KR" altLang="en-US" sz="1600" spc="-50" dirty="0" err="1"/>
+              <a:t>메가미터</a:t>
+            </a:r>
+            <a:r>
+              <a:rPr lang="en-US" altLang="ko-KR" sz="1600" spc="-50" dirty="0"/>
+              <a:t>)</a:t>
+            </a:r>
+            <a:r>
+              <a:rPr lang="ko-KR" altLang="en-US" sz="1600" spc="-50" dirty="0"/>
+              <a:t>로 표현할 수도 있다</a:t>
+            </a:r>
+            <a:r>
+              <a:rPr lang="en-US" altLang="ko-KR" sz="1600" spc="-50" dirty="0"/>
+              <a:t>. </a:t>
+            </a:r>
+          </a:p>
+          <a:p>
+            <a:pPr marL="835025" lvl="1" indent="-285750">
+              <a:lnSpc>
+                <a:spcPct val="150000"/>
+              </a:lnSpc>
+              <a:buFont typeface="Wingdings" panose="05000000000000000000" pitchFamily="2" charset="2"/>
+              <a:buChar char="ü"/>
+            </a:pPr>
+            <a:r>
+              <a:rPr lang="ko-KR" altLang="en-US" sz="1600" spc="-50" dirty="0"/>
+              <a:t>내 몸무게를 </a:t>
+            </a:r>
+            <a:r>
+              <a:rPr lang="en-US" altLang="ko-KR" sz="1600" spc="-50" dirty="0"/>
+              <a:t>70000g </a:t>
+            </a:r>
+            <a:r>
+              <a:rPr lang="ko-KR" altLang="en-US" sz="1600" spc="-50" dirty="0"/>
+              <a:t>이라고 이야기할 수도 있고</a:t>
+            </a:r>
+            <a:r>
+              <a:rPr lang="en-US" altLang="ko-KR" sz="1600" spc="-50" dirty="0"/>
+              <a:t>, 70kg </a:t>
+            </a:r>
+            <a:r>
+              <a:rPr lang="ko-KR" altLang="en-US" sz="1600" spc="-50" dirty="0"/>
+              <a:t>혹은 </a:t>
+            </a:r>
+            <a:r>
+              <a:rPr lang="en-US" altLang="ko-KR" sz="1600" spc="-50" dirty="0"/>
+              <a:t>0.07Mg </a:t>
+            </a:r>
+            <a:r>
+              <a:rPr lang="ko-KR" altLang="en-US" sz="1600" spc="-50" dirty="0"/>
+              <a:t>이라고 표현할 수도 있다</a:t>
+            </a:r>
+            <a:r>
+              <a:rPr lang="en-US" altLang="ko-KR" sz="1600" spc="-50"/>
+              <a:t>.</a:t>
+            </a:r>
+            <a:endParaRPr lang="en-US" altLang="ko-KR" sz="1600" spc="-50" dirty="0"/>
+          </a:p>
+          <a:p>
+            <a:pPr marL="92075">
+              <a:lnSpc>
+                <a:spcPct val="150000"/>
+              </a:lnSpc>
+            </a:pPr>
+            <a:r>
+              <a:rPr lang="en-US" altLang="ko-KR" sz="1600" spc="-50" dirty="0"/>
+              <a:t>※  </a:t>
+            </a:r>
+            <a:r>
+              <a:rPr lang="ko-KR" altLang="en-US" sz="1600" spc="-50" dirty="0"/>
+              <a:t>이런 식으로 읽어도 틀린 말은 아니지만 보통 일상생활에서는 상대방이 알아듣기 쉽게 적절한 단위를 쓰며 생활하자</a:t>
+            </a:r>
+            <a:r>
+              <a:rPr lang="en-US" altLang="ko-KR" sz="1600" spc="-50" dirty="0"/>
+              <a:t>.</a:t>
+            </a:r>
+          </a:p>
         </p:txBody>
       </p:sp>
+      <p:pic>
+        <p:nvPicPr>
+          <p:cNvPr id="14" name="그림 13">
+            <a:extLst>
+              <a:ext uri="{FF2B5EF4-FFF2-40B4-BE49-F238E27FC236}">
+                <a16:creationId xmlns:a16="http://schemas.microsoft.com/office/drawing/2014/main" id="{7039E972-0D3D-2DAA-CAEB-C7C3ABFCC286}"/>
+              </a:ext>
+            </a:extLst>
+          </p:cNvPr>
+          <p:cNvPicPr>
+            <a:picLocks noChangeAspect="1"/>
+          </p:cNvPicPr>
+          <p:nvPr/>
+        </p:nvPicPr>
+        <p:blipFill>
+          <a:blip r:embed="rId2"/>
+          <a:stretch>
+            <a:fillRect/>
+          </a:stretch>
+        </p:blipFill>
+        <p:spPr>
+          <a:xfrm>
+            <a:off x="7563852" y="2368348"/>
+            <a:ext cx="4339358" cy="769513"/>
+          </a:xfrm>
+          <a:prstGeom prst="rect">
+            <a:avLst/>
+          </a:prstGeom>
+          <a:ln>
+            <a:solidFill>
+              <a:schemeClr val="tx1"/>
+            </a:solidFill>
+          </a:ln>
+        </p:spPr>
+      </p:pic>
+      <p:graphicFrame>
+        <p:nvGraphicFramePr>
+          <p:cNvPr id="15" name="표 14">
+            <a:extLst>
+              <a:ext uri="{FF2B5EF4-FFF2-40B4-BE49-F238E27FC236}">
+                <a16:creationId xmlns:a16="http://schemas.microsoft.com/office/drawing/2014/main" id="{B17D570E-DFCE-B125-7566-3F3CB9847C9C}"/>
+              </a:ext>
+            </a:extLst>
+          </p:cNvPr>
+          <p:cNvGraphicFramePr>
+            <a:graphicFrameLocks noGrp="1"/>
+          </p:cNvGraphicFramePr>
+          <p:nvPr/>
+        </p:nvGraphicFramePr>
+        <p:xfrm>
+          <a:off x="917945" y="3330261"/>
+          <a:ext cx="6156757" cy="1485678"/>
+        </p:xfrm>
+        <a:graphic>
+          <a:graphicData uri="http://schemas.openxmlformats.org/drawingml/2006/table">
+            <a:tbl>
+              <a:tblPr firstRow="1" bandRow="1">
+                <a:effectLst>
+                  <a:outerShdw blurRad="50800" dist="38100" dir="2700000" algn="tl" rotWithShape="0">
+                    <a:prstClr val="black">
+                      <a:alpha val="40000"/>
+                    </a:prstClr>
+                  </a:outerShdw>
+                </a:effectLst>
+                <a:tableStyleId>{5C22544A-7EE6-4342-B048-85BDC9FD1C3A}</a:tableStyleId>
+              </a:tblPr>
+              <a:tblGrid>
+                <a:gridCol w="1539189">
+                  <a:extLst>
+                    <a:ext uri="{9D8B030D-6E8A-4147-A177-3AD203B41FA5}">
+                      <a16:colId xmlns:a16="http://schemas.microsoft.com/office/drawing/2014/main" val="2218693278"/>
+                    </a:ext>
+                  </a:extLst>
+                </a:gridCol>
+                <a:gridCol w="1539189">
+                  <a:extLst>
+                    <a:ext uri="{9D8B030D-6E8A-4147-A177-3AD203B41FA5}">
+                      <a16:colId xmlns:a16="http://schemas.microsoft.com/office/drawing/2014/main" val="3036950207"/>
+                    </a:ext>
+                  </a:extLst>
+                </a:gridCol>
+                <a:gridCol w="1539190">
+                  <a:extLst>
+                    <a:ext uri="{9D8B030D-6E8A-4147-A177-3AD203B41FA5}">
+                      <a16:colId xmlns:a16="http://schemas.microsoft.com/office/drawing/2014/main" val="2699398209"/>
+                    </a:ext>
+                  </a:extLst>
+                </a:gridCol>
+                <a:gridCol w="1539189">
+                  <a:extLst>
+                    <a:ext uri="{9D8B030D-6E8A-4147-A177-3AD203B41FA5}">
+                      <a16:colId xmlns:a16="http://schemas.microsoft.com/office/drawing/2014/main" val="65536541"/>
+                    </a:ext>
+                  </a:extLst>
+                </a:gridCol>
+              </a:tblGrid>
+              <a:tr h="158628">
+                <a:tc>
+                  <a:txBody>
+                    <a:bodyPr/>
+                    <a:lstStyle/>
+                    <a:p>
+                      <a:pPr marL="0" marR="0" indent="0" algn="ctr" fontAlgn="base" latinLnBrk="0">
+                        <a:lnSpc>
+                          <a:spcPct val="120000"/>
+                        </a:lnSpc>
+                        <a:spcBef>
+                          <a:spcPts val="0"/>
+                        </a:spcBef>
+                        <a:spcAft>
+                          <a:spcPts val="0"/>
+                        </a:spcAft>
+                      </a:pPr>
+                      <a:r>
+                        <a:rPr lang="ko-KR" altLang="en-US" sz="1300" b="1" kern="0" spc="0" dirty="0">
+                          <a:solidFill>
+                            <a:schemeClr val="tx1"/>
+                          </a:solidFill>
+                          <a:effectLst/>
+                          <a:latin typeface="+mn-ea"/>
+                          <a:ea typeface="+mn-ea"/>
+                          <a:cs typeface="+mn-cs"/>
+                        </a:rPr>
+                        <a:t>이름</a:t>
+                      </a:r>
+                      <a:endParaRPr lang="en-US" altLang="ko-KR" sz="1300" b="1" kern="0" spc="0" dirty="0">
+                        <a:solidFill>
+                          <a:schemeClr val="tx1"/>
+                        </a:solidFill>
+                        <a:effectLst/>
+                        <a:latin typeface="+mn-ea"/>
+                        <a:ea typeface="+mn-ea"/>
+                        <a:cs typeface="+mn-cs"/>
+                      </a:endParaRPr>
+                    </a:p>
+                  </a:txBody>
+                  <a:tcPr marL="60223" marR="60223" marT="16650" marB="16650" anchor="ctr">
+                    <a:lnL w="12700" cap="flat" cmpd="sng" algn="ctr">
+                      <a:solidFill>
+                        <a:schemeClr val="tx1"/>
+                      </a:solidFill>
+                      <a:prstDash val="solid"/>
+                      <a:round/>
+                      <a:headEnd type="none" w="med" len="med"/>
+                      <a:tailEnd type="none" w="med" len="med"/>
+                    </a:lnL>
+                    <a:lnR w="6350" cap="flat" cmpd="sng" algn="ctr">
+                      <a:solidFill>
+                        <a:schemeClr val="tx1"/>
+                      </a:solidFill>
+                      <a:prstDash val="solid"/>
+                      <a:round/>
+                      <a:headEnd type="none" w="med" len="med"/>
+                      <a:tailEnd type="none" w="med" len="med"/>
+                    </a:lnR>
+                    <a:lnT w="12700" cap="flat" cmpd="sng" algn="ctr">
+                      <a:solidFill>
+                        <a:schemeClr val="tx1"/>
+                      </a:solidFill>
+                      <a:prstDash val="solid"/>
+                      <a:round/>
+                      <a:headEnd type="none" w="med" len="med"/>
+                      <a:tailEnd type="none" w="med" len="med"/>
+                    </a:lnT>
+                    <a:lnB w="6350" cap="flat" cmpd="sng" algn="ctr">
+                      <a:solidFill>
+                        <a:schemeClr val="tx1"/>
+                      </a:solidFill>
+                      <a:prstDash val="solid"/>
+                      <a:round/>
+                      <a:headEnd type="none" w="med" len="med"/>
+                      <a:tailEnd type="none" w="med" len="med"/>
+                    </a:lnB>
+                    <a:solidFill>
+                      <a:schemeClr val="tx2">
+                        <a:lumMod val="10000"/>
+                        <a:lumOff val="90000"/>
+                      </a:schemeClr>
+                    </a:solidFill>
+                  </a:tcPr>
+                </a:tc>
+                <a:tc>
+                  <a:txBody>
+                    <a:bodyPr/>
+                    <a:lstStyle/>
+                    <a:p>
+                      <a:pPr algn="ctr" latinLnBrk="1"/>
+                      <a:r>
+                        <a:rPr lang="ko-KR" altLang="en-US" sz="1300" b="1" kern="0" spc="0" dirty="0">
+                          <a:solidFill>
+                            <a:schemeClr val="tx1"/>
+                          </a:solidFill>
+                          <a:effectLst/>
+                          <a:latin typeface="+mn-ea"/>
+                          <a:ea typeface="+mn-ea"/>
+                          <a:cs typeface="+mn-cs"/>
+                        </a:rPr>
+                        <a:t>기호</a:t>
+                      </a:r>
+                      <a:endParaRPr lang="en-US" altLang="ko-KR" sz="1300" b="1" kern="0" spc="0" dirty="0">
+                        <a:solidFill>
+                          <a:schemeClr val="tx1"/>
+                        </a:solidFill>
+                        <a:effectLst/>
+                        <a:latin typeface="+mn-ea"/>
+                        <a:ea typeface="+mn-ea"/>
+                        <a:cs typeface="+mn-cs"/>
+                      </a:endParaRPr>
+                    </a:p>
+                  </a:txBody>
+                  <a:tcPr marL="60223" marR="60223" marT="16650" marB="16650" anchor="ctr">
+                    <a:lnL w="6350" cap="flat" cmpd="sng" algn="ctr">
+                      <a:solidFill>
+                        <a:schemeClr val="tx1"/>
+                      </a:solidFill>
+                      <a:prstDash val="solid"/>
+                      <a:round/>
+                      <a:headEnd type="none" w="med" len="med"/>
+                      <a:tailEnd type="none" w="med" len="med"/>
+                    </a:lnL>
+                    <a:lnR w="6350" cap="flat" cmpd="sng" algn="ctr">
+                      <a:solidFill>
+                        <a:schemeClr val="tx1"/>
+                      </a:solidFill>
+                      <a:prstDash val="solid"/>
+                      <a:round/>
+                      <a:headEnd type="none" w="med" len="med"/>
+                      <a:tailEnd type="none" w="med" len="med"/>
+                    </a:lnR>
+                    <a:lnT w="12700" cap="flat" cmpd="sng" algn="ctr">
+                      <a:solidFill>
+                        <a:schemeClr val="tx1"/>
+                      </a:solidFill>
+                      <a:prstDash val="solid"/>
+                      <a:round/>
+                      <a:headEnd type="none" w="med" len="med"/>
+                      <a:tailEnd type="none" w="med" len="med"/>
+                    </a:lnT>
+                    <a:lnB w="6350" cap="flat" cmpd="sng" algn="ctr">
+                      <a:solidFill>
+                        <a:schemeClr val="tx1"/>
+                      </a:solidFill>
+                      <a:prstDash val="solid"/>
+                      <a:round/>
+                      <a:headEnd type="none" w="med" len="med"/>
+                      <a:tailEnd type="none" w="med" len="med"/>
+                    </a:lnB>
+                    <a:solidFill>
+                      <a:schemeClr val="tx2">
+                        <a:lumMod val="10000"/>
+                        <a:lumOff val="90000"/>
+                      </a:schemeClr>
+                    </a:solidFill>
+                  </a:tcPr>
+                </a:tc>
+                <a:tc>
+                  <a:txBody>
+                    <a:bodyPr/>
+                    <a:lstStyle/>
+                    <a:p>
+                      <a:pPr algn="ctr" latinLnBrk="1"/>
+                      <a:r>
+                        <a:rPr lang="en-US" altLang="ko-KR" sz="1300" b="1" kern="0" spc="0" dirty="0">
+                          <a:solidFill>
+                            <a:schemeClr val="tx1"/>
+                          </a:solidFill>
+                          <a:effectLst/>
+                          <a:latin typeface="+mn-ea"/>
+                          <a:ea typeface="+mn-ea"/>
+                          <a:cs typeface="+mn-cs"/>
+                        </a:rPr>
+                        <a:t>10</a:t>
+                      </a:r>
+                      <a:r>
+                        <a:rPr lang="ko-KR" altLang="en-US" sz="1300" b="1" kern="0" spc="0" dirty="0">
+                          <a:solidFill>
+                            <a:schemeClr val="tx1"/>
+                          </a:solidFill>
+                          <a:effectLst/>
+                          <a:latin typeface="+mn-ea"/>
+                          <a:ea typeface="+mn-ea"/>
+                          <a:cs typeface="+mn-cs"/>
+                        </a:rPr>
+                        <a:t>의 거듭제곱</a:t>
+                      </a:r>
+                      <a:endParaRPr lang="en-US" altLang="ko-KR" sz="1300" b="1" kern="0" spc="0" dirty="0">
+                        <a:solidFill>
+                          <a:schemeClr val="tx1"/>
+                        </a:solidFill>
+                        <a:effectLst/>
+                        <a:latin typeface="+mn-ea"/>
+                        <a:ea typeface="+mn-ea"/>
+                        <a:cs typeface="+mn-cs"/>
+                      </a:endParaRPr>
+                    </a:p>
+                  </a:txBody>
+                  <a:tcPr marL="60223" marR="60223" marT="16650" marB="16650" anchor="ctr">
+                    <a:lnL w="6350" cap="flat" cmpd="sng" algn="ctr">
+                      <a:solidFill>
+                        <a:schemeClr val="tx1"/>
+                      </a:solidFill>
+                      <a:prstDash val="solid"/>
+                      <a:round/>
+                      <a:headEnd type="none" w="med" len="med"/>
+                      <a:tailEnd type="none" w="med" len="med"/>
+                    </a:lnL>
+                    <a:lnR w="6350" cap="flat" cmpd="sng" algn="ctr">
+                      <a:solidFill>
+                        <a:schemeClr val="tx1"/>
+                      </a:solidFill>
+                      <a:prstDash val="solid"/>
+                      <a:round/>
+                      <a:headEnd type="none" w="med" len="med"/>
+                      <a:tailEnd type="none" w="med" len="med"/>
+                    </a:lnR>
+                    <a:lnT w="12700" cap="flat" cmpd="sng" algn="ctr">
+                      <a:solidFill>
+                        <a:schemeClr val="tx1"/>
+                      </a:solidFill>
+                      <a:prstDash val="solid"/>
+                      <a:round/>
+                      <a:headEnd type="none" w="med" len="med"/>
+                      <a:tailEnd type="none" w="med" len="med"/>
+                    </a:lnT>
+                    <a:lnB w="6350" cap="flat" cmpd="sng" algn="ctr">
+                      <a:solidFill>
+                        <a:schemeClr val="tx1"/>
+                      </a:solidFill>
+                      <a:prstDash val="solid"/>
+                      <a:round/>
+                      <a:headEnd type="none" w="med" len="med"/>
+                      <a:tailEnd type="none" w="med" len="med"/>
+                    </a:lnB>
+                    <a:solidFill>
+                      <a:schemeClr val="tx2">
+                        <a:lumMod val="10000"/>
+                        <a:lumOff val="90000"/>
+                      </a:schemeClr>
+                    </a:solidFill>
+                  </a:tcPr>
+                </a:tc>
+                <a:tc>
+                  <a:txBody>
+                    <a:bodyPr/>
+                    <a:lstStyle/>
+                    <a:p>
+                      <a:pPr marL="0" marR="0" lvl="0" indent="0" algn="ctr" defTabSz="914400" rtl="0" eaLnBrk="1" fontAlgn="base" latinLnBrk="0" hangingPunct="1">
+                        <a:lnSpc>
+                          <a:spcPct val="120000"/>
+                        </a:lnSpc>
+                        <a:spcBef>
+                          <a:spcPts val="0"/>
+                        </a:spcBef>
+                        <a:spcAft>
+                          <a:spcPts val="0"/>
+                        </a:spcAft>
+                        <a:buClrTx/>
+                        <a:buSzTx/>
+                        <a:buFontTx/>
+                        <a:buNone/>
+                        <a:tabLst/>
+                        <a:defRPr/>
+                      </a:pPr>
+                      <a:r>
+                        <a:rPr lang="ko-KR" altLang="en-US" sz="1300" b="1" kern="0" spc="0" dirty="0">
+                          <a:solidFill>
+                            <a:schemeClr val="tx1"/>
+                          </a:solidFill>
+                          <a:effectLst/>
+                          <a:latin typeface="+mn-ea"/>
+                          <a:ea typeface="+mn-ea"/>
+                          <a:cs typeface="+mn-cs"/>
+                        </a:rPr>
+                        <a:t>십진법</a:t>
+                      </a:r>
+                      <a:endParaRPr lang="en-US" altLang="ko-KR" sz="1300" b="1" kern="0" spc="0" dirty="0">
+                        <a:solidFill>
+                          <a:schemeClr val="tx1"/>
+                        </a:solidFill>
+                        <a:effectLst/>
+                        <a:latin typeface="+mn-ea"/>
+                        <a:ea typeface="+mn-ea"/>
+                        <a:cs typeface="+mn-cs"/>
+                      </a:endParaRPr>
+                    </a:p>
+                  </a:txBody>
+                  <a:tcPr marL="60223" marR="60223" marT="16650" marB="16650" anchor="ctr">
+                    <a:lnL w="6350" cap="flat" cmpd="sng" algn="ctr">
+                      <a:solidFill>
+                        <a:schemeClr val="tx1"/>
+                      </a:solidFill>
+                      <a:prstDash val="solid"/>
+                      <a:round/>
+                      <a:headEnd type="none" w="med" len="med"/>
+                      <a:tailEnd type="none" w="med" len="med"/>
+                    </a:lnL>
+                    <a:lnR w="6350" cap="flat" cmpd="sng" algn="ctr">
+                      <a:solidFill>
+                        <a:schemeClr val="tx1"/>
+                      </a:solidFill>
+                      <a:prstDash val="solid"/>
+                      <a:round/>
+                      <a:headEnd type="none" w="med" len="med"/>
+                      <a:tailEnd type="none" w="med" len="med"/>
+                    </a:lnR>
+                    <a:lnT w="12700" cap="flat" cmpd="sng" algn="ctr">
+                      <a:solidFill>
+                        <a:schemeClr val="tx1"/>
+                      </a:solidFill>
+                      <a:prstDash val="solid"/>
+                      <a:round/>
+                      <a:headEnd type="none" w="med" len="med"/>
+                      <a:tailEnd type="none" w="med" len="med"/>
+                    </a:lnT>
+                    <a:lnB w="6350" cap="flat" cmpd="sng" algn="ctr">
+                      <a:solidFill>
+                        <a:schemeClr val="tx1"/>
+                      </a:solidFill>
+                      <a:prstDash val="solid"/>
+                      <a:round/>
+                      <a:headEnd type="none" w="med" len="med"/>
+                      <a:tailEnd type="none" w="med" len="med"/>
+                    </a:lnB>
+                    <a:solidFill>
+                      <a:schemeClr val="tx2">
+                        <a:lumMod val="10000"/>
+                        <a:lumOff val="90000"/>
+                      </a:schemeClr>
+                    </a:solidFill>
+                  </a:tcPr>
+                </a:tc>
+                <a:extLst>
+                  <a:ext uri="{0D108BD9-81ED-4DB2-BD59-A6C34878D82A}">
+                    <a16:rowId xmlns:a16="http://schemas.microsoft.com/office/drawing/2014/main" val="1069783466"/>
+                  </a:ext>
+                </a:extLst>
+              </a:tr>
+              <a:tr h="0">
+                <a:tc>
+                  <a:txBody>
+                    <a:bodyPr/>
+                    <a:lstStyle/>
+                    <a:p>
+                      <a:pPr marL="0" marR="0" indent="0" algn="ctr" fontAlgn="base" latinLnBrk="0">
+                        <a:lnSpc>
+                          <a:spcPct val="120000"/>
+                        </a:lnSpc>
+                        <a:spcBef>
+                          <a:spcPts val="0"/>
+                        </a:spcBef>
+                        <a:spcAft>
+                          <a:spcPts val="0"/>
+                        </a:spcAft>
+                      </a:pPr>
+                      <a:r>
+                        <a:rPr lang="ko-KR" altLang="en-US" sz="1300" b="0" kern="0" spc="0" dirty="0">
+                          <a:solidFill>
+                            <a:srgbClr val="000000"/>
+                          </a:solidFill>
+                          <a:effectLst/>
+                          <a:latin typeface="+mn-lt"/>
+                          <a:ea typeface="+mn-ea"/>
+                          <a:cs typeface="+mn-cs"/>
+                        </a:rPr>
+                        <a:t>킬로</a:t>
+                      </a:r>
+                      <a:endParaRPr lang="en-US" sz="1300" b="0" kern="0" spc="0" dirty="0">
+                        <a:solidFill>
+                          <a:srgbClr val="000000"/>
+                        </a:solidFill>
+                        <a:effectLst/>
+                        <a:latin typeface="+mn-lt"/>
+                        <a:ea typeface="+mn-ea"/>
+                        <a:cs typeface="+mn-cs"/>
+                      </a:endParaRPr>
+                    </a:p>
+                  </a:txBody>
+                  <a:tcPr marL="60223" marR="60223" marT="16650" marB="16650" anchor="ctr">
+                    <a:lnL w="12700" cap="flat" cmpd="sng" algn="ctr">
+                      <a:solidFill>
+                        <a:schemeClr val="tx1"/>
+                      </a:solidFill>
+                      <a:prstDash val="solid"/>
+                      <a:round/>
+                      <a:headEnd type="none" w="med" len="med"/>
+                      <a:tailEnd type="none" w="med" len="med"/>
+                    </a:lnL>
+                    <a:lnR w="6350" cap="flat" cmpd="sng" algn="ctr">
+                      <a:solidFill>
+                        <a:schemeClr val="tx1"/>
+                      </a:solidFill>
+                      <a:prstDash val="solid"/>
+                      <a:round/>
+                      <a:headEnd type="none" w="med" len="med"/>
+                      <a:tailEnd type="none" w="med" len="med"/>
+                    </a:lnR>
+                    <a:lnT w="6350" cap="flat" cmpd="sng" algn="ctr">
+                      <a:solidFill>
+                        <a:schemeClr val="tx1"/>
+                      </a:solidFill>
+                      <a:prstDash val="solid"/>
+                      <a:round/>
+                      <a:headEnd type="none" w="med" len="med"/>
+                      <a:tailEnd type="none" w="med" len="med"/>
+                    </a:lnT>
+                    <a:lnB w="6350" cap="flat" cmpd="sng" algn="ctr">
+                      <a:solidFill>
+                        <a:schemeClr val="tx1"/>
+                      </a:solidFill>
+                      <a:prstDash val="solid"/>
+                      <a:round/>
+                      <a:headEnd type="none" w="med" len="med"/>
+                      <a:tailEnd type="none" w="med" len="med"/>
+                    </a:lnB>
+                    <a:solidFill>
+                      <a:schemeClr val="bg1"/>
+                    </a:solidFill>
+                  </a:tcPr>
+                </a:tc>
+                <a:tc>
+                  <a:txBody>
+                    <a:bodyPr/>
+                    <a:lstStyle/>
+                    <a:p>
+                      <a:pPr algn="ctr" latinLnBrk="1"/>
+                      <a:r>
+                        <a:rPr lang="en-US" altLang="ko-KR" sz="1300" b="0" kern="0" spc="0" dirty="0">
+                          <a:solidFill>
+                            <a:srgbClr val="000000"/>
+                          </a:solidFill>
+                          <a:effectLst/>
+                          <a:latin typeface="+mn-lt"/>
+                          <a:ea typeface="+mn-ea"/>
+                          <a:cs typeface="+mn-cs"/>
+                        </a:rPr>
+                        <a:t>k</a:t>
+                      </a:r>
+                    </a:p>
+                  </a:txBody>
+                  <a:tcPr marL="60223" marR="60223" marT="16650" marB="16650" anchor="ctr">
+                    <a:lnL w="6350" cap="flat" cmpd="sng" algn="ctr">
+                      <a:solidFill>
+                        <a:schemeClr val="tx1"/>
+                      </a:solidFill>
+                      <a:prstDash val="solid"/>
+                      <a:round/>
+                      <a:headEnd type="none" w="med" len="med"/>
+                      <a:tailEnd type="none" w="med" len="med"/>
+                    </a:lnL>
+                    <a:lnR w="6350" cap="flat" cmpd="sng" algn="ctr">
+                      <a:solidFill>
+                        <a:schemeClr val="tx1"/>
+                      </a:solidFill>
+                      <a:prstDash val="solid"/>
+                      <a:round/>
+                      <a:headEnd type="none" w="med" len="med"/>
+                      <a:tailEnd type="none" w="med" len="med"/>
+                    </a:lnR>
+                    <a:lnT w="6350" cap="flat" cmpd="sng" algn="ctr">
+                      <a:solidFill>
+                        <a:schemeClr val="tx1"/>
+                      </a:solidFill>
+                      <a:prstDash val="solid"/>
+                      <a:round/>
+                      <a:headEnd type="none" w="med" len="med"/>
+                      <a:tailEnd type="none" w="med" len="med"/>
+                    </a:lnT>
+                    <a:lnB w="6350" cap="flat" cmpd="sng" algn="ctr">
+                      <a:solidFill>
+                        <a:schemeClr val="tx1"/>
+                      </a:solidFill>
+                      <a:prstDash val="solid"/>
+                      <a:round/>
+                      <a:headEnd type="none" w="med" len="med"/>
+                      <a:tailEnd type="none" w="med" len="med"/>
+                    </a:lnB>
+                    <a:solidFill>
+                      <a:schemeClr val="bg1"/>
+                    </a:solidFill>
+                  </a:tcPr>
+                </a:tc>
+                <a:tc>
+                  <a:txBody>
+                    <a:bodyPr/>
+                    <a:lstStyle/>
+                    <a:p>
+                      <a:pPr algn="r" latinLnBrk="1"/>
+                      <a:r>
+                        <a:rPr lang="en-US" altLang="ko-KR" sz="1300" b="0" kern="0" spc="0" dirty="0">
+                          <a:solidFill>
+                            <a:srgbClr val="000000"/>
+                          </a:solidFill>
+                          <a:effectLst/>
+                          <a:latin typeface="+mn-lt"/>
+                          <a:ea typeface="+mn-ea"/>
+                          <a:cs typeface="+mn-cs"/>
+                        </a:rPr>
+                        <a:t>10</a:t>
+                      </a:r>
+                      <a:r>
+                        <a:rPr lang="en-US" altLang="ko-KR" sz="1300" b="0" kern="0" spc="0" baseline="30000" dirty="0">
+                          <a:solidFill>
+                            <a:srgbClr val="000000"/>
+                          </a:solidFill>
+                          <a:effectLst/>
+                          <a:latin typeface="+mn-lt"/>
+                          <a:ea typeface="+mn-ea"/>
+                          <a:cs typeface="+mn-cs"/>
+                        </a:rPr>
+                        <a:t>3</a:t>
+                      </a:r>
+                    </a:p>
+                  </a:txBody>
+                  <a:tcPr marL="60223" marR="60223" marT="16650" marB="16650" anchor="ctr">
+                    <a:lnL w="6350" cap="flat" cmpd="sng" algn="ctr">
+                      <a:solidFill>
+                        <a:schemeClr val="tx1"/>
+                      </a:solidFill>
+                      <a:prstDash val="solid"/>
+                      <a:round/>
+                      <a:headEnd type="none" w="med" len="med"/>
+                      <a:tailEnd type="none" w="med" len="med"/>
+                    </a:lnL>
+                    <a:lnR w="6350" cap="flat" cmpd="sng" algn="ctr">
+                      <a:solidFill>
+                        <a:schemeClr val="tx1"/>
+                      </a:solidFill>
+                      <a:prstDash val="solid"/>
+                      <a:round/>
+                      <a:headEnd type="none" w="med" len="med"/>
+                      <a:tailEnd type="none" w="med" len="med"/>
+                    </a:lnR>
+                    <a:lnT w="6350" cap="flat" cmpd="sng" algn="ctr">
+                      <a:solidFill>
+                        <a:schemeClr val="tx1"/>
+                      </a:solidFill>
+                      <a:prstDash val="solid"/>
+                      <a:round/>
+                      <a:headEnd type="none" w="med" len="med"/>
+                      <a:tailEnd type="none" w="med" len="med"/>
+                    </a:lnT>
+                    <a:lnB w="6350" cap="flat" cmpd="sng" algn="ctr">
+                      <a:solidFill>
+                        <a:schemeClr val="tx1"/>
+                      </a:solidFill>
+                      <a:prstDash val="solid"/>
+                      <a:round/>
+                      <a:headEnd type="none" w="med" len="med"/>
+                      <a:tailEnd type="none" w="med" len="med"/>
+                    </a:lnB>
+                    <a:solidFill>
+                      <a:schemeClr val="bg1"/>
+                    </a:solidFill>
+                  </a:tcPr>
+                </a:tc>
+                <a:tc>
+                  <a:txBody>
+                    <a:bodyPr/>
+                    <a:lstStyle/>
+                    <a:p>
+                      <a:pPr algn="r" latinLnBrk="1"/>
+                      <a:r>
+                        <a:rPr lang="en-US" altLang="ko-KR" sz="1300" b="0" kern="0" spc="0" dirty="0">
+                          <a:solidFill>
+                            <a:srgbClr val="000000"/>
+                          </a:solidFill>
+                          <a:effectLst/>
+                          <a:latin typeface="+mn-lt"/>
+                          <a:ea typeface="+mn-ea"/>
+                          <a:cs typeface="+mn-cs"/>
+                        </a:rPr>
+                        <a:t>1,000</a:t>
+                      </a:r>
+                    </a:p>
+                  </a:txBody>
+                  <a:tcPr marL="60223" marR="60223" marT="16650" marB="16650" anchor="ctr">
+                    <a:lnL w="6350" cap="flat" cmpd="sng" algn="ctr">
+                      <a:solidFill>
+                        <a:schemeClr val="tx1"/>
+                      </a:solidFill>
+                      <a:prstDash val="solid"/>
+                      <a:round/>
+                      <a:headEnd type="none" w="med" len="med"/>
+                      <a:tailEnd type="none" w="med" len="med"/>
+                    </a:lnL>
+                    <a:lnR w="6350" cap="flat" cmpd="sng" algn="ctr">
+                      <a:solidFill>
+                        <a:schemeClr val="tx1"/>
+                      </a:solidFill>
+                      <a:prstDash val="solid"/>
+                      <a:round/>
+                      <a:headEnd type="none" w="med" len="med"/>
+                      <a:tailEnd type="none" w="med" len="med"/>
+                    </a:lnR>
+                    <a:lnT w="6350" cap="flat" cmpd="sng" algn="ctr">
+                      <a:solidFill>
+                        <a:schemeClr val="tx1"/>
+                      </a:solidFill>
+                      <a:prstDash val="solid"/>
+                      <a:round/>
+                      <a:headEnd type="none" w="med" len="med"/>
+                      <a:tailEnd type="none" w="med" len="med"/>
+                    </a:lnT>
+                    <a:lnB w="6350" cap="flat" cmpd="sng" algn="ctr">
+                      <a:solidFill>
+                        <a:schemeClr val="tx1"/>
+                      </a:solidFill>
+                      <a:prstDash val="solid"/>
+                      <a:round/>
+                      <a:headEnd type="none" w="med" len="med"/>
+                      <a:tailEnd type="none" w="med" len="med"/>
+                    </a:lnB>
+                    <a:solidFill>
+                      <a:schemeClr val="bg1"/>
+                    </a:solidFill>
+                  </a:tcPr>
+                </a:tc>
+                <a:extLst>
+                  <a:ext uri="{0D108BD9-81ED-4DB2-BD59-A6C34878D82A}">
+                    <a16:rowId xmlns:a16="http://schemas.microsoft.com/office/drawing/2014/main" val="1723031745"/>
+                  </a:ext>
+                </a:extLst>
+              </a:tr>
+              <a:tr h="0">
+                <a:tc>
+                  <a:txBody>
+                    <a:bodyPr/>
+                    <a:lstStyle/>
+                    <a:p>
+                      <a:pPr marL="0" marR="0" indent="0" algn="ctr" fontAlgn="base" latinLnBrk="0">
+                        <a:lnSpc>
+                          <a:spcPct val="120000"/>
+                        </a:lnSpc>
+                        <a:spcBef>
+                          <a:spcPts val="0"/>
+                        </a:spcBef>
+                        <a:spcAft>
+                          <a:spcPts val="0"/>
+                        </a:spcAft>
+                      </a:pPr>
+                      <a:r>
+                        <a:rPr lang="ko-KR" altLang="en-US" sz="1300" b="0" kern="0" spc="0" dirty="0">
+                          <a:solidFill>
+                            <a:srgbClr val="000000"/>
+                          </a:solidFill>
+                          <a:effectLst/>
+                          <a:latin typeface="+mn-lt"/>
+                          <a:ea typeface="+mn-ea"/>
+                          <a:cs typeface="+mn-cs"/>
+                        </a:rPr>
+                        <a:t>메가</a:t>
+                      </a:r>
+                      <a:endParaRPr lang="en-US" sz="1300" b="0" kern="0" spc="0" dirty="0">
+                        <a:solidFill>
+                          <a:srgbClr val="000000"/>
+                        </a:solidFill>
+                        <a:effectLst/>
+                        <a:latin typeface="+mn-lt"/>
+                        <a:ea typeface="+mn-ea"/>
+                        <a:cs typeface="+mn-cs"/>
+                      </a:endParaRPr>
+                    </a:p>
+                  </a:txBody>
+                  <a:tcPr marL="60223" marR="60223" marT="16650" marB="16650" anchor="ctr">
+                    <a:lnL w="12700" cap="flat" cmpd="sng" algn="ctr">
+                      <a:solidFill>
+                        <a:schemeClr val="tx1"/>
+                      </a:solidFill>
+                      <a:prstDash val="solid"/>
+                      <a:round/>
+                      <a:headEnd type="none" w="med" len="med"/>
+                      <a:tailEnd type="none" w="med" len="med"/>
+                    </a:lnL>
+                    <a:lnR w="6350" cap="flat" cmpd="sng" algn="ctr">
+                      <a:solidFill>
+                        <a:schemeClr val="tx1"/>
+                      </a:solidFill>
+                      <a:prstDash val="solid"/>
+                      <a:round/>
+                      <a:headEnd type="none" w="med" len="med"/>
+                      <a:tailEnd type="none" w="med" len="med"/>
+                    </a:lnR>
+                    <a:lnT w="6350" cap="flat" cmpd="sng" algn="ctr">
+                      <a:solidFill>
+                        <a:schemeClr val="tx1"/>
+                      </a:solidFill>
+                      <a:prstDash val="solid"/>
+                      <a:round/>
+                      <a:headEnd type="none" w="med" len="med"/>
+                      <a:tailEnd type="none" w="med" len="med"/>
+                    </a:lnT>
+                    <a:lnB w="6350" cap="flat" cmpd="sng" algn="ctr">
+                      <a:solidFill>
+                        <a:schemeClr val="tx1"/>
+                      </a:solidFill>
+                      <a:prstDash val="solid"/>
+                      <a:round/>
+                      <a:headEnd type="none" w="med" len="med"/>
+                      <a:tailEnd type="none" w="med" len="med"/>
+                    </a:lnB>
+                    <a:solidFill>
+                      <a:schemeClr val="bg1"/>
+                    </a:solidFill>
+                  </a:tcPr>
+                </a:tc>
+                <a:tc>
+                  <a:txBody>
+                    <a:bodyPr/>
+                    <a:lstStyle/>
+                    <a:p>
+                      <a:pPr algn="ctr" latinLnBrk="1"/>
+                      <a:r>
+                        <a:rPr lang="en-US" altLang="ko-KR" sz="1300" b="0" kern="0" spc="0" dirty="0">
+                          <a:solidFill>
+                            <a:srgbClr val="000000"/>
+                          </a:solidFill>
+                          <a:effectLst/>
+                          <a:latin typeface="+mn-lt"/>
+                          <a:ea typeface="+mn-ea"/>
+                          <a:cs typeface="+mn-cs"/>
+                        </a:rPr>
+                        <a:t>M</a:t>
+                      </a:r>
+                    </a:p>
+                  </a:txBody>
+                  <a:tcPr marL="60223" marR="60223" marT="16650" marB="16650" anchor="ctr">
+                    <a:lnL w="6350" cap="flat" cmpd="sng" algn="ctr">
+                      <a:solidFill>
+                        <a:schemeClr val="tx1"/>
+                      </a:solidFill>
+                      <a:prstDash val="solid"/>
+                      <a:round/>
+                      <a:headEnd type="none" w="med" len="med"/>
+                      <a:tailEnd type="none" w="med" len="med"/>
+                    </a:lnL>
+                    <a:lnR w="6350" cap="flat" cmpd="sng" algn="ctr">
+                      <a:solidFill>
+                        <a:schemeClr val="tx1"/>
+                      </a:solidFill>
+                      <a:prstDash val="solid"/>
+                      <a:round/>
+                      <a:headEnd type="none" w="med" len="med"/>
+                      <a:tailEnd type="none" w="med" len="med"/>
+                    </a:lnR>
+                    <a:lnT w="6350" cap="flat" cmpd="sng" algn="ctr">
+                      <a:solidFill>
+                        <a:schemeClr val="tx1"/>
+                      </a:solidFill>
+                      <a:prstDash val="solid"/>
+                      <a:round/>
+                      <a:headEnd type="none" w="med" len="med"/>
+                      <a:tailEnd type="none" w="med" len="med"/>
+                    </a:lnT>
+                    <a:lnB w="6350" cap="flat" cmpd="sng" algn="ctr">
+                      <a:solidFill>
+                        <a:schemeClr val="tx1"/>
+                      </a:solidFill>
+                      <a:prstDash val="solid"/>
+                      <a:round/>
+                      <a:headEnd type="none" w="med" len="med"/>
+                      <a:tailEnd type="none" w="med" len="med"/>
+                    </a:lnB>
+                    <a:solidFill>
+                      <a:schemeClr val="bg1"/>
+                    </a:solidFill>
+                  </a:tcPr>
+                </a:tc>
+                <a:tc>
+                  <a:txBody>
+                    <a:bodyPr/>
+                    <a:lstStyle/>
+                    <a:p>
+                      <a:pPr algn="r" latinLnBrk="1"/>
+                      <a:r>
+                        <a:rPr lang="en-US" altLang="ko-KR" sz="1300" b="0" kern="0" spc="0" dirty="0">
+                          <a:solidFill>
+                            <a:srgbClr val="000000"/>
+                          </a:solidFill>
+                          <a:effectLst/>
+                          <a:latin typeface="+mn-lt"/>
+                          <a:ea typeface="+mn-ea"/>
+                          <a:cs typeface="+mn-cs"/>
+                        </a:rPr>
+                        <a:t>10</a:t>
+                      </a:r>
+                      <a:r>
+                        <a:rPr lang="en-US" altLang="ko-KR" sz="1300" b="0" kern="0" spc="0" baseline="30000" dirty="0">
+                          <a:solidFill>
+                            <a:srgbClr val="000000"/>
+                          </a:solidFill>
+                          <a:effectLst/>
+                          <a:latin typeface="+mn-lt"/>
+                          <a:ea typeface="+mn-ea"/>
+                          <a:cs typeface="+mn-cs"/>
+                        </a:rPr>
+                        <a:t>6</a:t>
+                      </a:r>
+                    </a:p>
+                  </a:txBody>
+                  <a:tcPr marL="60223" marR="60223" marT="16650" marB="16650" anchor="ctr">
+                    <a:lnL w="6350" cap="flat" cmpd="sng" algn="ctr">
+                      <a:solidFill>
+                        <a:schemeClr val="tx1"/>
+                      </a:solidFill>
+                      <a:prstDash val="solid"/>
+                      <a:round/>
+                      <a:headEnd type="none" w="med" len="med"/>
+                      <a:tailEnd type="none" w="med" len="med"/>
+                    </a:lnL>
+                    <a:lnR w="6350" cap="flat" cmpd="sng" algn="ctr">
+                      <a:solidFill>
+                        <a:schemeClr val="tx1"/>
+                      </a:solidFill>
+                      <a:prstDash val="solid"/>
+                      <a:round/>
+                      <a:headEnd type="none" w="med" len="med"/>
+                      <a:tailEnd type="none" w="med" len="med"/>
+                    </a:lnR>
+                    <a:lnT w="6350" cap="flat" cmpd="sng" algn="ctr">
+                      <a:solidFill>
+                        <a:schemeClr val="tx1"/>
+                      </a:solidFill>
+                      <a:prstDash val="solid"/>
+                      <a:round/>
+                      <a:headEnd type="none" w="med" len="med"/>
+                      <a:tailEnd type="none" w="med" len="med"/>
+                    </a:lnT>
+                    <a:lnB w="6350" cap="flat" cmpd="sng" algn="ctr">
+                      <a:solidFill>
+                        <a:schemeClr val="tx1"/>
+                      </a:solidFill>
+                      <a:prstDash val="solid"/>
+                      <a:round/>
+                      <a:headEnd type="none" w="med" len="med"/>
+                      <a:tailEnd type="none" w="med" len="med"/>
+                    </a:lnB>
+                    <a:solidFill>
+                      <a:schemeClr val="bg1"/>
+                    </a:solidFill>
+                  </a:tcPr>
+                </a:tc>
+                <a:tc>
+                  <a:txBody>
+                    <a:bodyPr/>
+                    <a:lstStyle/>
+                    <a:p>
+                      <a:pPr algn="r" latinLnBrk="1"/>
+                      <a:r>
+                        <a:rPr lang="en-US" altLang="ko-KR" sz="1300" b="0" kern="0" spc="0" dirty="0">
+                          <a:solidFill>
+                            <a:srgbClr val="000000"/>
+                          </a:solidFill>
+                          <a:effectLst/>
+                          <a:latin typeface="+mn-lt"/>
+                          <a:ea typeface="+mn-ea"/>
+                          <a:cs typeface="+mn-cs"/>
+                        </a:rPr>
+                        <a:t>1,000,000</a:t>
+                      </a:r>
+                    </a:p>
+                  </a:txBody>
+                  <a:tcPr marL="60223" marR="60223" marT="16650" marB="16650" anchor="ctr">
+                    <a:lnL w="6350" cap="flat" cmpd="sng" algn="ctr">
+                      <a:solidFill>
+                        <a:schemeClr val="tx1"/>
+                      </a:solidFill>
+                      <a:prstDash val="solid"/>
+                      <a:round/>
+                      <a:headEnd type="none" w="med" len="med"/>
+                      <a:tailEnd type="none" w="med" len="med"/>
+                    </a:lnL>
+                    <a:lnR w="6350" cap="flat" cmpd="sng" algn="ctr">
+                      <a:solidFill>
+                        <a:schemeClr val="tx1"/>
+                      </a:solidFill>
+                      <a:prstDash val="solid"/>
+                      <a:round/>
+                      <a:headEnd type="none" w="med" len="med"/>
+                      <a:tailEnd type="none" w="med" len="med"/>
+                    </a:lnR>
+                    <a:lnT w="6350" cap="flat" cmpd="sng" algn="ctr">
+                      <a:solidFill>
+                        <a:schemeClr val="tx1"/>
+                      </a:solidFill>
+                      <a:prstDash val="solid"/>
+                      <a:round/>
+                      <a:headEnd type="none" w="med" len="med"/>
+                      <a:tailEnd type="none" w="med" len="med"/>
+                    </a:lnT>
+                    <a:lnB w="6350" cap="flat" cmpd="sng" algn="ctr">
+                      <a:solidFill>
+                        <a:schemeClr val="tx1"/>
+                      </a:solidFill>
+                      <a:prstDash val="solid"/>
+                      <a:round/>
+                      <a:headEnd type="none" w="med" len="med"/>
+                      <a:tailEnd type="none" w="med" len="med"/>
+                    </a:lnB>
+                    <a:solidFill>
+                      <a:schemeClr val="bg1"/>
+                    </a:solidFill>
+                  </a:tcPr>
+                </a:tc>
+                <a:extLst>
+                  <a:ext uri="{0D108BD9-81ED-4DB2-BD59-A6C34878D82A}">
+                    <a16:rowId xmlns:a16="http://schemas.microsoft.com/office/drawing/2014/main" val="1727352267"/>
+                  </a:ext>
+                </a:extLst>
+              </a:tr>
+              <a:tr h="0">
+                <a:tc>
+                  <a:txBody>
+                    <a:bodyPr/>
+                    <a:lstStyle/>
+                    <a:p>
+                      <a:pPr marL="0" marR="0" indent="0" algn="ctr" fontAlgn="base" latinLnBrk="0">
+                        <a:lnSpc>
+                          <a:spcPct val="120000"/>
+                        </a:lnSpc>
+                        <a:spcBef>
+                          <a:spcPts val="0"/>
+                        </a:spcBef>
+                        <a:spcAft>
+                          <a:spcPts val="0"/>
+                        </a:spcAft>
+                      </a:pPr>
+                      <a:r>
+                        <a:rPr lang="ko-KR" altLang="en-US" sz="1300" b="0" kern="0" spc="0" dirty="0">
+                          <a:solidFill>
+                            <a:srgbClr val="000000"/>
+                          </a:solidFill>
+                          <a:effectLst/>
+                          <a:latin typeface="+mn-lt"/>
+                          <a:ea typeface="+mn-ea"/>
+                          <a:cs typeface="+mn-cs"/>
+                        </a:rPr>
+                        <a:t>기가</a:t>
+                      </a:r>
+                      <a:endParaRPr lang="en-US" sz="1300" b="0" kern="0" spc="0" dirty="0">
+                        <a:solidFill>
+                          <a:srgbClr val="000000"/>
+                        </a:solidFill>
+                        <a:effectLst/>
+                        <a:latin typeface="+mn-lt"/>
+                        <a:ea typeface="+mn-ea"/>
+                        <a:cs typeface="+mn-cs"/>
+                      </a:endParaRPr>
+                    </a:p>
+                  </a:txBody>
+                  <a:tcPr marL="60223" marR="60223" marT="16650" marB="16650" anchor="ctr">
+                    <a:lnL w="12700" cap="flat" cmpd="sng" algn="ctr">
+                      <a:solidFill>
+                        <a:schemeClr val="tx1"/>
+                      </a:solidFill>
+                      <a:prstDash val="solid"/>
+                      <a:round/>
+                      <a:headEnd type="none" w="med" len="med"/>
+                      <a:tailEnd type="none" w="med" len="med"/>
+                    </a:lnL>
+                    <a:lnR w="6350" cap="flat" cmpd="sng" algn="ctr">
+                      <a:solidFill>
+                        <a:schemeClr val="tx1"/>
+                      </a:solidFill>
+                      <a:prstDash val="solid"/>
+                      <a:round/>
+                      <a:headEnd type="none" w="med" len="med"/>
+                      <a:tailEnd type="none" w="med" len="med"/>
+                    </a:lnR>
+                    <a:lnT w="6350" cap="flat" cmpd="sng" algn="ctr">
+                      <a:solidFill>
+                        <a:schemeClr val="tx1"/>
+                      </a:solidFill>
+                      <a:prstDash val="solid"/>
+                      <a:round/>
+                      <a:headEnd type="none" w="med" len="med"/>
+                      <a:tailEnd type="none" w="med" len="med"/>
+                    </a:lnT>
+                    <a:lnB w="6350" cap="flat" cmpd="sng" algn="ctr">
+                      <a:solidFill>
+                        <a:schemeClr val="tx1"/>
+                      </a:solidFill>
+                      <a:prstDash val="solid"/>
+                      <a:round/>
+                      <a:headEnd type="none" w="med" len="med"/>
+                      <a:tailEnd type="none" w="med" len="med"/>
+                    </a:lnB>
+                    <a:solidFill>
+                      <a:schemeClr val="bg1"/>
+                    </a:solidFill>
+                  </a:tcPr>
+                </a:tc>
+                <a:tc>
+                  <a:txBody>
+                    <a:bodyPr/>
+                    <a:lstStyle/>
+                    <a:p>
+                      <a:pPr algn="ctr" latinLnBrk="1"/>
+                      <a:r>
+                        <a:rPr lang="en-US" altLang="ko-KR" sz="1300" b="0" kern="0" spc="0" dirty="0">
+                          <a:solidFill>
+                            <a:srgbClr val="000000"/>
+                          </a:solidFill>
+                          <a:effectLst/>
+                          <a:latin typeface="+mn-lt"/>
+                          <a:ea typeface="+mn-ea"/>
+                          <a:cs typeface="+mn-cs"/>
+                        </a:rPr>
+                        <a:t>G</a:t>
+                      </a:r>
+                    </a:p>
+                  </a:txBody>
+                  <a:tcPr marL="60223" marR="60223" marT="16650" marB="16650" anchor="ctr">
+                    <a:lnL w="6350" cap="flat" cmpd="sng" algn="ctr">
+                      <a:solidFill>
+                        <a:schemeClr val="tx1"/>
+                      </a:solidFill>
+                      <a:prstDash val="solid"/>
+                      <a:round/>
+                      <a:headEnd type="none" w="med" len="med"/>
+                      <a:tailEnd type="none" w="med" len="med"/>
+                    </a:lnL>
+                    <a:lnR w="6350" cap="flat" cmpd="sng" algn="ctr">
+                      <a:solidFill>
+                        <a:schemeClr val="tx1"/>
+                      </a:solidFill>
+                      <a:prstDash val="solid"/>
+                      <a:round/>
+                      <a:headEnd type="none" w="med" len="med"/>
+                      <a:tailEnd type="none" w="med" len="med"/>
+                    </a:lnR>
+                    <a:lnT w="6350" cap="flat" cmpd="sng" algn="ctr">
+                      <a:solidFill>
+                        <a:schemeClr val="tx1"/>
+                      </a:solidFill>
+                      <a:prstDash val="solid"/>
+                      <a:round/>
+                      <a:headEnd type="none" w="med" len="med"/>
+                      <a:tailEnd type="none" w="med" len="med"/>
+                    </a:lnT>
+                    <a:lnB w="6350" cap="flat" cmpd="sng" algn="ctr">
+                      <a:solidFill>
+                        <a:schemeClr val="tx1"/>
+                      </a:solidFill>
+                      <a:prstDash val="solid"/>
+                      <a:round/>
+                      <a:headEnd type="none" w="med" len="med"/>
+                      <a:tailEnd type="none" w="med" len="med"/>
+                    </a:lnB>
+                    <a:solidFill>
+                      <a:schemeClr val="bg1"/>
+                    </a:solidFill>
+                  </a:tcPr>
+                </a:tc>
+                <a:tc>
+                  <a:txBody>
+                    <a:bodyPr/>
+                    <a:lstStyle/>
+                    <a:p>
+                      <a:pPr algn="r" latinLnBrk="1"/>
+                      <a:r>
+                        <a:rPr lang="en-US" altLang="ko-KR" sz="1300" b="0" kern="0" spc="0" dirty="0">
+                          <a:solidFill>
+                            <a:srgbClr val="000000"/>
+                          </a:solidFill>
+                          <a:effectLst/>
+                          <a:latin typeface="+mn-lt"/>
+                          <a:ea typeface="+mn-ea"/>
+                          <a:cs typeface="+mn-cs"/>
+                        </a:rPr>
+                        <a:t>10</a:t>
+                      </a:r>
+                      <a:r>
+                        <a:rPr lang="en-US" altLang="ko-KR" sz="1300" b="0" kern="0" spc="0" baseline="30000" dirty="0">
+                          <a:solidFill>
+                            <a:srgbClr val="000000"/>
+                          </a:solidFill>
+                          <a:effectLst/>
+                          <a:latin typeface="+mn-lt"/>
+                          <a:ea typeface="+mn-ea"/>
+                          <a:cs typeface="+mn-cs"/>
+                        </a:rPr>
+                        <a:t>9</a:t>
+                      </a:r>
+                    </a:p>
+                  </a:txBody>
+                  <a:tcPr marL="60223" marR="60223" marT="16650" marB="16650" anchor="ctr">
+                    <a:lnL w="6350" cap="flat" cmpd="sng" algn="ctr">
+                      <a:solidFill>
+                        <a:schemeClr val="tx1"/>
+                      </a:solidFill>
+                      <a:prstDash val="solid"/>
+                      <a:round/>
+                      <a:headEnd type="none" w="med" len="med"/>
+                      <a:tailEnd type="none" w="med" len="med"/>
+                    </a:lnL>
+                    <a:lnR w="6350" cap="flat" cmpd="sng" algn="ctr">
+                      <a:solidFill>
+                        <a:schemeClr val="tx1"/>
+                      </a:solidFill>
+                      <a:prstDash val="solid"/>
+                      <a:round/>
+                      <a:headEnd type="none" w="med" len="med"/>
+                      <a:tailEnd type="none" w="med" len="med"/>
+                    </a:lnR>
+                    <a:lnT w="6350" cap="flat" cmpd="sng" algn="ctr">
+                      <a:solidFill>
+                        <a:schemeClr val="tx1"/>
+                      </a:solidFill>
+                      <a:prstDash val="solid"/>
+                      <a:round/>
+                      <a:headEnd type="none" w="med" len="med"/>
+                      <a:tailEnd type="none" w="med" len="med"/>
+                    </a:lnT>
+                    <a:lnB w="6350" cap="flat" cmpd="sng" algn="ctr">
+                      <a:solidFill>
+                        <a:schemeClr val="tx1"/>
+                      </a:solidFill>
+                      <a:prstDash val="solid"/>
+                      <a:round/>
+                      <a:headEnd type="none" w="med" len="med"/>
+                      <a:tailEnd type="none" w="med" len="med"/>
+                    </a:lnB>
+                    <a:solidFill>
+                      <a:schemeClr val="bg1"/>
+                    </a:solidFill>
+                  </a:tcPr>
+                </a:tc>
+                <a:tc>
+                  <a:txBody>
+                    <a:bodyPr/>
+                    <a:lstStyle/>
+                    <a:p>
+                      <a:pPr algn="r" latinLnBrk="1"/>
+                      <a:r>
+                        <a:rPr lang="en-US" altLang="ko-KR" sz="1300" b="0" kern="0" spc="0" dirty="0">
+                          <a:solidFill>
+                            <a:srgbClr val="000000"/>
+                          </a:solidFill>
+                          <a:effectLst/>
+                          <a:latin typeface="+mn-lt"/>
+                          <a:ea typeface="+mn-ea"/>
+                          <a:cs typeface="+mn-cs"/>
+                        </a:rPr>
+                        <a:t>1,000,000,000</a:t>
+                      </a:r>
+                    </a:p>
+                  </a:txBody>
+                  <a:tcPr marL="60223" marR="60223" marT="16650" marB="16650" anchor="ctr">
+                    <a:lnL w="6350" cap="flat" cmpd="sng" algn="ctr">
+                      <a:solidFill>
+                        <a:schemeClr val="tx1"/>
+                      </a:solidFill>
+                      <a:prstDash val="solid"/>
+                      <a:round/>
+                      <a:headEnd type="none" w="med" len="med"/>
+                      <a:tailEnd type="none" w="med" len="med"/>
+                    </a:lnL>
+                    <a:lnR w="6350" cap="flat" cmpd="sng" algn="ctr">
+                      <a:solidFill>
+                        <a:schemeClr val="tx1"/>
+                      </a:solidFill>
+                      <a:prstDash val="solid"/>
+                      <a:round/>
+                      <a:headEnd type="none" w="med" len="med"/>
+                      <a:tailEnd type="none" w="med" len="med"/>
+                    </a:lnR>
+                    <a:lnT w="6350" cap="flat" cmpd="sng" algn="ctr">
+                      <a:solidFill>
+                        <a:schemeClr val="tx1"/>
+                      </a:solidFill>
+                      <a:prstDash val="solid"/>
+                      <a:round/>
+                      <a:headEnd type="none" w="med" len="med"/>
+                      <a:tailEnd type="none" w="med" len="med"/>
+                    </a:lnT>
+                    <a:lnB w="6350" cap="flat" cmpd="sng" algn="ctr">
+                      <a:solidFill>
+                        <a:schemeClr val="tx1"/>
+                      </a:solidFill>
+                      <a:prstDash val="solid"/>
+                      <a:round/>
+                      <a:headEnd type="none" w="med" len="med"/>
+                      <a:tailEnd type="none" w="med" len="med"/>
+                    </a:lnB>
+                    <a:solidFill>
+                      <a:schemeClr val="bg1"/>
+                    </a:solidFill>
+                  </a:tcPr>
+                </a:tc>
+                <a:extLst>
+                  <a:ext uri="{0D108BD9-81ED-4DB2-BD59-A6C34878D82A}">
+                    <a16:rowId xmlns:a16="http://schemas.microsoft.com/office/drawing/2014/main" val="4115595759"/>
+                  </a:ext>
+                </a:extLst>
+              </a:tr>
+              <a:tr h="0">
+                <a:tc>
+                  <a:txBody>
+                    <a:bodyPr/>
+                    <a:lstStyle/>
+                    <a:p>
+                      <a:pPr marL="0" marR="0" indent="0" algn="ctr" fontAlgn="base" latinLnBrk="0">
+                        <a:lnSpc>
+                          <a:spcPct val="120000"/>
+                        </a:lnSpc>
+                        <a:spcBef>
+                          <a:spcPts val="0"/>
+                        </a:spcBef>
+                        <a:spcAft>
+                          <a:spcPts val="0"/>
+                        </a:spcAft>
+                      </a:pPr>
+                      <a:r>
+                        <a:rPr lang="ko-KR" altLang="en-US" sz="1300" b="0" kern="0" spc="0" dirty="0">
+                          <a:solidFill>
+                            <a:srgbClr val="000000"/>
+                          </a:solidFill>
+                          <a:effectLst/>
+                          <a:latin typeface="+mn-lt"/>
+                          <a:ea typeface="+mn-ea"/>
+                          <a:cs typeface="+mn-cs"/>
+                        </a:rPr>
+                        <a:t>테라</a:t>
+                      </a:r>
+                      <a:endParaRPr lang="en-US" sz="1300" b="0" kern="0" spc="0" dirty="0">
+                        <a:solidFill>
+                          <a:srgbClr val="000000"/>
+                        </a:solidFill>
+                        <a:effectLst/>
+                        <a:latin typeface="+mn-lt"/>
+                        <a:ea typeface="+mn-ea"/>
+                        <a:cs typeface="+mn-cs"/>
+                      </a:endParaRPr>
+                    </a:p>
+                  </a:txBody>
+                  <a:tcPr marL="60223" marR="60223" marT="16650" marB="16650" anchor="ctr">
+                    <a:lnL w="12700" cap="flat" cmpd="sng" algn="ctr">
+                      <a:solidFill>
+                        <a:schemeClr val="tx1"/>
+                      </a:solidFill>
+                      <a:prstDash val="solid"/>
+                      <a:round/>
+                      <a:headEnd type="none" w="med" len="med"/>
+                      <a:tailEnd type="none" w="med" len="med"/>
+                    </a:lnL>
+                    <a:lnR w="6350" cap="flat" cmpd="sng" algn="ctr">
+                      <a:solidFill>
+                        <a:schemeClr val="tx1"/>
+                      </a:solidFill>
+                      <a:prstDash val="solid"/>
+                      <a:round/>
+                      <a:headEnd type="none" w="med" len="med"/>
+                      <a:tailEnd type="none" w="med" len="med"/>
+                    </a:lnR>
+                    <a:lnT w="6350" cap="flat" cmpd="sng" algn="ctr">
+                      <a:solidFill>
+                        <a:schemeClr val="tx1"/>
+                      </a:solidFill>
+                      <a:prstDash val="solid"/>
+                      <a:round/>
+                      <a:headEnd type="none" w="med" len="med"/>
+                      <a:tailEnd type="none" w="med" len="med"/>
+                    </a:lnT>
+                    <a:lnB w="6350" cap="flat" cmpd="sng" algn="ctr">
+                      <a:solidFill>
+                        <a:schemeClr val="tx1"/>
+                      </a:solidFill>
+                      <a:prstDash val="solid"/>
+                      <a:round/>
+                      <a:headEnd type="none" w="med" len="med"/>
+                      <a:tailEnd type="none" w="med" len="med"/>
+                    </a:lnB>
+                    <a:solidFill>
+                      <a:schemeClr val="bg1"/>
+                    </a:solidFill>
+                  </a:tcPr>
+                </a:tc>
+                <a:tc>
+                  <a:txBody>
+                    <a:bodyPr/>
+                    <a:lstStyle/>
+                    <a:p>
+                      <a:pPr algn="ctr" latinLnBrk="1"/>
+                      <a:r>
+                        <a:rPr lang="en-US" altLang="ko-KR" sz="1300" b="0" kern="0" spc="0" dirty="0">
+                          <a:solidFill>
+                            <a:srgbClr val="000000"/>
+                          </a:solidFill>
+                          <a:effectLst/>
+                          <a:latin typeface="+mn-lt"/>
+                          <a:ea typeface="+mn-ea"/>
+                          <a:cs typeface="+mn-cs"/>
+                        </a:rPr>
+                        <a:t>T</a:t>
+                      </a:r>
+                    </a:p>
+                  </a:txBody>
+                  <a:tcPr marL="60223" marR="60223" marT="16650" marB="16650" anchor="ctr">
+                    <a:lnL w="6350" cap="flat" cmpd="sng" algn="ctr">
+                      <a:solidFill>
+                        <a:schemeClr val="tx1"/>
+                      </a:solidFill>
+                      <a:prstDash val="solid"/>
+                      <a:round/>
+                      <a:headEnd type="none" w="med" len="med"/>
+                      <a:tailEnd type="none" w="med" len="med"/>
+                    </a:lnL>
+                    <a:lnR w="6350" cap="flat" cmpd="sng" algn="ctr">
+                      <a:solidFill>
+                        <a:schemeClr val="tx1"/>
+                      </a:solidFill>
+                      <a:prstDash val="solid"/>
+                      <a:round/>
+                      <a:headEnd type="none" w="med" len="med"/>
+                      <a:tailEnd type="none" w="med" len="med"/>
+                    </a:lnR>
+                    <a:lnT w="6350" cap="flat" cmpd="sng" algn="ctr">
+                      <a:solidFill>
+                        <a:schemeClr val="tx1"/>
+                      </a:solidFill>
+                      <a:prstDash val="solid"/>
+                      <a:round/>
+                      <a:headEnd type="none" w="med" len="med"/>
+                      <a:tailEnd type="none" w="med" len="med"/>
+                    </a:lnT>
+                    <a:lnB w="6350" cap="flat" cmpd="sng" algn="ctr">
+                      <a:solidFill>
+                        <a:schemeClr val="tx1"/>
+                      </a:solidFill>
+                      <a:prstDash val="solid"/>
+                      <a:round/>
+                      <a:headEnd type="none" w="med" len="med"/>
+                      <a:tailEnd type="none" w="med" len="med"/>
+                    </a:lnB>
+                    <a:solidFill>
+                      <a:schemeClr val="bg1"/>
+                    </a:solidFill>
+                  </a:tcPr>
+                </a:tc>
+                <a:tc>
+                  <a:txBody>
+                    <a:bodyPr/>
+                    <a:lstStyle/>
+                    <a:p>
+                      <a:pPr marL="0" marR="0" lvl="0" indent="0" algn="r" defTabSz="914400" rtl="0" eaLnBrk="1" fontAlgn="auto" latinLnBrk="1" hangingPunct="1">
+                        <a:lnSpc>
+                          <a:spcPct val="100000"/>
+                        </a:lnSpc>
+                        <a:spcBef>
+                          <a:spcPts val="0"/>
+                        </a:spcBef>
+                        <a:spcAft>
+                          <a:spcPts val="0"/>
+                        </a:spcAft>
+                        <a:buClrTx/>
+                        <a:buSzTx/>
+                        <a:buFontTx/>
+                        <a:buNone/>
+                        <a:tabLst/>
+                        <a:defRPr/>
+                      </a:pPr>
+                      <a:r>
+                        <a:rPr lang="en-US" altLang="ko-KR" sz="1300" b="0" kern="0" spc="0" dirty="0">
+                          <a:solidFill>
+                            <a:srgbClr val="000000"/>
+                          </a:solidFill>
+                          <a:effectLst/>
+                          <a:latin typeface="+mn-lt"/>
+                          <a:ea typeface="+mn-ea"/>
+                          <a:cs typeface="+mn-cs"/>
+                        </a:rPr>
+                        <a:t>10</a:t>
+                      </a:r>
+                      <a:r>
+                        <a:rPr lang="en-US" altLang="ko-KR" sz="1300" b="0" kern="0" spc="0" baseline="30000" dirty="0">
+                          <a:solidFill>
+                            <a:srgbClr val="000000"/>
+                          </a:solidFill>
+                          <a:effectLst/>
+                          <a:latin typeface="+mn-lt"/>
+                          <a:ea typeface="+mn-ea"/>
+                          <a:cs typeface="+mn-cs"/>
+                        </a:rPr>
+                        <a:t>12</a:t>
+                      </a:r>
+                    </a:p>
+                  </a:txBody>
+                  <a:tcPr marL="60223" marR="60223" marT="16650" marB="16650" anchor="ctr">
+                    <a:lnL w="6350" cap="flat" cmpd="sng" algn="ctr">
+                      <a:solidFill>
+                        <a:schemeClr val="tx1"/>
+                      </a:solidFill>
+                      <a:prstDash val="solid"/>
+                      <a:round/>
+                      <a:headEnd type="none" w="med" len="med"/>
+                      <a:tailEnd type="none" w="med" len="med"/>
+                    </a:lnL>
+                    <a:lnR w="6350" cap="flat" cmpd="sng" algn="ctr">
+                      <a:solidFill>
+                        <a:schemeClr val="tx1"/>
+                      </a:solidFill>
+                      <a:prstDash val="solid"/>
+                      <a:round/>
+                      <a:headEnd type="none" w="med" len="med"/>
+                      <a:tailEnd type="none" w="med" len="med"/>
+                    </a:lnR>
+                    <a:lnT w="6350" cap="flat" cmpd="sng" algn="ctr">
+                      <a:solidFill>
+                        <a:schemeClr val="tx1"/>
+                      </a:solidFill>
+                      <a:prstDash val="solid"/>
+                      <a:round/>
+                      <a:headEnd type="none" w="med" len="med"/>
+                      <a:tailEnd type="none" w="med" len="med"/>
+                    </a:lnT>
+                    <a:lnB w="6350" cap="flat" cmpd="sng" algn="ctr">
+                      <a:solidFill>
+                        <a:schemeClr val="tx1"/>
+                      </a:solidFill>
+                      <a:prstDash val="solid"/>
+                      <a:round/>
+                      <a:headEnd type="none" w="med" len="med"/>
+                      <a:tailEnd type="none" w="med" len="med"/>
+                    </a:lnB>
+                    <a:solidFill>
+                      <a:schemeClr val="bg1"/>
+                    </a:solidFill>
+                  </a:tcPr>
+                </a:tc>
+                <a:tc>
+                  <a:txBody>
+                    <a:bodyPr/>
+                    <a:lstStyle/>
+                    <a:p>
+                      <a:pPr marL="0" marR="0" lvl="0" indent="0" algn="r" defTabSz="914400" rtl="0" eaLnBrk="1" fontAlgn="auto" latinLnBrk="1" hangingPunct="1">
+                        <a:lnSpc>
+                          <a:spcPct val="100000"/>
+                        </a:lnSpc>
+                        <a:spcBef>
+                          <a:spcPts val="0"/>
+                        </a:spcBef>
+                        <a:spcAft>
+                          <a:spcPts val="0"/>
+                        </a:spcAft>
+                        <a:buClrTx/>
+                        <a:buSzTx/>
+                        <a:buFontTx/>
+                        <a:buNone/>
+                        <a:tabLst/>
+                        <a:defRPr/>
+                      </a:pPr>
+                      <a:r>
+                        <a:rPr lang="en-US" altLang="ko-KR" sz="1300" b="0" kern="0" spc="0" dirty="0">
+                          <a:solidFill>
+                            <a:srgbClr val="000000"/>
+                          </a:solidFill>
+                          <a:effectLst/>
+                          <a:latin typeface="+mn-lt"/>
+                          <a:ea typeface="+mn-ea"/>
+                          <a:cs typeface="+mn-cs"/>
+                        </a:rPr>
+                        <a:t>1,000,000,000,000</a:t>
+                      </a:r>
+                    </a:p>
+                  </a:txBody>
+                  <a:tcPr marL="60223" marR="60223" marT="16650" marB="16650" anchor="ctr">
+                    <a:lnL w="6350" cap="flat" cmpd="sng" algn="ctr">
+                      <a:solidFill>
+                        <a:schemeClr val="tx1"/>
+                      </a:solidFill>
+                      <a:prstDash val="solid"/>
+                      <a:round/>
+                      <a:headEnd type="none" w="med" len="med"/>
+                      <a:tailEnd type="none" w="med" len="med"/>
+                    </a:lnL>
+                    <a:lnR w="6350" cap="flat" cmpd="sng" algn="ctr">
+                      <a:solidFill>
+                        <a:schemeClr val="tx1"/>
+                      </a:solidFill>
+                      <a:prstDash val="solid"/>
+                      <a:round/>
+                      <a:headEnd type="none" w="med" len="med"/>
+                      <a:tailEnd type="none" w="med" len="med"/>
+                    </a:lnR>
+                    <a:lnT w="6350" cap="flat" cmpd="sng" algn="ctr">
+                      <a:solidFill>
+                        <a:schemeClr val="tx1"/>
+                      </a:solidFill>
+                      <a:prstDash val="solid"/>
+                      <a:round/>
+                      <a:headEnd type="none" w="med" len="med"/>
+                      <a:tailEnd type="none" w="med" len="med"/>
+                    </a:lnT>
+                    <a:lnB w="6350" cap="flat" cmpd="sng" algn="ctr">
+                      <a:solidFill>
+                        <a:schemeClr val="tx1"/>
+                      </a:solidFill>
+                      <a:prstDash val="solid"/>
+                      <a:round/>
+                      <a:headEnd type="none" w="med" len="med"/>
+                      <a:tailEnd type="none" w="med" len="med"/>
+                    </a:lnB>
+                    <a:solidFill>
+                      <a:schemeClr val="bg1"/>
+                    </a:solidFill>
+                  </a:tcPr>
+                </a:tc>
+                <a:extLst>
+                  <a:ext uri="{0D108BD9-81ED-4DB2-BD59-A6C34878D82A}">
+                    <a16:rowId xmlns:a16="http://schemas.microsoft.com/office/drawing/2014/main" val="1096922772"/>
+                  </a:ext>
+                </a:extLst>
+              </a:tr>
+              <a:tr h="0">
+                <a:tc gridSpan="4">
+                  <a:txBody>
+                    <a:bodyPr/>
+                    <a:lstStyle/>
+                    <a:p>
+                      <a:pPr marL="0" marR="0" lvl="0" indent="0" algn="ctr" defTabSz="914400" rtl="0" eaLnBrk="1" fontAlgn="base" latinLnBrk="0" hangingPunct="1">
+                        <a:lnSpc>
+                          <a:spcPct val="120000"/>
+                        </a:lnSpc>
+                        <a:spcBef>
+                          <a:spcPts val="0"/>
+                        </a:spcBef>
+                        <a:spcAft>
+                          <a:spcPts val="0"/>
+                        </a:spcAft>
+                        <a:buClrTx/>
+                        <a:buSzTx/>
+                        <a:buFontTx/>
+                        <a:buNone/>
+                        <a:tabLst/>
+                        <a:defRPr/>
+                      </a:pPr>
+                      <a:r>
+                        <a:rPr lang="en-US" sz="1300" b="0" kern="0" spc="0" dirty="0">
+                          <a:solidFill>
+                            <a:srgbClr val="000000"/>
+                          </a:solidFill>
+                          <a:effectLst/>
+                          <a:latin typeface="+mn-lt"/>
+                          <a:ea typeface="+mn-ea"/>
+                          <a:cs typeface="+mn-cs"/>
+                        </a:rPr>
+                        <a:t>··· </a:t>
+                      </a:r>
+                      <a:r>
+                        <a:rPr lang="ko-KR" altLang="en-US" sz="1300" b="0" kern="0" spc="0" dirty="0">
+                          <a:solidFill>
+                            <a:srgbClr val="000000"/>
+                          </a:solidFill>
+                          <a:effectLst/>
+                          <a:latin typeface="+mn-lt"/>
+                          <a:ea typeface="+mn-ea"/>
+                          <a:cs typeface="+mn-cs"/>
+                        </a:rPr>
+                        <a:t>계속해서 </a:t>
+                      </a:r>
+                      <a:r>
+                        <a:rPr lang="en-US" altLang="ko-KR" sz="1300" b="0" kern="0" spc="0" dirty="0">
+                          <a:solidFill>
+                            <a:srgbClr val="000000"/>
+                          </a:solidFill>
+                          <a:effectLst/>
+                          <a:latin typeface="+mn-lt"/>
+                          <a:ea typeface="+mn-ea"/>
+                          <a:cs typeface="+mn-cs"/>
+                        </a:rPr>
+                        <a:t>1,000</a:t>
+                      </a:r>
+                      <a:r>
+                        <a:rPr lang="ko-KR" altLang="en-US" sz="1300" b="0" kern="0" spc="0" dirty="0">
+                          <a:solidFill>
+                            <a:srgbClr val="000000"/>
+                          </a:solidFill>
+                          <a:effectLst/>
+                          <a:latin typeface="+mn-lt"/>
+                          <a:ea typeface="+mn-ea"/>
+                          <a:cs typeface="+mn-cs"/>
+                        </a:rPr>
+                        <a:t>배씩 나가며 현재 </a:t>
+                      </a:r>
+                      <a:r>
+                        <a:rPr lang="en-US" altLang="ko-KR" sz="1300" b="0" kern="0" spc="0" dirty="0">
+                          <a:solidFill>
+                            <a:srgbClr val="000000"/>
+                          </a:solidFill>
+                          <a:effectLst/>
+                          <a:latin typeface="+mn-lt"/>
+                          <a:ea typeface="+mn-ea"/>
+                          <a:cs typeface="+mn-cs"/>
+                        </a:rPr>
+                        <a:t>10</a:t>
+                      </a:r>
+                      <a:r>
+                        <a:rPr lang="en-US" altLang="ko-KR" sz="1300" b="0" kern="0" spc="0" baseline="30000" dirty="0">
+                          <a:solidFill>
+                            <a:srgbClr val="000000"/>
+                          </a:solidFill>
+                          <a:effectLst/>
+                          <a:latin typeface="+mn-lt"/>
+                          <a:ea typeface="+mn-ea"/>
+                          <a:cs typeface="+mn-cs"/>
+                        </a:rPr>
+                        <a:t>30</a:t>
+                      </a:r>
+                      <a:r>
+                        <a:rPr lang="en-US" altLang="ko-KR" sz="1300" b="0" kern="0" spc="0" baseline="0" dirty="0">
+                          <a:solidFill>
+                            <a:srgbClr val="000000"/>
+                          </a:solidFill>
+                          <a:effectLst/>
+                          <a:latin typeface="+mn-lt"/>
+                          <a:ea typeface="+mn-ea"/>
+                          <a:cs typeface="+mn-cs"/>
+                        </a:rPr>
+                        <a:t> (</a:t>
+                      </a:r>
+                      <a:r>
+                        <a:rPr lang="ko-KR" altLang="en-US" sz="1300" b="0" kern="0" spc="0" baseline="0" dirty="0" err="1">
+                          <a:solidFill>
+                            <a:srgbClr val="000000"/>
+                          </a:solidFill>
+                          <a:effectLst/>
+                          <a:latin typeface="+mn-lt"/>
+                          <a:ea typeface="+mn-ea"/>
+                          <a:cs typeface="+mn-cs"/>
+                        </a:rPr>
+                        <a:t>퀘타</a:t>
+                      </a:r>
+                      <a:r>
+                        <a:rPr lang="en-US" altLang="ko-KR" sz="1300" b="0" kern="0" spc="0" baseline="0" dirty="0">
+                          <a:solidFill>
+                            <a:srgbClr val="000000"/>
+                          </a:solidFill>
+                          <a:effectLst/>
+                          <a:latin typeface="+mn-lt"/>
+                          <a:ea typeface="+mn-ea"/>
+                          <a:cs typeface="+mn-cs"/>
+                        </a:rPr>
+                        <a:t>, </a:t>
+                      </a:r>
+                      <a:r>
+                        <a:rPr lang="en-US" altLang="ko-KR" sz="1300" b="0" kern="0" spc="0" baseline="0" dirty="0" err="1">
+                          <a:solidFill>
+                            <a:srgbClr val="000000"/>
+                          </a:solidFill>
+                          <a:effectLst/>
+                          <a:latin typeface="+mn-lt"/>
+                          <a:ea typeface="+mn-ea"/>
+                          <a:cs typeface="+mn-cs"/>
+                        </a:rPr>
+                        <a:t>quetta</a:t>
+                      </a:r>
+                      <a:r>
+                        <a:rPr lang="en-US" altLang="ko-KR" sz="1300" b="0" kern="0" spc="0" baseline="0" dirty="0">
+                          <a:solidFill>
+                            <a:srgbClr val="000000"/>
+                          </a:solidFill>
+                          <a:effectLst/>
+                          <a:latin typeface="+mn-lt"/>
+                          <a:ea typeface="+mn-ea"/>
+                          <a:cs typeface="+mn-cs"/>
+                        </a:rPr>
+                        <a:t>, Q)</a:t>
+                      </a:r>
+                      <a:r>
+                        <a:rPr lang="ko-KR" altLang="en-US" sz="1300" b="0" kern="0" spc="0" baseline="0" dirty="0">
+                          <a:solidFill>
+                            <a:srgbClr val="000000"/>
+                          </a:solidFill>
+                          <a:effectLst/>
+                          <a:latin typeface="+mn-lt"/>
+                          <a:ea typeface="+mn-ea"/>
+                          <a:cs typeface="+mn-cs"/>
+                        </a:rPr>
+                        <a:t>까지 정의되어 있음</a:t>
+                      </a:r>
+                      <a:endParaRPr lang="en-US" altLang="ko-KR" sz="1300" b="0" kern="0" spc="0" baseline="0" dirty="0">
+                        <a:solidFill>
+                          <a:srgbClr val="000000"/>
+                        </a:solidFill>
+                        <a:effectLst/>
+                        <a:latin typeface="+mn-lt"/>
+                        <a:ea typeface="+mn-ea"/>
+                        <a:cs typeface="+mn-cs"/>
+                      </a:endParaRPr>
+                    </a:p>
+                  </a:txBody>
+                  <a:tcPr marL="60223" marR="60223" marT="16650" marB="16650" anchor="ctr">
+                    <a:lnL w="12700" cap="flat" cmpd="sng" algn="ctr">
+                      <a:solidFill>
+                        <a:schemeClr val="tx1"/>
+                      </a:solidFill>
+                      <a:prstDash val="solid"/>
+                      <a:round/>
+                      <a:headEnd type="none" w="med" len="med"/>
+                      <a:tailEnd type="none" w="med" len="med"/>
+                    </a:lnL>
+                    <a:lnR w="12700" cap="flat" cmpd="sng" algn="ctr">
+                      <a:solidFill>
+                        <a:schemeClr val="tx1"/>
+                      </a:solidFill>
+                      <a:prstDash val="solid"/>
+                      <a:round/>
+                      <a:headEnd type="none" w="med" len="med"/>
+                      <a:tailEnd type="none" w="med" len="med"/>
+                    </a:lnR>
+                    <a:lnT w="6350" cap="flat" cmpd="sng" algn="ctr">
+                      <a:solidFill>
+                        <a:schemeClr val="tx1"/>
+                      </a:solidFill>
+                      <a:prstDash val="solid"/>
+                      <a:round/>
+                      <a:headEnd type="none" w="med" len="med"/>
+                      <a:tailEnd type="none" w="med" len="med"/>
+                    </a:lnT>
+                    <a:lnB w="12700" cap="flat" cmpd="sng" algn="ctr">
+                      <a:solidFill>
+                        <a:schemeClr val="tx1"/>
+                      </a:solidFill>
+                      <a:prstDash val="solid"/>
+                      <a:round/>
+                      <a:headEnd type="none" w="med" len="med"/>
+                      <a:tailEnd type="none" w="med" len="med"/>
+                    </a:lnB>
+                    <a:solidFill>
+                      <a:schemeClr val="bg1"/>
+                    </a:solidFill>
+                  </a:tcPr>
+                </a:tc>
+                <a:tc hMerge="1">
+                  <a:txBody>
+                    <a:bodyPr/>
+                    <a:lstStyle/>
+                    <a:p>
+                      <a:pPr marL="0" marR="0" indent="0" algn="ctr" fontAlgn="base" latinLnBrk="0">
+                        <a:lnSpc>
+                          <a:spcPct val="120000"/>
+                        </a:lnSpc>
+                        <a:spcBef>
+                          <a:spcPts val="0"/>
+                        </a:spcBef>
+                        <a:spcAft>
+                          <a:spcPts val="0"/>
+                        </a:spcAft>
+                      </a:pPr>
+                      <a:endParaRPr lang="en-US" altLang="ko-KR" sz="1300" b="0" kern="0" spc="0" dirty="0">
+                        <a:solidFill>
+                          <a:srgbClr val="000000"/>
+                        </a:solidFill>
+                        <a:effectLst/>
+                        <a:latin typeface="+mn-lt"/>
+                        <a:ea typeface="+mn-ea"/>
+                        <a:cs typeface="+mn-cs"/>
+                      </a:endParaRPr>
+                    </a:p>
+                  </a:txBody>
+                  <a:tcPr marL="60223" marR="60223" marT="16650" marB="16650" anchor="ctr">
+                    <a:lnL w="6350" cap="flat" cmpd="sng" algn="ctr">
+                      <a:solidFill>
+                        <a:schemeClr val="tx1"/>
+                      </a:solidFill>
+                      <a:prstDash val="solid"/>
+                      <a:round/>
+                      <a:headEnd type="none" w="med" len="med"/>
+                      <a:tailEnd type="none" w="med" len="med"/>
+                    </a:lnL>
+                    <a:lnR w="6350" cap="flat" cmpd="sng" algn="ctr">
+                      <a:solidFill>
+                        <a:schemeClr val="tx1"/>
+                      </a:solidFill>
+                      <a:prstDash val="solid"/>
+                      <a:round/>
+                      <a:headEnd type="none" w="med" len="med"/>
+                      <a:tailEnd type="none" w="med" len="med"/>
+                    </a:lnR>
+                    <a:lnT w="6350" cap="flat" cmpd="sng" algn="ctr">
+                      <a:solidFill>
+                        <a:schemeClr val="tx1"/>
+                      </a:solidFill>
+                      <a:prstDash val="solid"/>
+                      <a:round/>
+                      <a:headEnd type="none" w="med" len="med"/>
+                      <a:tailEnd type="none" w="med" len="med"/>
+                    </a:lnT>
+                    <a:lnB w="12700" cap="flat" cmpd="sng" algn="ctr">
+                      <a:solidFill>
+                        <a:schemeClr val="tx1"/>
+                      </a:solidFill>
+                      <a:prstDash val="solid"/>
+                      <a:round/>
+                      <a:headEnd type="none" w="med" len="med"/>
+                      <a:tailEnd type="none" w="med" len="med"/>
+                    </a:lnB>
+                    <a:solidFill>
+                      <a:schemeClr val="bg1"/>
+                    </a:solidFill>
+                  </a:tcPr>
+                </a:tc>
+                <a:tc hMerge="1">
+                  <a:txBody>
+                    <a:bodyPr/>
+                    <a:lstStyle/>
+                    <a:p>
+                      <a:pPr marL="0" marR="0" indent="0" algn="ctr" fontAlgn="base" latinLnBrk="0">
+                        <a:lnSpc>
+                          <a:spcPct val="120000"/>
+                        </a:lnSpc>
+                        <a:spcBef>
+                          <a:spcPts val="0"/>
+                        </a:spcBef>
+                        <a:spcAft>
+                          <a:spcPts val="0"/>
+                        </a:spcAft>
+                      </a:pPr>
+                      <a:endParaRPr lang="en-US" altLang="ko-KR" sz="1300" b="0" kern="0" spc="0" dirty="0">
+                        <a:solidFill>
+                          <a:srgbClr val="000000"/>
+                        </a:solidFill>
+                        <a:effectLst/>
+                        <a:latin typeface="+mn-lt"/>
+                        <a:ea typeface="+mn-ea"/>
+                        <a:cs typeface="+mn-cs"/>
+                      </a:endParaRPr>
+                    </a:p>
+                  </a:txBody>
+                  <a:tcPr marL="60223" marR="60223" marT="16650" marB="16650" anchor="ctr">
+                    <a:lnL w="6350" cap="flat" cmpd="sng" algn="ctr">
+                      <a:solidFill>
+                        <a:schemeClr val="tx1"/>
+                      </a:solidFill>
+                      <a:prstDash val="solid"/>
+                      <a:round/>
+                      <a:headEnd type="none" w="med" len="med"/>
+                      <a:tailEnd type="none" w="med" len="med"/>
+                    </a:lnL>
+                    <a:lnR w="6350" cap="flat" cmpd="sng" algn="ctr">
+                      <a:solidFill>
+                        <a:schemeClr val="tx1"/>
+                      </a:solidFill>
+                      <a:prstDash val="solid"/>
+                      <a:round/>
+                      <a:headEnd type="none" w="med" len="med"/>
+                      <a:tailEnd type="none" w="med" len="med"/>
+                    </a:lnR>
+                    <a:lnT w="6350" cap="flat" cmpd="sng" algn="ctr">
+                      <a:solidFill>
+                        <a:schemeClr val="tx1"/>
+                      </a:solidFill>
+                      <a:prstDash val="solid"/>
+                      <a:round/>
+                      <a:headEnd type="none" w="med" len="med"/>
+                      <a:tailEnd type="none" w="med" len="med"/>
+                    </a:lnT>
+                    <a:lnB w="12700" cap="flat" cmpd="sng" algn="ctr">
+                      <a:solidFill>
+                        <a:schemeClr val="tx1"/>
+                      </a:solidFill>
+                      <a:prstDash val="solid"/>
+                      <a:round/>
+                      <a:headEnd type="none" w="med" len="med"/>
+                      <a:tailEnd type="none" w="med" len="med"/>
+                    </a:lnB>
+                    <a:solidFill>
+                      <a:schemeClr val="bg1"/>
+                    </a:solidFill>
+                  </a:tcPr>
+                </a:tc>
+                <a:tc hMerge="1">
+                  <a:txBody>
+                    <a:bodyPr/>
+                    <a:lstStyle/>
+                    <a:p>
+                      <a:pPr marL="0" marR="0" indent="0" algn="ctr" fontAlgn="base" latinLnBrk="0">
+                        <a:lnSpc>
+                          <a:spcPct val="120000"/>
+                        </a:lnSpc>
+                        <a:spcBef>
+                          <a:spcPts val="0"/>
+                        </a:spcBef>
+                        <a:spcAft>
+                          <a:spcPts val="0"/>
+                        </a:spcAft>
+                      </a:pPr>
+                      <a:endParaRPr lang="en-US" sz="1300" b="0" kern="0" spc="0" dirty="0">
+                        <a:solidFill>
+                          <a:srgbClr val="000000"/>
+                        </a:solidFill>
+                        <a:effectLst/>
+                        <a:latin typeface="+mn-lt"/>
+                        <a:ea typeface="+mn-ea"/>
+                        <a:cs typeface="+mn-cs"/>
+                      </a:endParaRPr>
+                    </a:p>
+                  </a:txBody>
+                  <a:tcPr marL="60223" marR="60223" marT="16650" marB="16650" anchor="ctr">
+                    <a:lnL w="12700" cap="flat" cmpd="sng" algn="ctr">
+                      <a:solidFill>
+                        <a:schemeClr val="tx1"/>
+                      </a:solidFill>
+                      <a:prstDash val="solid"/>
+                      <a:round/>
+                      <a:headEnd type="none" w="med" len="med"/>
+                      <a:tailEnd type="none" w="med" len="med"/>
+                    </a:lnL>
+                    <a:lnR w="6350" cap="flat" cmpd="sng" algn="ctr">
+                      <a:solidFill>
+                        <a:schemeClr val="tx1"/>
+                      </a:solidFill>
+                      <a:prstDash val="solid"/>
+                      <a:round/>
+                      <a:headEnd type="none" w="med" len="med"/>
+                      <a:tailEnd type="none" w="med" len="med"/>
+                    </a:lnR>
+                    <a:lnT w="6350" cap="flat" cmpd="sng" algn="ctr">
+                      <a:solidFill>
+                        <a:schemeClr val="tx1"/>
+                      </a:solidFill>
+                      <a:prstDash val="solid"/>
+                      <a:round/>
+                      <a:headEnd type="none" w="med" len="med"/>
+                      <a:tailEnd type="none" w="med" len="med"/>
+                    </a:lnT>
+                    <a:lnB w="12700" cap="flat" cmpd="sng" algn="ctr">
+                      <a:solidFill>
+                        <a:schemeClr val="tx1"/>
+                      </a:solidFill>
+                      <a:prstDash val="solid"/>
+                      <a:round/>
+                      <a:headEnd type="none" w="med" len="med"/>
+                      <a:tailEnd type="none" w="med" len="med"/>
+                    </a:lnB>
+                    <a:solidFill>
+                      <a:schemeClr val="bg1"/>
+                    </a:solidFill>
+                  </a:tcPr>
+                </a:tc>
+                <a:extLst>
+                  <a:ext uri="{0D108BD9-81ED-4DB2-BD59-A6C34878D82A}">
+                    <a16:rowId xmlns:a16="http://schemas.microsoft.com/office/drawing/2014/main" val="541274545"/>
+                  </a:ext>
+                </a:extLst>
+              </a:tr>
+            </a:tbl>
+          </a:graphicData>
+        </a:graphic>
+      </p:graphicFrame>
     </p:spTree>
     <p:extLst>
       <p:ext uri="{BB962C8B-B14F-4D97-AF65-F5344CB8AC3E}">
-        <p14:creationId xmlns:p14="http://schemas.microsoft.com/office/powerpoint/2010/main" val="3533296213"/>
+        <p14:creationId xmlns:p14="http://schemas.microsoft.com/office/powerpoint/2010/main" val="4281146838"/>
       </p:ext>
     </p:extLst>
   </p:cSld>
